--- a/docs/guides/pms-tour.pptx
+++ b/docs/guides/pms-tour.pptx
@@ -19,9 +19,10 @@
     <p:sldId id="267" r:id="rId13"/>
     <p:sldId id="268" r:id="rId14"/>
     <p:sldId id="269" r:id="rId15"/>
+    <p:sldId id="270" r:id="rId16"/>
   </p:sldIdLst>
   <p:notesMasterIdLst>
-    <p:notesMasterId r:id="rId16"/>
+    <p:notesMasterId r:id="rId17"/>
   </p:notesMasterIdLst>
   <p:sldSz cx="9144000" cy="5143500"/>
   <p:notesSz cx="5143500" cy="9144000"/>
@@ -779,7 +780,7 @@
           <a:p>
             <a:r>
               <a:rPr lang="en-US" dirty="0"/>
-              <a:t>Renters who forget their password ask the landlord to resend the activation link.</a:t>
+              <a:t/>
             </a:r>
             <a:endParaRPr lang="en-US" dirty="0"/>
           </a:p>
@@ -867,7 +868,7 @@
           <a:p>
             <a:r>
               <a:rPr lang="en-US" dirty="0"/>
-              <a:t/>
+              <a:t>Renters who forget their password ask the landlord to resend the activation link.</a:t>
             </a:r>
             <a:endParaRPr lang="en-US" dirty="0"/>
           </a:p>
@@ -997,6 +998,94 @@
 </p:notes>
 </file>
 
+<file path=ppt/notesSlides/notesSlide15.xml><?xml version="1.0" encoding="utf-8"?>
+<p:notes xmlns:a="http://schemas.openxmlformats.org/drawingml/2006/main" xmlns:r="http://schemas.openxmlformats.org/officeDocument/2006/relationships" xmlns:p="http://schemas.openxmlformats.org/presentationml/2006/main">
+  <p:cSld>
+    <p:spTree>
+      <p:nvGrpSpPr>
+        <p:cNvPr id="1" name=""/>
+        <p:cNvGrpSpPr/>
+        <p:nvPr/>
+      </p:nvGrpSpPr>
+      <p:grpSpPr>
+        <a:xfrm>
+          <a:off x="0" y="0"/>
+          <a:ext cx="0" cy="0"/>
+          <a:chOff x="0" y="0"/>
+          <a:chExt cx="0" cy="0"/>
+        </a:xfrm>
+      </p:grpSpPr>
+      <p:sp>
+        <p:nvSpPr>
+          <p:cNvPr id="2" name="Slide Image Placeholder 1"/>
+          <p:cNvSpPr>
+            <a:spLocks noGrp="1" noRot="1" noChangeAspect="1"/>
+          </p:cNvSpPr>
+          <p:nvPr>
+            <p:ph type="sldImg"/>
+          </p:nvPr>
+        </p:nvSpPr>
+        <p:spPr/>
+      </p:sp>
+      <p:sp>
+        <p:nvSpPr>
+          <p:cNvPr id="3" name="Notes Placeholder 2"/>
+          <p:cNvSpPr>
+            <a:spLocks noGrp="1"/>
+          </p:cNvSpPr>
+          <p:nvPr>
+            <p:ph type="body" idx="1"/>
+          </p:nvPr>
+        </p:nvSpPr>
+        <p:spPr/>
+        <p:txBody>
+          <a:bodyPr/>
+          <a:lstStyle/>
+          <a:p>
+            <a:r>
+              <a:rPr lang="en-US" dirty="0"/>
+              <a:t/>
+            </a:r>
+            <a:endParaRPr lang="en-US" dirty="0"/>
+          </a:p>
+        </p:txBody>
+      </p:sp>
+      <p:sp>
+        <p:nvSpPr>
+          <p:cNvPr id="4" name="Slide Number Placeholder 3"/>
+          <p:cNvSpPr>
+            <a:spLocks noGrp="1"/>
+          </p:cNvSpPr>
+          <p:nvPr>
+            <p:ph type="sldNum" sz="quarter" idx="10"/>
+          </p:nvPr>
+        </p:nvSpPr>
+        <p:spPr/>
+        <p:txBody>
+          <a:bodyPr/>
+          <a:lstStyle/>
+          <a:p>
+            <a:fld id="{F7021451-1387-4CA6-816F-3879F97B5CBC}" type="slidenum">
+              <a:rPr lang="en-US"/>
+              <a:t>15</a:t>
+            </a:fld>
+            <a:endParaRPr lang="en-US"/>
+          </a:p>
+        </p:txBody>
+      </p:sp>
+    </p:spTree>
+    <p:extLst>
+      <p:ext uri="{BB962C8B-B14F-4D97-AF65-F5344CB8AC3E}">
+        <p14:creationId xmlns:p14="http://schemas.microsoft.com/office/powerpoint/2010/main" val="1024086991"/>
+      </p:ext>
+    </p:extLst>
+  </p:cSld>
+  <p:clrMapOvr>
+    <a:masterClrMapping/>
+  </p:clrMapOvr>
+</p:notes>
+</file>
+
 <file path=ppt/notesSlides/notesSlide2.xml><?xml version="1.0" encoding="utf-8"?>
 <p:notes xmlns:a="http://schemas.openxmlformats.org/drawingml/2006/main" xmlns:r="http://schemas.openxmlformats.org/officeDocument/2006/relationships" xmlns:p="http://schemas.openxmlformats.org/presentationml/2006/main">
   <p:cSld>
@@ -1043,7 +1132,7 @@
           <a:p>
             <a:r>
               <a:rPr lang="en-US" dirty="0"/>
-              <a:t>The order a landlord uses PMS in: set up once, then lease, bill and collect every month, and track.</a:t>
+              <a:t>Every line here is something PMS does today. Ask which of these hurts them most, and start the demo there.</a:t>
             </a:r>
             <a:endParaRPr lang="en-US" dirty="0"/>
           </a:p>
@@ -1131,7 +1220,7 @@
           <a:p>
             <a:r>
               <a:rPr lang="en-US" dirty="0"/>
-              <a:t>Below the four figures: collections over six months, units by status, the five largest unpaid invoices and recent payments.</a:t>
+              <a:t>The order a landlord uses PMS in: set up once, then lease, bill and collect every month, and track.</a:t>
             </a:r>
             <a:endParaRPr lang="en-US" dirty="0"/>
           </a:p>
@@ -1219,7 +1308,7 @@
           <a:p>
             <a:r>
               <a:rPr lang="en-US" dirty="0"/>
-              <a:t>Our team can enter all of this for you during setup.</a:t>
+              <a:t>Below the four figures: collections over six months, units by status, the five largest unpaid invoices and recent payments.</a:t>
             </a:r>
             <a:endParaRPr lang="en-US" dirty="0"/>
           </a:p>
@@ -1307,7 +1396,7 @@
           <a:p>
             <a:r>
               <a:rPr lang="en-US" dirty="0"/>
-              <a:t>End or terminate a lease when it finishes; every change is kept in the lease history.</a:t>
+              <a:t>Our team can enter all of this for you during setup.</a:t>
             </a:r>
             <a:endParaRPr lang="en-US" dirty="0"/>
           </a:p>
@@ -1395,7 +1484,7 @@
           <a:p>
             <a:r>
               <a:rPr lang="en-US" dirty="0"/>
-              <a:t>Invoices are created per period in a few clicks. Statuses: draft, unpaid, partial, paid, overdue, cancelled. Each downloads as a PDF.</a:t>
+              <a:t>End or terminate a lease when it finishes; every change is kept in the lease history.</a:t>
             </a:r>
             <a:endParaRPr lang="en-US" dirty="0"/>
           </a:p>
@@ -1483,7 +1572,7 @@
           <a:p>
             <a:r>
               <a:rPr lang="en-US" dirty="0"/>
-              <a:t>Renters keep paying the way they do today; PMS records it and produces the receipt.</a:t>
+              <a:t>Invoices are created per period in a few clicks. Statuses: draft, unpaid, partial, paid, overdue, cancelled. Each downloads as a PDF.</a:t>
             </a:r>
             <a:endParaRPr lang="en-US" dirty="0"/>
           </a:p>
@@ -1571,7 +1660,7 @@
           <a:p>
             <a:r>
               <a:rPr lang="en-US" dirty="0"/>
-              <a:t/>
+              <a:t>Renters keep paying the way they do today; PMS records it and produces the receipt.</a:t>
             </a:r>
             <a:endParaRPr lang="en-US" dirty="0"/>
           </a:p>
@@ -2351,7 +2440,7 @@
                 <a:ea typeface="Arial" pitchFamily="34" charset="-122"/>
                 <a:cs typeface="Arial" pitchFamily="34" charset="-120"/>
               </a:rPr>
-              <a:t>INSIGHT</a:t>
+              <a:t>MARKETING</a:t>
             </a:r>
             <a:endParaRPr lang="en-US" sz="900" dirty="0"/>
           </a:p>
@@ -2390,7 +2479,7 @@
                 <a:ea typeface="Arial" pitchFamily="34" charset="-122"/>
                 <a:cs typeface="Arial" pitchFamily="34" charset="-120"/>
               </a:rPr>
-              <a:t>Seven reports, ready to download</a:t>
+              <a:t>Your own website</a:t>
             </a:r>
             <a:endParaRPr lang="en-US" sz="2600" dirty="0"/>
           </a:p>
@@ -2398,52 +2487,31 @@
       </p:sp>
       <p:sp>
         <p:nvSpPr>
-          <p:cNvPr id="4" name="Shape 2"/>
-          <p:cNvSpPr/>
-          <p:nvPr/>
-        </p:nvSpPr>
-        <p:spPr>
-          <a:xfrm>
-            <a:off x="457200" y="1271016"/>
-            <a:ext cx="109728" cy="109728"/>
-          </a:xfrm>
-          <a:prstGeom prst="rect">
-            <a:avLst/>
-          </a:prstGeom>
-          <a:solidFill>
-            <a:srgbClr val="0F766E"/>
-          </a:solidFill>
-          <a:ln w="12700">
-            <a:solidFill>
-              <a:srgbClr val="0F766E"/>
-            </a:solidFill>
-            <a:prstDash val="solid"/>
-          </a:ln>
-        </p:spPr>
-      </p:sp>
-      <p:sp>
-        <p:nvSpPr>
-          <p:cNvPr id="5" name="Text 3"/>
-          <p:cNvSpPr/>
-          <p:nvPr/>
-        </p:nvSpPr>
-        <p:spPr>
-          <a:xfrm>
-            <a:off x="685800" y="1188720"/>
-            <a:ext cx="3200400" cy="274320"/>
-          </a:xfrm>
-          <a:prstGeom prst="rect">
-            <a:avLst/>
-          </a:prstGeom>
-          <a:noFill/>
-          <a:ln/>
-        </p:spPr>
-        <p:txBody>
-          <a:bodyPr wrap="square" lIns="0" tIns="0" rIns="0" bIns="0" rtlCol="0" anchor="ctr"/>
-          <a:lstStyle/>
-          <a:p>
-            <a:pPr indent="0" marL="0">
-              <a:buNone/>
+          <p:cNvPr id="4" name="Text 2"/>
+          <p:cNvSpPr/>
+          <p:nvPr/>
+        </p:nvSpPr>
+        <p:spPr>
+          <a:xfrm>
+            <a:off x="457200" y="1188720"/>
+            <a:ext cx="3337560" cy="3291840"/>
+          </a:xfrm>
+          <a:prstGeom prst="rect">
+            <a:avLst/>
+          </a:prstGeom>
+          <a:noFill/>
+          <a:ln/>
+        </p:spPr>
+        <p:txBody>
+          <a:bodyPr wrap="square" lIns="0" tIns="0" rIns="0" bIns="0" rtlCol="0" anchor="t"/>
+          <a:lstStyle/>
+          <a:p>
+            <a:pPr marL="177800" indent="-177800">
+              <a:spcAft>
+                <a:spcPts val="700"/>
+              </a:spcAft>
+              <a:buSzPct val="100000"/>
+              <a:buChar char="•"/>
             </a:pPr>
             <a:r>
               <a:rPr lang="en-US" sz="1250" dirty="0">
@@ -2454,60 +2522,17 @@
                 <a:ea typeface="Arial" pitchFamily="34" charset="-122"/>
                 <a:cs typeface="Arial" pitchFamily="34" charset="-120"/>
               </a:rPr>
-              <a:t>Monthly rent collection</a:t>
+              <a:t>Home, About, Units, News and Contact pages under your name.</a:t>
             </a:r>
             <a:endParaRPr lang="en-US" sz="1250" dirty="0"/>
           </a:p>
-        </p:txBody>
-      </p:sp>
-      <p:sp>
-        <p:nvSpPr>
-          <p:cNvPr id="6" name="Shape 4"/>
-          <p:cNvSpPr/>
-          <p:nvPr/>
-        </p:nvSpPr>
-        <p:spPr>
-          <a:xfrm>
-            <a:off x="457200" y="1673352"/>
-            <a:ext cx="109728" cy="109728"/>
-          </a:xfrm>
-          <a:prstGeom prst="rect">
-            <a:avLst/>
-          </a:prstGeom>
-          <a:solidFill>
-            <a:srgbClr val="0F766E"/>
-          </a:solidFill>
-          <a:ln w="12700">
-            <a:solidFill>
-              <a:srgbClr val="0F766E"/>
-            </a:solidFill>
-            <a:prstDash val="solid"/>
-          </a:ln>
-        </p:spPr>
-      </p:sp>
-      <p:sp>
-        <p:nvSpPr>
-          <p:cNvPr id="7" name="Text 5"/>
-          <p:cNvSpPr/>
-          <p:nvPr/>
-        </p:nvSpPr>
-        <p:spPr>
-          <a:xfrm>
-            <a:off x="685800" y="1591056"/>
-            <a:ext cx="3200400" cy="274320"/>
-          </a:xfrm>
-          <a:prstGeom prst="rect">
-            <a:avLst/>
-          </a:prstGeom>
-          <a:noFill/>
-          <a:ln/>
-        </p:spPr>
-        <p:txBody>
-          <a:bodyPr wrap="square" lIns="0" tIns="0" rIns="0" bIns="0" rtlCol="0" anchor="ctr"/>
-          <a:lstStyle/>
-          <a:p>
-            <a:pPr indent="0" marL="0">
-              <a:buNone/>
+          <a:p>
+            <a:pPr marL="177800" indent="-177800">
+              <a:spcAft>
+                <a:spcPts val="700"/>
+              </a:spcAft>
+              <a:buSzPct val="100000"/>
+              <a:buChar char="•"/>
             </a:pPr>
             <a:r>
               <a:rPr lang="en-US" sz="1250" dirty="0">
@@ -2518,60 +2543,17 @@
                 <a:ea typeface="Arial" pitchFamily="34" charset="-122"/>
                 <a:cs typeface="Arial" pitchFamily="34" charset="-120"/>
               </a:rPr>
-              <a:t>Outstanding rent</a:t>
+              <a:t>Vacant units are listed automatically, with search and filters.</a:t>
             </a:r>
             <a:endParaRPr lang="en-US" sz="1250" dirty="0"/>
           </a:p>
-        </p:txBody>
-      </p:sp>
-      <p:sp>
-        <p:nvSpPr>
-          <p:cNvPr id="8" name="Shape 6"/>
-          <p:cNvSpPr/>
-          <p:nvPr/>
-        </p:nvSpPr>
-        <p:spPr>
-          <a:xfrm>
-            <a:off x="457200" y="2075688"/>
-            <a:ext cx="109728" cy="109728"/>
-          </a:xfrm>
-          <a:prstGeom prst="rect">
-            <a:avLst/>
-          </a:prstGeom>
-          <a:solidFill>
-            <a:srgbClr val="0F766E"/>
-          </a:solidFill>
-          <a:ln w="12700">
-            <a:solidFill>
-              <a:srgbClr val="0F766E"/>
-            </a:solidFill>
-            <a:prstDash val="solid"/>
-          </a:ln>
-        </p:spPr>
-      </p:sp>
-      <p:sp>
-        <p:nvSpPr>
-          <p:cNvPr id="9" name="Text 7"/>
-          <p:cNvSpPr/>
-          <p:nvPr/>
-        </p:nvSpPr>
-        <p:spPr>
-          <a:xfrm>
-            <a:off x="685800" y="1993392"/>
-            <a:ext cx="3200400" cy="274320"/>
-          </a:xfrm>
-          <a:prstGeom prst="rect">
-            <a:avLst/>
-          </a:prstGeom>
-          <a:noFill/>
-          <a:ln/>
-        </p:spPr>
-        <p:txBody>
-          <a:bodyPr wrap="square" lIns="0" tIns="0" rIns="0" bIns="0" rtlCol="0" anchor="ctr"/>
-          <a:lstStyle/>
-          <a:p>
-            <a:pPr indent="0" marL="0">
-              <a:buNone/>
+          <a:p>
+            <a:pPr marL="177800" indent="-177800">
+              <a:spcAft>
+                <a:spcPts val="700"/>
+              </a:spcAft>
+              <a:buSzPct val="100000"/>
+              <a:buChar char="•"/>
             </a:pPr>
             <a:r>
               <a:rPr lang="en-US" sz="1250" dirty="0">
@@ -2582,60 +2564,17 @@
                 <a:ea typeface="Arial" pitchFamily="34" charset="-122"/>
                 <a:cs typeface="Arial" pitchFamily="34" charset="-120"/>
               </a:rPr>
-              <a:t>Occupancy</a:t>
+              <a:t>Messages from the contact form land in your inbox.</a:t>
             </a:r>
             <a:endParaRPr lang="en-US" sz="1250" dirty="0"/>
           </a:p>
-        </p:txBody>
-      </p:sp>
-      <p:sp>
-        <p:nvSpPr>
-          <p:cNvPr id="10" name="Shape 8"/>
-          <p:cNvSpPr/>
-          <p:nvPr/>
-        </p:nvSpPr>
-        <p:spPr>
-          <a:xfrm>
-            <a:off x="457200" y="2478024"/>
-            <a:ext cx="109728" cy="109728"/>
-          </a:xfrm>
-          <a:prstGeom prst="rect">
-            <a:avLst/>
-          </a:prstGeom>
-          <a:solidFill>
-            <a:srgbClr val="0F766E"/>
-          </a:solidFill>
-          <a:ln w="12700">
-            <a:solidFill>
-              <a:srgbClr val="0F766E"/>
-            </a:solidFill>
-            <a:prstDash val="solid"/>
-          </a:ln>
-        </p:spPr>
-      </p:sp>
-      <p:sp>
-        <p:nvSpPr>
-          <p:cNvPr id="11" name="Text 9"/>
-          <p:cNvSpPr/>
-          <p:nvPr/>
-        </p:nvSpPr>
-        <p:spPr>
-          <a:xfrm>
-            <a:off x="685800" y="2395728"/>
-            <a:ext cx="3200400" cy="274320"/>
-          </a:xfrm>
-          <a:prstGeom prst="rect">
-            <a:avLst/>
-          </a:prstGeom>
-          <a:noFill/>
-          <a:ln/>
-        </p:spPr>
-        <p:txBody>
-          <a:bodyPr wrap="square" lIns="0" tIns="0" rIns="0" bIns="0" rtlCol="0" anchor="ctr"/>
-          <a:lstStyle/>
-          <a:p>
-            <a:pPr indent="0" marL="0">
-              <a:buNone/>
+          <a:p>
+            <a:pPr marL="177800" indent="-177800">
+              <a:spcAft>
+                <a:spcPts val="700"/>
+              </a:spcAft>
+              <a:buSzPct val="100000"/>
+              <a:buChar char="•"/>
             </a:pPr>
             <a:r>
               <a:rPr lang="en-US" sz="1250" dirty="0">
@@ -2646,7 +2585,7 @@
                 <a:ea typeface="Arial" pitchFamily="34" charset="-122"/>
                 <a:cs typeface="Arial" pitchFamily="34" charset="-120"/>
               </a:rPr>
-              <a:t>Property income</a:t>
+              <a:t>Post announcements, such as new units or a water cut.</a:t>
             </a:r>
             <a:endParaRPr lang="en-US" sz="1250" dirty="0"/>
           </a:p>
@@ -2654,245 +2593,14 @@
       </p:sp>
       <p:sp>
         <p:nvSpPr>
-          <p:cNvPr id="12" name="Shape 10"/>
-          <p:cNvSpPr/>
-          <p:nvPr/>
-        </p:nvSpPr>
-        <p:spPr>
-          <a:xfrm>
-            <a:off x="457200" y="2880360"/>
-            <a:ext cx="109728" cy="109728"/>
-          </a:xfrm>
-          <a:prstGeom prst="rect">
-            <a:avLst/>
-          </a:prstGeom>
-          <a:solidFill>
-            <a:srgbClr val="0F766E"/>
-          </a:solidFill>
-          <a:ln w="12700">
-            <a:solidFill>
-              <a:srgbClr val="0F766E"/>
-            </a:solidFill>
-            <a:prstDash val="solid"/>
-          </a:ln>
-        </p:spPr>
-      </p:sp>
-      <p:sp>
-        <p:nvSpPr>
-          <p:cNvPr id="13" name="Text 11"/>
-          <p:cNvSpPr/>
-          <p:nvPr/>
-        </p:nvSpPr>
-        <p:spPr>
-          <a:xfrm>
-            <a:off x="685800" y="2798064"/>
-            <a:ext cx="3200400" cy="274320"/>
-          </a:xfrm>
-          <a:prstGeom prst="rect">
-            <a:avLst/>
-          </a:prstGeom>
-          <a:noFill/>
-          <a:ln/>
-        </p:spPr>
-        <p:txBody>
-          <a:bodyPr wrap="square" lIns="0" tIns="0" rIns="0" bIns="0" rtlCol="0" anchor="ctr"/>
-          <a:lstStyle/>
-          <a:p>
-            <a:pPr indent="0" marL="0">
-              <a:buNone/>
-            </a:pPr>
-            <a:r>
-              <a:rPr lang="en-US" sz="1250" dirty="0">
-                <a:solidFill>
-                  <a:srgbClr val="0F1F1E"/>
-                </a:solidFill>
-                <a:latin typeface="Arial" pitchFamily="34" charset="0"/>
-                <a:ea typeface="Arial" pitchFamily="34" charset="-122"/>
-                <a:cs typeface="Arial" pitchFamily="34" charset="-120"/>
-              </a:rPr>
-              <a:t>Expenses</a:t>
-            </a:r>
-            <a:endParaRPr lang="en-US" sz="1250" dirty="0"/>
-          </a:p>
-        </p:txBody>
-      </p:sp>
-      <p:sp>
-        <p:nvSpPr>
-          <p:cNvPr id="14" name="Shape 12"/>
-          <p:cNvSpPr/>
-          <p:nvPr/>
-        </p:nvSpPr>
-        <p:spPr>
-          <a:xfrm>
-            <a:off x="457200" y="3282696"/>
-            <a:ext cx="109728" cy="109728"/>
-          </a:xfrm>
-          <a:prstGeom prst="rect">
-            <a:avLst/>
-          </a:prstGeom>
-          <a:solidFill>
-            <a:srgbClr val="0F766E"/>
-          </a:solidFill>
-          <a:ln w="12700">
-            <a:solidFill>
-              <a:srgbClr val="0F766E"/>
-            </a:solidFill>
-            <a:prstDash val="solid"/>
-          </a:ln>
-        </p:spPr>
-      </p:sp>
-      <p:sp>
-        <p:nvSpPr>
-          <p:cNvPr id="15" name="Text 13"/>
-          <p:cNvSpPr/>
-          <p:nvPr/>
-        </p:nvSpPr>
-        <p:spPr>
-          <a:xfrm>
-            <a:off x="685800" y="3200400"/>
-            <a:ext cx="3200400" cy="274320"/>
-          </a:xfrm>
-          <a:prstGeom prst="rect">
-            <a:avLst/>
-          </a:prstGeom>
-          <a:noFill/>
-          <a:ln/>
-        </p:spPr>
-        <p:txBody>
-          <a:bodyPr wrap="square" lIns="0" tIns="0" rIns="0" bIns="0" rtlCol="0" anchor="ctr"/>
-          <a:lstStyle/>
-          <a:p>
-            <a:pPr indent="0" marL="0">
-              <a:buNone/>
-            </a:pPr>
-            <a:r>
-              <a:rPr lang="en-US" sz="1250" dirty="0">
-                <a:solidFill>
-                  <a:srgbClr val="0F1F1E"/>
-                </a:solidFill>
-                <a:latin typeface="Arial" pitchFamily="34" charset="0"/>
-                <a:ea typeface="Arial" pitchFamily="34" charset="-122"/>
-                <a:cs typeface="Arial" pitchFamily="34" charset="-120"/>
-              </a:rPr>
-              <a:t>Profit summary</a:t>
-            </a:r>
-            <a:endParaRPr lang="en-US" sz="1250" dirty="0"/>
-          </a:p>
-        </p:txBody>
-      </p:sp>
-      <p:sp>
-        <p:nvSpPr>
-          <p:cNvPr id="16" name="Shape 14"/>
-          <p:cNvSpPr/>
-          <p:nvPr/>
-        </p:nvSpPr>
-        <p:spPr>
-          <a:xfrm>
-            <a:off x="457200" y="3685032"/>
-            <a:ext cx="109728" cy="109728"/>
-          </a:xfrm>
-          <a:prstGeom prst="rect">
-            <a:avLst/>
-          </a:prstGeom>
-          <a:solidFill>
-            <a:srgbClr val="0F766E"/>
-          </a:solidFill>
-          <a:ln w="12700">
-            <a:solidFill>
-              <a:srgbClr val="0F766E"/>
-            </a:solidFill>
-            <a:prstDash val="solid"/>
-          </a:ln>
-        </p:spPr>
-      </p:sp>
-      <p:sp>
-        <p:nvSpPr>
-          <p:cNvPr id="17" name="Text 15"/>
-          <p:cNvSpPr/>
-          <p:nvPr/>
-        </p:nvSpPr>
-        <p:spPr>
-          <a:xfrm>
-            <a:off x="685800" y="3602736"/>
-            <a:ext cx="3200400" cy="274320"/>
-          </a:xfrm>
-          <a:prstGeom prst="rect">
-            <a:avLst/>
-          </a:prstGeom>
-          <a:noFill/>
-          <a:ln/>
-        </p:spPr>
-        <p:txBody>
-          <a:bodyPr wrap="square" lIns="0" tIns="0" rIns="0" bIns="0" rtlCol="0" anchor="ctr"/>
-          <a:lstStyle/>
-          <a:p>
-            <a:pPr indent="0" marL="0">
-              <a:buNone/>
-            </a:pPr>
-            <a:r>
-              <a:rPr lang="en-US" sz="1250" dirty="0">
-                <a:solidFill>
-                  <a:srgbClr val="0F1F1E"/>
-                </a:solidFill>
-                <a:latin typeface="Arial" pitchFamily="34" charset="0"/>
-                <a:ea typeface="Arial" pitchFamily="34" charset="-122"/>
-                <a:cs typeface="Arial" pitchFamily="34" charset="-120"/>
-              </a:rPr>
-              <a:t>Renter payment history</a:t>
-            </a:r>
-            <a:endParaRPr lang="en-US" sz="1250" dirty="0"/>
-          </a:p>
-        </p:txBody>
-      </p:sp>
-      <p:sp>
-        <p:nvSpPr>
-          <p:cNvPr id="18" name="Text 16"/>
-          <p:cNvSpPr/>
-          <p:nvPr/>
-        </p:nvSpPr>
-        <p:spPr>
-          <a:xfrm>
-            <a:off x="457200" y="4069080"/>
-            <a:ext cx="3337560" cy="274320"/>
-          </a:xfrm>
-          <a:prstGeom prst="rect">
-            <a:avLst/>
-          </a:prstGeom>
-          <a:noFill/>
-          <a:ln/>
-        </p:spPr>
-        <p:txBody>
-          <a:bodyPr wrap="square" lIns="0" tIns="0" rIns="0" bIns="0" rtlCol="0" anchor="ctr"/>
-          <a:lstStyle/>
-          <a:p>
-            <a:pPr indent="0" marL="0">
-              <a:buNone/>
-            </a:pPr>
-            <a:r>
-              <a:rPr lang="en-US" sz="1100" i="1" dirty="0">
-                <a:solidFill>
-                  <a:srgbClr val="56696A"/>
-                </a:solidFill>
-                <a:latin typeface="Arial" pitchFamily="34" charset="0"/>
-                <a:ea typeface="Arial" pitchFamily="34" charset="-122"/>
-                <a:cs typeface="Arial" pitchFamily="34" charset="-120"/>
-              </a:rPr>
-              <a:t>Each one downloads as Excel or PDF.</a:t>
-            </a:r>
-            <a:endParaRPr lang="en-US" sz="1100" dirty="0"/>
-          </a:p>
-        </p:txBody>
-      </p:sp>
-      <p:sp>
-        <p:nvSpPr>
-          <p:cNvPr id="19" name="Shape 17"/>
+          <p:cNvPr id="5" name="Shape 3"/>
           <p:cNvSpPr/>
           <p:nvPr/>
         </p:nvSpPr>
         <p:spPr>
           <a:xfrm>
             <a:off x="4169664" y="1152144"/>
-            <a:ext cx="4553712" cy="3226139"/>
+            <a:ext cx="4553712" cy="3225546"/>
           </a:xfrm>
           <a:prstGeom prst="rect">
             <a:avLst/>
@@ -2917,7 +2625,7 @@
       </p:sp>
       <p:pic>
         <p:nvPicPr>
-          <p:cNvPr id="20" name="Image 0" descr="Outstanding rent report">    </p:cNvPr>
+          <p:cNvPr id="6" name="Image 0" descr="A client website listing vacant units">    </p:cNvPr>
           <p:cNvPicPr>
             <a:picLocks noChangeAspect="1"/>
           </p:cNvPicPr>
@@ -2932,7 +2640,7 @@
         <p:spPr>
           <a:xfrm>
             <a:off x="4206240" y="1188720"/>
-            <a:ext cx="4480560" cy="3152987"/>
+            <a:ext cx="4480560" cy="3152394"/>
           </a:xfrm>
           <a:prstGeom prst="rect">
             <a:avLst/>
@@ -2941,7 +2649,7 @@
       </p:pic>
       <p:sp>
         <p:nvSpPr>
-          <p:cNvPr id="21" name="Text 18"/>
+          <p:cNvPr id="7" name="Text 4"/>
           <p:cNvSpPr/>
           <p:nvPr/>
         </p:nvSpPr>
@@ -2980,7 +2688,7 @@
       </p:sp>
       <p:sp>
         <p:nvSpPr>
-          <p:cNvPr id="22" name="Text 19"/>
+          <p:cNvPr id="8" name="Text 5"/>
           <p:cNvSpPr/>
           <p:nvPr/>
         </p:nvSpPr>
@@ -3075,7 +2783,7 @@
                 <a:ea typeface="Arial" pitchFamily="34" charset="-122"/>
                 <a:cs typeface="Arial" pitchFamily="34" charset="-120"/>
               </a:rPr>
-              <a:t>ADMINISTRATION</a:t>
+              <a:t>INSIGHT</a:t>
             </a:r>
             <a:endParaRPr lang="en-US" sz="900" dirty="0"/>
           </a:p>
@@ -3114,7 +2822,7 @@
                 <a:ea typeface="Arial" pitchFamily="34" charset="-122"/>
                 <a:cs typeface="Arial" pitchFamily="34" charset="-120"/>
               </a:rPr>
-              <a:t>Your team, with the right access</a:t>
+              <a:t>Seven reports, ready to download</a:t>
             </a:r>
             <a:endParaRPr lang="en-US" sz="2600" dirty="0"/>
           </a:p>
@@ -3128,33 +2836,8 @@
         </p:nvSpPr>
         <p:spPr>
           <a:xfrm>
-            <a:off x="457200" y="1234440"/>
-            <a:ext cx="4023360" cy="1005840"/>
-          </a:xfrm>
-          <a:prstGeom prst="rect">
-            <a:avLst/>
-          </a:prstGeom>
-          <a:solidFill>
-            <a:srgbClr val="F1F6F5"/>
-          </a:solidFill>
-          <a:ln w="12700">
-            <a:solidFill>
-              <a:srgbClr val="F1F6F5"/>
-            </a:solidFill>
-            <a:prstDash val="solid"/>
-          </a:ln>
-        </p:spPr>
-      </p:sp>
-      <p:sp>
-        <p:nvSpPr>
-          <p:cNvPr id="5" name="Shape 3"/>
-          <p:cNvSpPr/>
-          <p:nvPr/>
-        </p:nvSpPr>
-        <p:spPr>
-          <a:xfrm>
-            <a:off x="457200" y="1234440"/>
-            <a:ext cx="64008" cy="1005840"/>
+            <a:off x="457200" y="1271016"/>
+            <a:ext cx="109728" cy="109728"/>
           </a:xfrm>
           <a:prstGeom prst="rect">
             <a:avLst/>
@@ -3172,30 +2855,30 @@
       </p:sp>
       <p:sp>
         <p:nvSpPr>
-          <p:cNvPr id="6" name="Text 4"/>
-          <p:cNvSpPr/>
-          <p:nvPr/>
-        </p:nvSpPr>
-        <p:spPr>
-          <a:xfrm>
-            <a:off x="731520" y="1234440"/>
-            <a:ext cx="3611880" cy="1005840"/>
-          </a:xfrm>
-          <a:prstGeom prst="rect">
-            <a:avLst/>
-          </a:prstGeom>
-          <a:noFill/>
-          <a:ln/>
-        </p:spPr>
-        <p:txBody>
-          <a:bodyPr wrap="square" lIns="0" tIns="0" rIns="0" bIns="0" rtlCol="0" anchor="ctr"/>
-          <a:lstStyle/>
-          <a:p>
-            <a:pPr indent="0" marL="0">
-              <a:buNone/>
-            </a:pPr>
-            <a:r>
-              <a:rPr lang="en-US" sz="1500" b="1" dirty="0">
+          <p:cNvPr id="5" name="Text 3"/>
+          <p:cNvSpPr/>
+          <p:nvPr/>
+        </p:nvSpPr>
+        <p:spPr>
+          <a:xfrm>
+            <a:off x="685800" y="1188720"/>
+            <a:ext cx="3200400" cy="274320"/>
+          </a:xfrm>
+          <a:prstGeom prst="rect">
+            <a:avLst/>
+          </a:prstGeom>
+          <a:noFill/>
+          <a:ln/>
+        </p:spPr>
+        <p:txBody>
+          <a:bodyPr wrap="square" lIns="0" tIns="0" rIns="0" bIns="0" rtlCol="0" anchor="ctr"/>
+          <a:lstStyle/>
+          <a:p>
+            <a:pPr indent="0" marL="0">
+              <a:buNone/>
+            </a:pPr>
+            <a:r>
+              <a:rPr lang="en-US" sz="1250" dirty="0">
                 <a:solidFill>
                   <a:srgbClr val="0F1F1E"/>
                 </a:solidFill>
@@ -3203,64 +2886,22 @@
                 <a:ea typeface="Arial" pitchFamily="34" charset="-122"/>
                 <a:cs typeface="Arial" pitchFamily="34" charset="-120"/>
               </a:rPr>
-              <a:t>Owner</a:t>
-            </a:r>
-            <a:endParaRPr lang="en-US" sz="1500" dirty="0"/>
-          </a:p>
-          <a:p>
-            <a:pPr indent="0" marL="0">
-              <a:buNone/>
-            </a:pPr>
-            <a:r>
-              <a:rPr lang="en-US" sz="1150" dirty="0">
-                <a:solidFill>
-                  <a:srgbClr val="56696A"/>
-                </a:solidFill>
-                <a:latin typeface="Arial" pitchFamily="34" charset="0"/>
-                <a:ea typeface="Arial" pitchFamily="34" charset="-122"/>
-                <a:cs typeface="Arial" pitchFamily="34" charset="-120"/>
-              </a:rPr>
-              <a:t>Everything, including the team, settings and plan.</a:t>
-            </a:r>
-            <a:endParaRPr lang="en-US" sz="1500" dirty="0"/>
-          </a:p>
-        </p:txBody>
-      </p:sp>
-      <p:sp>
-        <p:nvSpPr>
-          <p:cNvPr id="7" name="Shape 5"/>
-          <p:cNvSpPr/>
-          <p:nvPr/>
-        </p:nvSpPr>
-        <p:spPr>
-          <a:xfrm>
-            <a:off x="4663440" y="1234440"/>
-            <a:ext cx="4023360" cy="1005840"/>
-          </a:xfrm>
-          <a:prstGeom prst="rect">
-            <a:avLst/>
-          </a:prstGeom>
-          <a:solidFill>
-            <a:srgbClr val="F1F6F5"/>
-          </a:solidFill>
-          <a:ln w="12700">
-            <a:solidFill>
-              <a:srgbClr val="F1F6F5"/>
-            </a:solidFill>
-            <a:prstDash val="solid"/>
-          </a:ln>
-        </p:spPr>
-      </p:sp>
-      <p:sp>
-        <p:nvSpPr>
-          <p:cNvPr id="8" name="Shape 6"/>
-          <p:cNvSpPr/>
-          <p:nvPr/>
-        </p:nvSpPr>
-        <p:spPr>
-          <a:xfrm>
-            <a:off x="4663440" y="1234440"/>
-            <a:ext cx="64008" cy="1005840"/>
+              <a:t>Monthly rent collection</a:t>
+            </a:r>
+            <a:endParaRPr lang="en-US" sz="1250" dirty="0"/>
+          </a:p>
+        </p:txBody>
+      </p:sp>
+      <p:sp>
+        <p:nvSpPr>
+          <p:cNvPr id="6" name="Shape 4"/>
+          <p:cNvSpPr/>
+          <p:nvPr/>
+        </p:nvSpPr>
+        <p:spPr>
+          <a:xfrm>
+            <a:off x="457200" y="1673352"/>
+            <a:ext cx="109728" cy="109728"/>
           </a:xfrm>
           <a:prstGeom prst="rect">
             <a:avLst/>
@@ -3278,30 +2919,30 @@
       </p:sp>
       <p:sp>
         <p:nvSpPr>
-          <p:cNvPr id="9" name="Text 7"/>
-          <p:cNvSpPr/>
-          <p:nvPr/>
-        </p:nvSpPr>
-        <p:spPr>
-          <a:xfrm>
-            <a:off x="4937760" y="1234440"/>
-            <a:ext cx="3611880" cy="1005840"/>
-          </a:xfrm>
-          <a:prstGeom prst="rect">
-            <a:avLst/>
-          </a:prstGeom>
-          <a:noFill/>
-          <a:ln/>
-        </p:spPr>
-        <p:txBody>
-          <a:bodyPr wrap="square" lIns="0" tIns="0" rIns="0" bIns="0" rtlCol="0" anchor="ctr"/>
-          <a:lstStyle/>
-          <a:p>
-            <a:pPr indent="0" marL="0">
-              <a:buNone/>
-            </a:pPr>
-            <a:r>
-              <a:rPr lang="en-US" sz="1500" b="1" dirty="0">
+          <p:cNvPr id="7" name="Text 5"/>
+          <p:cNvSpPr/>
+          <p:nvPr/>
+        </p:nvSpPr>
+        <p:spPr>
+          <a:xfrm>
+            <a:off x="685800" y="1591056"/>
+            <a:ext cx="3200400" cy="274320"/>
+          </a:xfrm>
+          <a:prstGeom prst="rect">
+            <a:avLst/>
+          </a:prstGeom>
+          <a:noFill/>
+          <a:ln/>
+        </p:spPr>
+        <p:txBody>
+          <a:bodyPr wrap="square" lIns="0" tIns="0" rIns="0" bIns="0" rtlCol="0" anchor="ctr"/>
+          <a:lstStyle/>
+          <a:p>
+            <a:pPr indent="0" marL="0">
+              <a:buNone/>
+            </a:pPr>
+            <a:r>
+              <a:rPr lang="en-US" sz="1250" dirty="0">
                 <a:solidFill>
                   <a:srgbClr val="0F1F1E"/>
                 </a:solidFill>
@@ -3309,64 +2950,22 @@
                 <a:ea typeface="Arial" pitchFamily="34" charset="-122"/>
                 <a:cs typeface="Arial" pitchFamily="34" charset="-120"/>
               </a:rPr>
-              <a:t>Manager</a:t>
-            </a:r>
-            <a:endParaRPr lang="en-US" sz="1500" dirty="0"/>
-          </a:p>
-          <a:p>
-            <a:pPr indent="0" marL="0">
-              <a:buNone/>
-            </a:pPr>
-            <a:r>
-              <a:rPr lang="en-US" sz="1150" dirty="0">
-                <a:solidFill>
-                  <a:srgbClr val="56696A"/>
-                </a:solidFill>
-                <a:latin typeface="Arial" pitchFamily="34" charset="0"/>
-                <a:ea typeface="Arial" pitchFamily="34" charset="-122"/>
-                <a:cs typeface="Arial" pitchFamily="34" charset="-120"/>
-              </a:rPr>
-              <a:t>Day-to-day running: renters, leases, billing and maintenance.</a:t>
-            </a:r>
-            <a:endParaRPr lang="en-US" sz="1500" dirty="0"/>
-          </a:p>
-        </p:txBody>
-      </p:sp>
-      <p:sp>
-        <p:nvSpPr>
-          <p:cNvPr id="10" name="Shape 8"/>
-          <p:cNvSpPr/>
-          <p:nvPr/>
-        </p:nvSpPr>
-        <p:spPr>
-          <a:xfrm>
-            <a:off x="457200" y="2423160"/>
-            <a:ext cx="4023360" cy="1005840"/>
-          </a:xfrm>
-          <a:prstGeom prst="rect">
-            <a:avLst/>
-          </a:prstGeom>
-          <a:solidFill>
-            <a:srgbClr val="F1F6F5"/>
-          </a:solidFill>
-          <a:ln w="12700">
-            <a:solidFill>
-              <a:srgbClr val="F1F6F5"/>
-            </a:solidFill>
-            <a:prstDash val="solid"/>
-          </a:ln>
-        </p:spPr>
-      </p:sp>
-      <p:sp>
-        <p:nvSpPr>
-          <p:cNvPr id="11" name="Shape 9"/>
-          <p:cNvSpPr/>
-          <p:nvPr/>
-        </p:nvSpPr>
-        <p:spPr>
-          <a:xfrm>
-            <a:off x="457200" y="2423160"/>
-            <a:ext cx="64008" cy="1005840"/>
+              <a:t>Outstanding rent</a:t>
+            </a:r>
+            <a:endParaRPr lang="en-US" sz="1250" dirty="0"/>
+          </a:p>
+        </p:txBody>
+      </p:sp>
+      <p:sp>
+        <p:nvSpPr>
+          <p:cNvPr id="8" name="Shape 6"/>
+          <p:cNvSpPr/>
+          <p:nvPr/>
+        </p:nvSpPr>
+        <p:spPr>
+          <a:xfrm>
+            <a:off x="457200" y="2075688"/>
+            <a:ext cx="109728" cy="109728"/>
           </a:xfrm>
           <a:prstGeom prst="rect">
             <a:avLst/>
@@ -3384,30 +2983,30 @@
       </p:sp>
       <p:sp>
         <p:nvSpPr>
-          <p:cNvPr id="12" name="Text 10"/>
-          <p:cNvSpPr/>
-          <p:nvPr/>
-        </p:nvSpPr>
-        <p:spPr>
-          <a:xfrm>
-            <a:off x="731520" y="2423160"/>
-            <a:ext cx="3611880" cy="1005840"/>
-          </a:xfrm>
-          <a:prstGeom prst="rect">
-            <a:avLst/>
-          </a:prstGeom>
-          <a:noFill/>
-          <a:ln/>
-        </p:spPr>
-        <p:txBody>
-          <a:bodyPr wrap="square" lIns="0" tIns="0" rIns="0" bIns="0" rtlCol="0" anchor="ctr"/>
-          <a:lstStyle/>
-          <a:p>
-            <a:pPr indent="0" marL="0">
-              <a:buNone/>
-            </a:pPr>
-            <a:r>
-              <a:rPr lang="en-US" sz="1500" b="1" dirty="0">
+          <p:cNvPr id="9" name="Text 7"/>
+          <p:cNvSpPr/>
+          <p:nvPr/>
+        </p:nvSpPr>
+        <p:spPr>
+          <a:xfrm>
+            <a:off x="685800" y="1993392"/>
+            <a:ext cx="3200400" cy="274320"/>
+          </a:xfrm>
+          <a:prstGeom prst="rect">
+            <a:avLst/>
+          </a:prstGeom>
+          <a:noFill/>
+          <a:ln/>
+        </p:spPr>
+        <p:txBody>
+          <a:bodyPr wrap="square" lIns="0" tIns="0" rIns="0" bIns="0" rtlCol="0" anchor="ctr"/>
+          <a:lstStyle/>
+          <a:p>
+            <a:pPr indent="0" marL="0">
+              <a:buNone/>
+            </a:pPr>
+            <a:r>
+              <a:rPr lang="en-US" sz="1250" dirty="0">
                 <a:solidFill>
                   <a:srgbClr val="0F1F1E"/>
                 </a:solidFill>
@@ -3415,64 +3014,22 @@
                 <a:ea typeface="Arial" pitchFamily="34" charset="-122"/>
                 <a:cs typeface="Arial" pitchFamily="34" charset="-120"/>
               </a:rPr>
-              <a:t>Accountant</a:t>
-            </a:r>
-            <a:endParaRPr lang="en-US" sz="1500" dirty="0"/>
-          </a:p>
-          <a:p>
-            <a:pPr indent="0" marL="0">
-              <a:buNone/>
-            </a:pPr>
-            <a:r>
-              <a:rPr lang="en-US" sz="1150" dirty="0">
-                <a:solidFill>
-                  <a:srgbClr val="56696A"/>
-                </a:solidFill>
-                <a:latin typeface="Arial" pitchFamily="34" charset="0"/>
-                <a:ea typeface="Arial" pitchFamily="34" charset="-122"/>
-                <a:cs typeface="Arial" pitchFamily="34" charset="-120"/>
-              </a:rPr>
-              <a:t>Invoices, payments, expenses and reports.</a:t>
-            </a:r>
-            <a:endParaRPr lang="en-US" sz="1500" dirty="0"/>
-          </a:p>
-        </p:txBody>
-      </p:sp>
-      <p:sp>
-        <p:nvSpPr>
-          <p:cNvPr id="13" name="Shape 11"/>
-          <p:cNvSpPr/>
-          <p:nvPr/>
-        </p:nvSpPr>
-        <p:spPr>
-          <a:xfrm>
-            <a:off x="4663440" y="2423160"/>
-            <a:ext cx="4023360" cy="1005840"/>
-          </a:xfrm>
-          <a:prstGeom prst="rect">
-            <a:avLst/>
-          </a:prstGeom>
-          <a:solidFill>
-            <a:srgbClr val="F1F6F5"/>
-          </a:solidFill>
-          <a:ln w="12700">
-            <a:solidFill>
-              <a:srgbClr val="F1F6F5"/>
-            </a:solidFill>
-            <a:prstDash val="solid"/>
-          </a:ln>
-        </p:spPr>
-      </p:sp>
-      <p:sp>
-        <p:nvSpPr>
-          <p:cNvPr id="14" name="Shape 12"/>
-          <p:cNvSpPr/>
-          <p:nvPr/>
-        </p:nvSpPr>
-        <p:spPr>
-          <a:xfrm>
-            <a:off x="4663440" y="2423160"/>
-            <a:ext cx="64008" cy="1005840"/>
+              <a:t>Occupancy</a:t>
+            </a:r>
+            <a:endParaRPr lang="en-US" sz="1250" dirty="0"/>
+          </a:p>
+        </p:txBody>
+      </p:sp>
+      <p:sp>
+        <p:nvSpPr>
+          <p:cNvPr id="10" name="Shape 8"/>
+          <p:cNvSpPr/>
+          <p:nvPr/>
+        </p:nvSpPr>
+        <p:spPr>
+          <a:xfrm>
+            <a:off x="457200" y="2478024"/>
+            <a:ext cx="109728" cy="109728"/>
           </a:xfrm>
           <a:prstGeom prst="rect">
             <a:avLst/>
@@ -3490,30 +3047,158 @@
       </p:sp>
       <p:sp>
         <p:nvSpPr>
+          <p:cNvPr id="11" name="Text 9"/>
+          <p:cNvSpPr/>
+          <p:nvPr/>
+        </p:nvSpPr>
+        <p:spPr>
+          <a:xfrm>
+            <a:off x="685800" y="2395728"/>
+            <a:ext cx="3200400" cy="274320"/>
+          </a:xfrm>
+          <a:prstGeom prst="rect">
+            <a:avLst/>
+          </a:prstGeom>
+          <a:noFill/>
+          <a:ln/>
+        </p:spPr>
+        <p:txBody>
+          <a:bodyPr wrap="square" lIns="0" tIns="0" rIns="0" bIns="0" rtlCol="0" anchor="ctr"/>
+          <a:lstStyle/>
+          <a:p>
+            <a:pPr indent="0" marL="0">
+              <a:buNone/>
+            </a:pPr>
+            <a:r>
+              <a:rPr lang="en-US" sz="1250" dirty="0">
+                <a:solidFill>
+                  <a:srgbClr val="0F1F1E"/>
+                </a:solidFill>
+                <a:latin typeface="Arial" pitchFamily="34" charset="0"/>
+                <a:ea typeface="Arial" pitchFamily="34" charset="-122"/>
+                <a:cs typeface="Arial" pitchFamily="34" charset="-120"/>
+              </a:rPr>
+              <a:t>Property income</a:t>
+            </a:r>
+            <a:endParaRPr lang="en-US" sz="1250" dirty="0"/>
+          </a:p>
+        </p:txBody>
+      </p:sp>
+      <p:sp>
+        <p:nvSpPr>
+          <p:cNvPr id="12" name="Shape 10"/>
+          <p:cNvSpPr/>
+          <p:nvPr/>
+        </p:nvSpPr>
+        <p:spPr>
+          <a:xfrm>
+            <a:off x="457200" y="2880360"/>
+            <a:ext cx="109728" cy="109728"/>
+          </a:xfrm>
+          <a:prstGeom prst="rect">
+            <a:avLst/>
+          </a:prstGeom>
+          <a:solidFill>
+            <a:srgbClr val="0F766E"/>
+          </a:solidFill>
+          <a:ln w="12700">
+            <a:solidFill>
+              <a:srgbClr val="0F766E"/>
+            </a:solidFill>
+            <a:prstDash val="solid"/>
+          </a:ln>
+        </p:spPr>
+      </p:sp>
+      <p:sp>
+        <p:nvSpPr>
+          <p:cNvPr id="13" name="Text 11"/>
+          <p:cNvSpPr/>
+          <p:nvPr/>
+        </p:nvSpPr>
+        <p:spPr>
+          <a:xfrm>
+            <a:off x="685800" y="2798064"/>
+            <a:ext cx="3200400" cy="274320"/>
+          </a:xfrm>
+          <a:prstGeom prst="rect">
+            <a:avLst/>
+          </a:prstGeom>
+          <a:noFill/>
+          <a:ln/>
+        </p:spPr>
+        <p:txBody>
+          <a:bodyPr wrap="square" lIns="0" tIns="0" rIns="0" bIns="0" rtlCol="0" anchor="ctr"/>
+          <a:lstStyle/>
+          <a:p>
+            <a:pPr indent="0" marL="0">
+              <a:buNone/>
+            </a:pPr>
+            <a:r>
+              <a:rPr lang="en-US" sz="1250" dirty="0">
+                <a:solidFill>
+                  <a:srgbClr val="0F1F1E"/>
+                </a:solidFill>
+                <a:latin typeface="Arial" pitchFamily="34" charset="0"/>
+                <a:ea typeface="Arial" pitchFamily="34" charset="-122"/>
+                <a:cs typeface="Arial" pitchFamily="34" charset="-120"/>
+              </a:rPr>
+              <a:t>Expenses</a:t>
+            </a:r>
+            <a:endParaRPr lang="en-US" sz="1250" dirty="0"/>
+          </a:p>
+        </p:txBody>
+      </p:sp>
+      <p:sp>
+        <p:nvSpPr>
+          <p:cNvPr id="14" name="Shape 12"/>
+          <p:cNvSpPr/>
+          <p:nvPr/>
+        </p:nvSpPr>
+        <p:spPr>
+          <a:xfrm>
+            <a:off x="457200" y="3282696"/>
+            <a:ext cx="109728" cy="109728"/>
+          </a:xfrm>
+          <a:prstGeom prst="rect">
+            <a:avLst/>
+          </a:prstGeom>
+          <a:solidFill>
+            <a:srgbClr val="0F766E"/>
+          </a:solidFill>
+          <a:ln w="12700">
+            <a:solidFill>
+              <a:srgbClr val="0F766E"/>
+            </a:solidFill>
+            <a:prstDash val="solid"/>
+          </a:ln>
+        </p:spPr>
+      </p:sp>
+      <p:sp>
+        <p:nvSpPr>
           <p:cNvPr id="15" name="Text 13"/>
           <p:cNvSpPr/>
           <p:nvPr/>
         </p:nvSpPr>
         <p:spPr>
           <a:xfrm>
-            <a:off x="4937760" y="2423160"/>
-            <a:ext cx="3611880" cy="1005840"/>
-          </a:xfrm>
-          <a:prstGeom prst="rect">
-            <a:avLst/>
-          </a:prstGeom>
-          <a:noFill/>
-          <a:ln/>
-        </p:spPr>
-        <p:txBody>
-          <a:bodyPr wrap="square" lIns="0" tIns="0" rIns="0" bIns="0" rtlCol="0" anchor="ctr"/>
-          <a:lstStyle/>
-          <a:p>
-            <a:pPr indent="0" marL="0">
-              <a:buNone/>
-            </a:pPr>
-            <a:r>
-              <a:rPr lang="en-US" sz="1500" b="1" dirty="0">
+            <a:off x="685800" y="3200400"/>
+            <a:ext cx="3200400" cy="274320"/>
+          </a:xfrm>
+          <a:prstGeom prst="rect">
+            <a:avLst/>
+          </a:prstGeom>
+          <a:noFill/>
+          <a:ln/>
+        </p:spPr>
+        <p:txBody>
+          <a:bodyPr wrap="square" lIns="0" tIns="0" rIns="0" bIns="0" rtlCol="0" anchor="ctr"/>
+          <a:lstStyle/>
+          <a:p>
+            <a:pPr indent="0" marL="0">
+              <a:buNone/>
+            </a:pPr>
+            <a:r>
+              <a:rPr lang="en-US" sz="1250" dirty="0">
                 <a:solidFill>
                   <a:srgbClr val="0F1F1E"/>
                 </a:solidFill>
@@ -3521,16 +3206,102 @@
                 <a:ea typeface="Arial" pitchFamily="34" charset="-122"/>
                 <a:cs typeface="Arial" pitchFamily="34" charset="-120"/>
               </a:rPr>
-              <a:t>Maintenance staff</a:t>
-            </a:r>
-            <a:endParaRPr lang="en-US" sz="1500" dirty="0"/>
-          </a:p>
-          <a:p>
-            <a:pPr indent="0" marL="0">
-              <a:buNone/>
-            </a:pPr>
-            <a:r>
-              <a:rPr lang="en-US" sz="1150" dirty="0">
+              <a:t>Profit summary</a:t>
+            </a:r>
+            <a:endParaRPr lang="en-US" sz="1250" dirty="0"/>
+          </a:p>
+        </p:txBody>
+      </p:sp>
+      <p:sp>
+        <p:nvSpPr>
+          <p:cNvPr id="16" name="Shape 14"/>
+          <p:cNvSpPr/>
+          <p:nvPr/>
+        </p:nvSpPr>
+        <p:spPr>
+          <a:xfrm>
+            <a:off x="457200" y="3685032"/>
+            <a:ext cx="109728" cy="109728"/>
+          </a:xfrm>
+          <a:prstGeom prst="rect">
+            <a:avLst/>
+          </a:prstGeom>
+          <a:solidFill>
+            <a:srgbClr val="0F766E"/>
+          </a:solidFill>
+          <a:ln w="12700">
+            <a:solidFill>
+              <a:srgbClr val="0F766E"/>
+            </a:solidFill>
+            <a:prstDash val="solid"/>
+          </a:ln>
+        </p:spPr>
+      </p:sp>
+      <p:sp>
+        <p:nvSpPr>
+          <p:cNvPr id="17" name="Text 15"/>
+          <p:cNvSpPr/>
+          <p:nvPr/>
+        </p:nvSpPr>
+        <p:spPr>
+          <a:xfrm>
+            <a:off x="685800" y="3602736"/>
+            <a:ext cx="3200400" cy="274320"/>
+          </a:xfrm>
+          <a:prstGeom prst="rect">
+            <a:avLst/>
+          </a:prstGeom>
+          <a:noFill/>
+          <a:ln/>
+        </p:spPr>
+        <p:txBody>
+          <a:bodyPr wrap="square" lIns="0" tIns="0" rIns="0" bIns="0" rtlCol="0" anchor="ctr"/>
+          <a:lstStyle/>
+          <a:p>
+            <a:pPr indent="0" marL="0">
+              <a:buNone/>
+            </a:pPr>
+            <a:r>
+              <a:rPr lang="en-US" sz="1250" dirty="0">
+                <a:solidFill>
+                  <a:srgbClr val="0F1F1E"/>
+                </a:solidFill>
+                <a:latin typeface="Arial" pitchFamily="34" charset="0"/>
+                <a:ea typeface="Arial" pitchFamily="34" charset="-122"/>
+                <a:cs typeface="Arial" pitchFamily="34" charset="-120"/>
+              </a:rPr>
+              <a:t>Renter payment history</a:t>
+            </a:r>
+            <a:endParaRPr lang="en-US" sz="1250" dirty="0"/>
+          </a:p>
+        </p:txBody>
+      </p:sp>
+      <p:sp>
+        <p:nvSpPr>
+          <p:cNvPr id="18" name="Text 16"/>
+          <p:cNvSpPr/>
+          <p:nvPr/>
+        </p:nvSpPr>
+        <p:spPr>
+          <a:xfrm>
+            <a:off x="457200" y="4069080"/>
+            <a:ext cx="3337560" cy="274320"/>
+          </a:xfrm>
+          <a:prstGeom prst="rect">
+            <a:avLst/>
+          </a:prstGeom>
+          <a:noFill/>
+          <a:ln/>
+        </p:spPr>
+        <p:txBody>
+          <a:bodyPr wrap="square" lIns="0" tIns="0" rIns="0" bIns="0" rtlCol="0" anchor="ctr"/>
+          <a:lstStyle/>
+          <a:p>
+            <a:pPr indent="0" marL="0">
+              <a:buNone/>
+            </a:pPr>
+            <a:r>
+              <a:rPr lang="en-US" sz="1100" i="1" dirty="0">
                 <a:solidFill>
                   <a:srgbClr val="56696A"/>
                 </a:solidFill>
@@ -3538,54 +3309,71 @@
                 <a:ea typeface="Arial" pitchFamily="34" charset="-122"/>
                 <a:cs typeface="Arial" pitchFamily="34" charset="-120"/>
               </a:rPr>
-              <a:t>Maintenance requests, from report to done.</a:t>
-            </a:r>
-            <a:endParaRPr lang="en-US" sz="1500" dirty="0"/>
-          </a:p>
-        </p:txBody>
-      </p:sp>
-      <p:sp>
-        <p:nvSpPr>
-          <p:cNvPr id="16" name="Text 14"/>
-          <p:cNvSpPr/>
-          <p:nvPr/>
-        </p:nvSpPr>
-        <p:spPr>
-          <a:xfrm>
-            <a:off x="457200" y="3703320"/>
-            <a:ext cx="8229600" cy="457200"/>
-          </a:xfrm>
-          <a:prstGeom prst="rect">
-            <a:avLst/>
-          </a:prstGeom>
-          <a:noFill/>
-          <a:ln/>
-        </p:spPr>
-        <p:txBody>
-          <a:bodyPr wrap="square" lIns="0" tIns="0" rIns="0" bIns="0" rtlCol="0" anchor="ctr"/>
-          <a:lstStyle/>
-          <a:p>
-            <a:pPr indent="0" marL="0">
-              <a:buNone/>
-            </a:pPr>
-            <a:r>
-              <a:rPr lang="en-US" sz="1200" dirty="0">
-                <a:solidFill>
-                  <a:srgbClr val="0F1F1E"/>
-                </a:solidFill>
-                <a:latin typeface="Arial" pitchFamily="34" charset="0"/>
-                <a:ea typeface="Arial" pitchFamily="34" charset="-122"/>
-                <a:cs typeface="Arial" pitchFamily="34" charset="-120"/>
-              </a:rPr>
-              <a:t>Invite staff by email; each one sets their own password. On the Pro plan, the owner can fine-tune what each role may do.</a:t>
-            </a:r>
-            <a:endParaRPr lang="en-US" sz="1200" dirty="0"/>
-          </a:p>
-        </p:txBody>
-      </p:sp>
-      <p:sp>
-        <p:nvSpPr>
-          <p:cNvPr id="17" name="Text 15"/>
+              <a:t>Each one downloads as Excel or PDF.</a:t>
+            </a:r>
+            <a:endParaRPr lang="en-US" sz="1100" dirty="0"/>
+          </a:p>
+        </p:txBody>
+      </p:sp>
+      <p:sp>
+        <p:nvSpPr>
+          <p:cNvPr id="19" name="Shape 17"/>
+          <p:cNvSpPr/>
+          <p:nvPr/>
+        </p:nvSpPr>
+        <p:spPr>
+          <a:xfrm>
+            <a:off x="4169664" y="1152144"/>
+            <a:ext cx="4553712" cy="3226139"/>
+          </a:xfrm>
+          <a:prstGeom prst="rect">
+            <a:avLst/>
+          </a:prstGeom>
+          <a:solidFill>
+            <a:srgbClr val="FFFFFF"/>
+          </a:solidFill>
+          <a:ln w="9525">
+            <a:solidFill>
+              <a:srgbClr val="D5E0DE"/>
+            </a:solidFill>
+            <a:prstDash val="solid"/>
+          </a:ln>
+          <a:effectLst>
+            <a:outerShdw sx="100000" sy="100000" kx="0" ky="0" algn="bl" rotWithShape="0" blurRad="101600" dist="25400" dir="5400000">
+              <a:srgbClr val="000000">
+                <a:alpha val="12000"/>
+              </a:srgbClr>
+            </a:outerShdw>
+          </a:effectLst>
+        </p:spPr>
+      </p:sp>
+      <p:pic>
+        <p:nvPicPr>
+          <p:cNvPr id="20" name="Image 0" descr="Outstanding rent report">    </p:cNvPr>
+          <p:cNvPicPr>
+            <a:picLocks noChangeAspect="1"/>
+          </p:cNvPicPr>
+          <p:nvPr/>
+        </p:nvPicPr>
+        <p:blipFill>
+          <a:blip r:embed="rId1"/>
+          <a:stretch>
+            <a:fillRect/>
+          </a:stretch>
+        </p:blipFill>
+        <p:spPr>
+          <a:xfrm>
+            <a:off x="4206240" y="1188720"/>
+            <a:ext cx="4480560" cy="3152987"/>
+          </a:xfrm>
+          <a:prstGeom prst="rect">
+            <a:avLst/>
+          </a:prstGeom>
+        </p:spPr>
+      </p:pic>
+      <p:sp>
+        <p:nvSpPr>
+          <p:cNvPr id="21" name="Text 18"/>
           <p:cNvSpPr/>
           <p:nvPr/>
         </p:nvSpPr>
@@ -3624,7 +3412,7 @@
       </p:sp>
       <p:sp>
         <p:nvSpPr>
-          <p:cNvPr id="18" name="Text 16"/>
+          <p:cNvPr id="22" name="Text 19"/>
           <p:cNvSpPr/>
           <p:nvPr/>
         </p:nvSpPr>
@@ -3672,6 +3460,650 @@
 <file path=ppt/slides/slide12.xml><?xml version="1.0" encoding="utf-8"?>
 <p:sld xmlns:a="http://schemas.openxmlformats.org/drawingml/2006/main" xmlns:r="http://schemas.openxmlformats.org/officeDocument/2006/relationships" xmlns:p="http://schemas.openxmlformats.org/presentationml/2006/main">
   <p:cSld name="Slide 12">
+    <p:spTree>
+      <p:nvGrpSpPr>
+        <p:cNvPr id="1" name=""/>
+        <p:cNvGrpSpPr/>
+        <p:nvPr/>
+      </p:nvGrpSpPr>
+      <p:grpSpPr>
+        <a:xfrm>
+          <a:off x="0" y="0"/>
+          <a:ext cx="0" cy="0"/>
+          <a:chOff x="0" y="0"/>
+          <a:chExt cx="0" cy="0"/>
+        </a:xfrm>
+      </p:grpSpPr>
+      <p:sp>
+        <p:nvSpPr>
+          <p:cNvPr id="2" name="Text 0"/>
+          <p:cNvSpPr/>
+          <p:nvPr/>
+        </p:nvSpPr>
+        <p:spPr>
+          <a:xfrm>
+            <a:off x="457200" y="329184"/>
+            <a:ext cx="4572000" cy="219456"/>
+          </a:xfrm>
+          <a:prstGeom prst="rect">
+            <a:avLst/>
+          </a:prstGeom>
+          <a:noFill/>
+          <a:ln/>
+        </p:spPr>
+        <p:txBody>
+          <a:bodyPr wrap="square" lIns="0" tIns="0" rIns="0" bIns="0" rtlCol="0" anchor="ctr"/>
+          <a:lstStyle/>
+          <a:p>
+            <a:pPr indent="0" marL="0">
+              <a:buNone/>
+            </a:pPr>
+            <a:r>
+              <a:rPr lang="en-US" sz="900" b="1" spc="200" kern="0" dirty="0">
+                <a:solidFill>
+                  <a:srgbClr val="0F766E"/>
+                </a:solidFill>
+                <a:latin typeface="Arial" pitchFamily="34" charset="0"/>
+                <a:ea typeface="Arial" pitchFamily="34" charset="-122"/>
+                <a:cs typeface="Arial" pitchFamily="34" charset="-120"/>
+              </a:rPr>
+              <a:t>ADMINISTRATION</a:t>
+            </a:r>
+            <a:endParaRPr lang="en-US" sz="900" dirty="0"/>
+          </a:p>
+        </p:txBody>
+      </p:sp>
+      <p:sp>
+        <p:nvSpPr>
+          <p:cNvPr id="3" name="Text 1"/>
+          <p:cNvSpPr/>
+          <p:nvPr/>
+        </p:nvSpPr>
+        <p:spPr>
+          <a:xfrm>
+            <a:off x="457200" y="548640"/>
+            <a:ext cx="8229600" cy="502920"/>
+          </a:xfrm>
+          <a:prstGeom prst="rect">
+            <a:avLst/>
+          </a:prstGeom>
+          <a:noFill/>
+          <a:ln/>
+        </p:spPr>
+        <p:txBody>
+          <a:bodyPr wrap="square" lIns="0" tIns="0" rIns="0" bIns="0" rtlCol="0" anchor="ctr"/>
+          <a:lstStyle/>
+          <a:p>
+            <a:pPr indent="0" marL="0">
+              <a:buNone/>
+            </a:pPr>
+            <a:r>
+              <a:rPr lang="en-US" sz="2600" b="1" dirty="0">
+                <a:solidFill>
+                  <a:srgbClr val="0F1F1E"/>
+                </a:solidFill>
+                <a:latin typeface="Arial" pitchFamily="34" charset="0"/>
+                <a:ea typeface="Arial" pitchFamily="34" charset="-122"/>
+                <a:cs typeface="Arial" pitchFamily="34" charset="-120"/>
+              </a:rPr>
+              <a:t>Your team, with the right access</a:t>
+            </a:r>
+            <a:endParaRPr lang="en-US" sz="2600" dirty="0"/>
+          </a:p>
+        </p:txBody>
+      </p:sp>
+      <p:sp>
+        <p:nvSpPr>
+          <p:cNvPr id="4" name="Shape 2"/>
+          <p:cNvSpPr/>
+          <p:nvPr/>
+        </p:nvSpPr>
+        <p:spPr>
+          <a:xfrm>
+            <a:off x="457200" y="1234440"/>
+            <a:ext cx="4023360" cy="1005840"/>
+          </a:xfrm>
+          <a:prstGeom prst="rect">
+            <a:avLst/>
+          </a:prstGeom>
+          <a:solidFill>
+            <a:srgbClr val="F1F6F5"/>
+          </a:solidFill>
+          <a:ln w="12700">
+            <a:solidFill>
+              <a:srgbClr val="F1F6F5"/>
+            </a:solidFill>
+            <a:prstDash val="solid"/>
+          </a:ln>
+        </p:spPr>
+      </p:sp>
+      <p:sp>
+        <p:nvSpPr>
+          <p:cNvPr id="5" name="Shape 3"/>
+          <p:cNvSpPr/>
+          <p:nvPr/>
+        </p:nvSpPr>
+        <p:spPr>
+          <a:xfrm>
+            <a:off x="457200" y="1234440"/>
+            <a:ext cx="64008" cy="1005840"/>
+          </a:xfrm>
+          <a:prstGeom prst="rect">
+            <a:avLst/>
+          </a:prstGeom>
+          <a:solidFill>
+            <a:srgbClr val="0F766E"/>
+          </a:solidFill>
+          <a:ln w="12700">
+            <a:solidFill>
+              <a:srgbClr val="0F766E"/>
+            </a:solidFill>
+            <a:prstDash val="solid"/>
+          </a:ln>
+        </p:spPr>
+      </p:sp>
+      <p:sp>
+        <p:nvSpPr>
+          <p:cNvPr id="6" name="Text 4"/>
+          <p:cNvSpPr/>
+          <p:nvPr/>
+        </p:nvSpPr>
+        <p:spPr>
+          <a:xfrm>
+            <a:off x="731520" y="1234440"/>
+            <a:ext cx="3611880" cy="1005840"/>
+          </a:xfrm>
+          <a:prstGeom prst="rect">
+            <a:avLst/>
+          </a:prstGeom>
+          <a:noFill/>
+          <a:ln/>
+        </p:spPr>
+        <p:txBody>
+          <a:bodyPr wrap="square" lIns="0" tIns="0" rIns="0" bIns="0" rtlCol="0" anchor="ctr"/>
+          <a:lstStyle/>
+          <a:p>
+            <a:pPr indent="0" marL="0">
+              <a:buNone/>
+            </a:pPr>
+            <a:r>
+              <a:rPr lang="en-US" sz="1500" b="1" dirty="0">
+                <a:solidFill>
+                  <a:srgbClr val="0F1F1E"/>
+                </a:solidFill>
+                <a:latin typeface="Arial" pitchFamily="34" charset="0"/>
+                <a:ea typeface="Arial" pitchFamily="34" charset="-122"/>
+                <a:cs typeface="Arial" pitchFamily="34" charset="-120"/>
+              </a:rPr>
+              <a:t>Owner</a:t>
+            </a:r>
+            <a:endParaRPr lang="en-US" sz="1500" dirty="0"/>
+          </a:p>
+          <a:p>
+            <a:pPr indent="0" marL="0">
+              <a:buNone/>
+            </a:pPr>
+            <a:r>
+              <a:rPr lang="en-US" sz="1150" dirty="0">
+                <a:solidFill>
+                  <a:srgbClr val="56696A"/>
+                </a:solidFill>
+                <a:latin typeface="Arial" pitchFamily="34" charset="0"/>
+                <a:ea typeface="Arial" pitchFamily="34" charset="-122"/>
+                <a:cs typeface="Arial" pitchFamily="34" charset="-120"/>
+              </a:rPr>
+              <a:t>Everything, including the team, settings and plan.</a:t>
+            </a:r>
+            <a:endParaRPr lang="en-US" sz="1500" dirty="0"/>
+          </a:p>
+        </p:txBody>
+      </p:sp>
+      <p:sp>
+        <p:nvSpPr>
+          <p:cNvPr id="7" name="Shape 5"/>
+          <p:cNvSpPr/>
+          <p:nvPr/>
+        </p:nvSpPr>
+        <p:spPr>
+          <a:xfrm>
+            <a:off x="4663440" y="1234440"/>
+            <a:ext cx="4023360" cy="1005840"/>
+          </a:xfrm>
+          <a:prstGeom prst="rect">
+            <a:avLst/>
+          </a:prstGeom>
+          <a:solidFill>
+            <a:srgbClr val="F1F6F5"/>
+          </a:solidFill>
+          <a:ln w="12700">
+            <a:solidFill>
+              <a:srgbClr val="F1F6F5"/>
+            </a:solidFill>
+            <a:prstDash val="solid"/>
+          </a:ln>
+        </p:spPr>
+      </p:sp>
+      <p:sp>
+        <p:nvSpPr>
+          <p:cNvPr id="8" name="Shape 6"/>
+          <p:cNvSpPr/>
+          <p:nvPr/>
+        </p:nvSpPr>
+        <p:spPr>
+          <a:xfrm>
+            <a:off x="4663440" y="1234440"/>
+            <a:ext cx="64008" cy="1005840"/>
+          </a:xfrm>
+          <a:prstGeom prst="rect">
+            <a:avLst/>
+          </a:prstGeom>
+          <a:solidFill>
+            <a:srgbClr val="0F766E"/>
+          </a:solidFill>
+          <a:ln w="12700">
+            <a:solidFill>
+              <a:srgbClr val="0F766E"/>
+            </a:solidFill>
+            <a:prstDash val="solid"/>
+          </a:ln>
+        </p:spPr>
+      </p:sp>
+      <p:sp>
+        <p:nvSpPr>
+          <p:cNvPr id="9" name="Text 7"/>
+          <p:cNvSpPr/>
+          <p:nvPr/>
+        </p:nvSpPr>
+        <p:spPr>
+          <a:xfrm>
+            <a:off x="4937760" y="1234440"/>
+            <a:ext cx="3611880" cy="1005840"/>
+          </a:xfrm>
+          <a:prstGeom prst="rect">
+            <a:avLst/>
+          </a:prstGeom>
+          <a:noFill/>
+          <a:ln/>
+        </p:spPr>
+        <p:txBody>
+          <a:bodyPr wrap="square" lIns="0" tIns="0" rIns="0" bIns="0" rtlCol="0" anchor="ctr"/>
+          <a:lstStyle/>
+          <a:p>
+            <a:pPr indent="0" marL="0">
+              <a:buNone/>
+            </a:pPr>
+            <a:r>
+              <a:rPr lang="en-US" sz="1500" b="1" dirty="0">
+                <a:solidFill>
+                  <a:srgbClr val="0F1F1E"/>
+                </a:solidFill>
+                <a:latin typeface="Arial" pitchFamily="34" charset="0"/>
+                <a:ea typeface="Arial" pitchFamily="34" charset="-122"/>
+                <a:cs typeface="Arial" pitchFamily="34" charset="-120"/>
+              </a:rPr>
+              <a:t>Manager</a:t>
+            </a:r>
+            <a:endParaRPr lang="en-US" sz="1500" dirty="0"/>
+          </a:p>
+          <a:p>
+            <a:pPr indent="0" marL="0">
+              <a:buNone/>
+            </a:pPr>
+            <a:r>
+              <a:rPr lang="en-US" sz="1150" dirty="0">
+                <a:solidFill>
+                  <a:srgbClr val="56696A"/>
+                </a:solidFill>
+                <a:latin typeface="Arial" pitchFamily="34" charset="0"/>
+                <a:ea typeface="Arial" pitchFamily="34" charset="-122"/>
+                <a:cs typeface="Arial" pitchFamily="34" charset="-120"/>
+              </a:rPr>
+              <a:t>Day-to-day running: renters, leases, billing and maintenance.</a:t>
+            </a:r>
+            <a:endParaRPr lang="en-US" sz="1500" dirty="0"/>
+          </a:p>
+        </p:txBody>
+      </p:sp>
+      <p:sp>
+        <p:nvSpPr>
+          <p:cNvPr id="10" name="Shape 8"/>
+          <p:cNvSpPr/>
+          <p:nvPr/>
+        </p:nvSpPr>
+        <p:spPr>
+          <a:xfrm>
+            <a:off x="457200" y="2423160"/>
+            <a:ext cx="4023360" cy="1005840"/>
+          </a:xfrm>
+          <a:prstGeom prst="rect">
+            <a:avLst/>
+          </a:prstGeom>
+          <a:solidFill>
+            <a:srgbClr val="F1F6F5"/>
+          </a:solidFill>
+          <a:ln w="12700">
+            <a:solidFill>
+              <a:srgbClr val="F1F6F5"/>
+            </a:solidFill>
+            <a:prstDash val="solid"/>
+          </a:ln>
+        </p:spPr>
+      </p:sp>
+      <p:sp>
+        <p:nvSpPr>
+          <p:cNvPr id="11" name="Shape 9"/>
+          <p:cNvSpPr/>
+          <p:nvPr/>
+        </p:nvSpPr>
+        <p:spPr>
+          <a:xfrm>
+            <a:off x="457200" y="2423160"/>
+            <a:ext cx="64008" cy="1005840"/>
+          </a:xfrm>
+          <a:prstGeom prst="rect">
+            <a:avLst/>
+          </a:prstGeom>
+          <a:solidFill>
+            <a:srgbClr val="0F766E"/>
+          </a:solidFill>
+          <a:ln w="12700">
+            <a:solidFill>
+              <a:srgbClr val="0F766E"/>
+            </a:solidFill>
+            <a:prstDash val="solid"/>
+          </a:ln>
+        </p:spPr>
+      </p:sp>
+      <p:sp>
+        <p:nvSpPr>
+          <p:cNvPr id="12" name="Text 10"/>
+          <p:cNvSpPr/>
+          <p:nvPr/>
+        </p:nvSpPr>
+        <p:spPr>
+          <a:xfrm>
+            <a:off x="731520" y="2423160"/>
+            <a:ext cx="3611880" cy="1005840"/>
+          </a:xfrm>
+          <a:prstGeom prst="rect">
+            <a:avLst/>
+          </a:prstGeom>
+          <a:noFill/>
+          <a:ln/>
+        </p:spPr>
+        <p:txBody>
+          <a:bodyPr wrap="square" lIns="0" tIns="0" rIns="0" bIns="0" rtlCol="0" anchor="ctr"/>
+          <a:lstStyle/>
+          <a:p>
+            <a:pPr indent="0" marL="0">
+              <a:buNone/>
+            </a:pPr>
+            <a:r>
+              <a:rPr lang="en-US" sz="1500" b="1" dirty="0">
+                <a:solidFill>
+                  <a:srgbClr val="0F1F1E"/>
+                </a:solidFill>
+                <a:latin typeface="Arial" pitchFamily="34" charset="0"/>
+                <a:ea typeface="Arial" pitchFamily="34" charset="-122"/>
+                <a:cs typeface="Arial" pitchFamily="34" charset="-120"/>
+              </a:rPr>
+              <a:t>Accountant</a:t>
+            </a:r>
+            <a:endParaRPr lang="en-US" sz="1500" dirty="0"/>
+          </a:p>
+          <a:p>
+            <a:pPr indent="0" marL="0">
+              <a:buNone/>
+            </a:pPr>
+            <a:r>
+              <a:rPr lang="en-US" sz="1150" dirty="0">
+                <a:solidFill>
+                  <a:srgbClr val="56696A"/>
+                </a:solidFill>
+                <a:latin typeface="Arial" pitchFamily="34" charset="0"/>
+                <a:ea typeface="Arial" pitchFamily="34" charset="-122"/>
+                <a:cs typeface="Arial" pitchFamily="34" charset="-120"/>
+              </a:rPr>
+              <a:t>Invoices, payments, expenses and reports.</a:t>
+            </a:r>
+            <a:endParaRPr lang="en-US" sz="1500" dirty="0"/>
+          </a:p>
+        </p:txBody>
+      </p:sp>
+      <p:sp>
+        <p:nvSpPr>
+          <p:cNvPr id="13" name="Shape 11"/>
+          <p:cNvSpPr/>
+          <p:nvPr/>
+        </p:nvSpPr>
+        <p:spPr>
+          <a:xfrm>
+            <a:off x="4663440" y="2423160"/>
+            <a:ext cx="4023360" cy="1005840"/>
+          </a:xfrm>
+          <a:prstGeom prst="rect">
+            <a:avLst/>
+          </a:prstGeom>
+          <a:solidFill>
+            <a:srgbClr val="F1F6F5"/>
+          </a:solidFill>
+          <a:ln w="12700">
+            <a:solidFill>
+              <a:srgbClr val="F1F6F5"/>
+            </a:solidFill>
+            <a:prstDash val="solid"/>
+          </a:ln>
+        </p:spPr>
+      </p:sp>
+      <p:sp>
+        <p:nvSpPr>
+          <p:cNvPr id="14" name="Shape 12"/>
+          <p:cNvSpPr/>
+          <p:nvPr/>
+        </p:nvSpPr>
+        <p:spPr>
+          <a:xfrm>
+            <a:off x="4663440" y="2423160"/>
+            <a:ext cx="64008" cy="1005840"/>
+          </a:xfrm>
+          <a:prstGeom prst="rect">
+            <a:avLst/>
+          </a:prstGeom>
+          <a:solidFill>
+            <a:srgbClr val="0F766E"/>
+          </a:solidFill>
+          <a:ln w="12700">
+            <a:solidFill>
+              <a:srgbClr val="0F766E"/>
+            </a:solidFill>
+            <a:prstDash val="solid"/>
+          </a:ln>
+        </p:spPr>
+      </p:sp>
+      <p:sp>
+        <p:nvSpPr>
+          <p:cNvPr id="15" name="Text 13"/>
+          <p:cNvSpPr/>
+          <p:nvPr/>
+        </p:nvSpPr>
+        <p:spPr>
+          <a:xfrm>
+            <a:off x="4937760" y="2423160"/>
+            <a:ext cx="3611880" cy="1005840"/>
+          </a:xfrm>
+          <a:prstGeom prst="rect">
+            <a:avLst/>
+          </a:prstGeom>
+          <a:noFill/>
+          <a:ln/>
+        </p:spPr>
+        <p:txBody>
+          <a:bodyPr wrap="square" lIns="0" tIns="0" rIns="0" bIns="0" rtlCol="0" anchor="ctr"/>
+          <a:lstStyle/>
+          <a:p>
+            <a:pPr indent="0" marL="0">
+              <a:buNone/>
+            </a:pPr>
+            <a:r>
+              <a:rPr lang="en-US" sz="1500" b="1" dirty="0">
+                <a:solidFill>
+                  <a:srgbClr val="0F1F1E"/>
+                </a:solidFill>
+                <a:latin typeface="Arial" pitchFamily="34" charset="0"/>
+                <a:ea typeface="Arial" pitchFamily="34" charset="-122"/>
+                <a:cs typeface="Arial" pitchFamily="34" charset="-120"/>
+              </a:rPr>
+              <a:t>Maintenance staff</a:t>
+            </a:r>
+            <a:endParaRPr lang="en-US" sz="1500" dirty="0"/>
+          </a:p>
+          <a:p>
+            <a:pPr indent="0" marL="0">
+              <a:buNone/>
+            </a:pPr>
+            <a:r>
+              <a:rPr lang="en-US" sz="1150" dirty="0">
+                <a:solidFill>
+                  <a:srgbClr val="56696A"/>
+                </a:solidFill>
+                <a:latin typeface="Arial" pitchFamily="34" charset="0"/>
+                <a:ea typeface="Arial" pitchFamily="34" charset="-122"/>
+                <a:cs typeface="Arial" pitchFamily="34" charset="-120"/>
+              </a:rPr>
+              <a:t>Maintenance requests, from report to done.</a:t>
+            </a:r>
+            <a:endParaRPr lang="en-US" sz="1500" dirty="0"/>
+          </a:p>
+        </p:txBody>
+      </p:sp>
+      <p:sp>
+        <p:nvSpPr>
+          <p:cNvPr id="16" name="Text 14"/>
+          <p:cNvSpPr/>
+          <p:nvPr/>
+        </p:nvSpPr>
+        <p:spPr>
+          <a:xfrm>
+            <a:off x="457200" y="3703320"/>
+            <a:ext cx="8229600" cy="457200"/>
+          </a:xfrm>
+          <a:prstGeom prst="rect">
+            <a:avLst/>
+          </a:prstGeom>
+          <a:noFill/>
+          <a:ln/>
+        </p:spPr>
+        <p:txBody>
+          <a:bodyPr wrap="square" lIns="0" tIns="0" rIns="0" bIns="0" rtlCol="0" anchor="ctr"/>
+          <a:lstStyle/>
+          <a:p>
+            <a:pPr indent="0" marL="0">
+              <a:buNone/>
+            </a:pPr>
+            <a:r>
+              <a:rPr lang="en-US" sz="1200" dirty="0">
+                <a:solidFill>
+                  <a:srgbClr val="0F1F1E"/>
+                </a:solidFill>
+                <a:latin typeface="Arial" pitchFamily="34" charset="0"/>
+                <a:ea typeface="Arial" pitchFamily="34" charset="-122"/>
+                <a:cs typeface="Arial" pitchFamily="34" charset="-120"/>
+              </a:rPr>
+              <a:t>Invite staff by email; each one sets their own password. On the Pro plan, the owner can fine-tune what each role may do.</a:t>
+            </a:r>
+            <a:endParaRPr lang="en-US" sz="1200" dirty="0"/>
+          </a:p>
+        </p:txBody>
+      </p:sp>
+      <p:sp>
+        <p:nvSpPr>
+          <p:cNvPr id="17" name="Text 15"/>
+          <p:cNvSpPr/>
+          <p:nvPr/>
+        </p:nvSpPr>
+        <p:spPr>
+          <a:xfrm>
+            <a:off x="457200" y="4686300"/>
+            <a:ext cx="3657600" cy="201168"/>
+          </a:xfrm>
+          <a:prstGeom prst="rect">
+            <a:avLst/>
+          </a:prstGeom>
+          <a:noFill/>
+          <a:ln/>
+        </p:spPr>
+        <p:txBody>
+          <a:bodyPr wrap="square" lIns="0" tIns="0" rIns="0" bIns="0" rtlCol="0" anchor="ctr"/>
+          <a:lstStyle/>
+          <a:p>
+            <a:pPr indent="0" marL="0">
+              <a:buNone/>
+            </a:pPr>
+            <a:r>
+              <a:rPr lang="en-US" sz="800" dirty="0">
+                <a:solidFill>
+                  <a:srgbClr val="56696A"/>
+                </a:solidFill>
+                <a:latin typeface="Arial" pitchFamily="34" charset="0"/>
+                <a:ea typeface="Arial" pitchFamily="34" charset="-122"/>
+                <a:cs typeface="Arial" pitchFamily="34" charset="-120"/>
+              </a:rPr>
+              <a:t>PMS · BJP Technologies</a:t>
+            </a:r>
+            <a:endParaRPr lang="en-US" sz="800" dirty="0"/>
+          </a:p>
+        </p:txBody>
+      </p:sp>
+      <p:sp>
+        <p:nvSpPr>
+          <p:cNvPr id="18" name="Text 16"/>
+          <p:cNvSpPr/>
+          <p:nvPr/>
+        </p:nvSpPr>
+        <p:spPr>
+          <a:xfrm>
+            <a:off x="8229600" y="4686300"/>
+            <a:ext cx="457200" cy="201168"/>
+          </a:xfrm>
+          <a:prstGeom prst="rect">
+            <a:avLst/>
+          </a:prstGeom>
+          <a:noFill/>
+          <a:ln/>
+        </p:spPr>
+        <p:txBody>
+          <a:bodyPr wrap="square" lIns="0" tIns="0" rIns="0" bIns="0" rtlCol="0" anchor="ctr"/>
+          <a:lstStyle/>
+          <a:p>
+            <a:pPr algn="r" indent="0" marL="0">
+              <a:buNone/>
+            </a:pPr>
+            <a:r>
+              <a:rPr lang="en-US" sz="800" dirty="0">
+                <a:solidFill>
+                  <a:srgbClr val="56696A"/>
+                </a:solidFill>
+                <a:latin typeface="Arial" pitchFamily="34" charset="0"/>
+                <a:ea typeface="Arial" pitchFamily="34" charset="-122"/>
+                <a:cs typeface="Arial" pitchFamily="34" charset="-120"/>
+              </a:rPr>
+              <a:t>12</a:t>
+            </a:r>
+            <a:endParaRPr lang="en-US" sz="800" dirty="0"/>
+          </a:p>
+        </p:txBody>
+      </p:sp>
+    </p:spTree>
+  </p:cSld>
+  <p:clrMapOvr>
+    <a:masterClrMapping/>
+  </p:clrMapOvr>
+</p:sld>
+</file>
+
+<file path=ppt/slides/slide13.xml><?xml version="1.0" encoding="utf-8"?>
+<p:sld xmlns:a="http://schemas.openxmlformats.org/drawingml/2006/main" xmlns:r="http://schemas.openxmlformats.org/officeDocument/2006/relationships" xmlns:p="http://schemas.openxmlformats.org/presentationml/2006/main">
+  <p:cSld name="Slide 13">
     <p:bg>
       <p:bgPr>
         <a:solidFill>
@@ -4102,7 +4534,7 @@
                 <a:ea typeface="Arial" pitchFamily="34" charset="-122"/>
                 <a:cs typeface="Arial" pitchFamily="34" charset="-120"/>
               </a:rPr>
-              <a:t>12</a:t>
+              <a:t>13</a:t>
             </a:r>
             <a:endParaRPr lang="en-US" sz="800" dirty="0"/>
           </a:p>
@@ -4116,9 +4548,9 @@
 </p:sld>
 </file>
 
-<file path=ppt/slides/slide13.xml><?xml version="1.0" encoding="utf-8"?>
+<file path=ppt/slides/slide14.xml><?xml version="1.0" encoding="utf-8"?>
 <p:sld xmlns:a="http://schemas.openxmlformats.org/drawingml/2006/main" xmlns:r="http://schemas.openxmlformats.org/officeDocument/2006/relationships" xmlns:p="http://schemas.openxmlformats.org/presentationml/2006/main">
-  <p:cSld name="Slide 13">
+  <p:cSld name="Slide 14">
     <p:spTree>
       <p:nvGrpSpPr>
         <p:cNvPr id="1" name=""/>
@@ -4915,7 +5347,7 @@
                 <a:ea typeface="Arial" pitchFamily="34" charset="-122"/>
                 <a:cs typeface="Arial" pitchFamily="34" charset="-120"/>
               </a:rPr>
-              <a:t>13</a:t>
+              <a:t>14</a:t>
             </a:r>
             <a:endParaRPr lang="en-US" sz="800" dirty="0"/>
           </a:p>
@@ -4929,9 +5361,9 @@
 </p:sld>
 </file>
 
-<file path=ppt/slides/slide14.xml><?xml version="1.0" encoding="utf-8"?>
+<file path=ppt/slides/slide15.xml><?xml version="1.0" encoding="utf-8"?>
 <p:sld xmlns:a="http://schemas.openxmlformats.org/drawingml/2006/main" xmlns:r="http://schemas.openxmlformats.org/officeDocument/2006/relationships" xmlns:p="http://schemas.openxmlformats.org/presentationml/2006/main">
-  <p:cSld name="Slide 14">
+  <p:cSld name="Slide 15">
     <p:bg>
       <p:bgPr>
         <a:solidFill>
@@ -5398,6 +5830,1417 @@
 <file path=ppt/slides/slide2.xml><?xml version="1.0" encoding="utf-8"?>
 <p:sld xmlns:a="http://schemas.openxmlformats.org/drawingml/2006/main" xmlns:r="http://schemas.openxmlformats.org/officeDocument/2006/relationships" xmlns:p="http://schemas.openxmlformats.org/presentationml/2006/main">
   <p:cSld name="Slide 2">
+    <p:spTree>
+      <p:nvGrpSpPr>
+        <p:cNvPr id="1" name=""/>
+        <p:cNvGrpSpPr/>
+        <p:nvPr/>
+      </p:nvGrpSpPr>
+      <p:grpSpPr>
+        <a:xfrm>
+          <a:off x="0" y="0"/>
+          <a:ext cx="0" cy="0"/>
+          <a:chOff x="0" y="0"/>
+          <a:chExt cx="0" cy="0"/>
+        </a:xfrm>
+      </p:grpSpPr>
+      <p:sp>
+        <p:nvSpPr>
+          <p:cNvPr id="2" name="Text 0"/>
+          <p:cNvSpPr/>
+          <p:nvPr/>
+        </p:nvSpPr>
+        <p:spPr>
+          <a:xfrm>
+            <a:off x="457200" y="329184"/>
+            <a:ext cx="4572000" cy="219456"/>
+          </a:xfrm>
+          <a:prstGeom prst="rect">
+            <a:avLst/>
+          </a:prstGeom>
+          <a:noFill/>
+          <a:ln/>
+        </p:spPr>
+        <p:txBody>
+          <a:bodyPr wrap="square" lIns="0" tIns="0" rIns="0" bIns="0" rtlCol="0" anchor="ctr"/>
+          <a:lstStyle/>
+          <a:p>
+            <a:pPr indent="0" marL="0">
+              <a:buNone/>
+            </a:pPr>
+            <a:r>
+              <a:rPr lang="en-US" sz="900" b="1" spc="200" kern="0" dirty="0">
+                <a:solidFill>
+                  <a:srgbClr val="0F766E"/>
+                </a:solidFill>
+                <a:latin typeface="Arial" pitchFamily="34" charset="0"/>
+                <a:ea typeface="Arial" pitchFamily="34" charset="-122"/>
+                <a:cs typeface="Arial" pitchFamily="34" charset="-120"/>
+              </a:rPr>
+              <a:t>WHY PMS</a:t>
+            </a:r>
+            <a:endParaRPr lang="en-US" sz="900" dirty="0"/>
+          </a:p>
+        </p:txBody>
+      </p:sp>
+      <p:sp>
+        <p:nvSpPr>
+          <p:cNvPr id="3" name="Text 1"/>
+          <p:cNvSpPr/>
+          <p:nvPr/>
+        </p:nvSpPr>
+        <p:spPr>
+          <a:xfrm>
+            <a:off x="457200" y="548640"/>
+            <a:ext cx="8229600" cy="502920"/>
+          </a:xfrm>
+          <a:prstGeom prst="rect">
+            <a:avLst/>
+          </a:prstGeom>
+          <a:noFill/>
+          <a:ln/>
+        </p:spPr>
+        <p:txBody>
+          <a:bodyPr wrap="square" lIns="0" tIns="0" rIns="0" bIns="0" rtlCol="0" anchor="ctr"/>
+          <a:lstStyle/>
+          <a:p>
+            <a:pPr indent="0" marL="0">
+              <a:buNone/>
+            </a:pPr>
+            <a:r>
+              <a:rPr lang="en-US" sz="2600" b="1" dirty="0">
+                <a:solidFill>
+                  <a:srgbClr val="0F1F1E"/>
+                </a:solidFill>
+                <a:latin typeface="Arial" pitchFamily="34" charset="0"/>
+                <a:ea typeface="Arial" pitchFamily="34" charset="-122"/>
+                <a:cs typeface="Arial" pitchFamily="34" charset="-120"/>
+              </a:rPr>
+              <a:t>What changes for you</a:t>
+            </a:r>
+            <a:endParaRPr lang="en-US" sz="2600" dirty="0"/>
+          </a:p>
+        </p:txBody>
+      </p:sp>
+      <p:sp>
+        <p:nvSpPr>
+          <p:cNvPr id="4" name="Text 2"/>
+          <p:cNvSpPr/>
+          <p:nvPr/>
+        </p:nvSpPr>
+        <p:spPr>
+          <a:xfrm>
+            <a:off x="457200" y="1188720"/>
+            <a:ext cx="3383280" cy="219456"/>
+          </a:xfrm>
+          <a:prstGeom prst="rect">
+            <a:avLst/>
+          </a:prstGeom>
+          <a:noFill/>
+          <a:ln/>
+        </p:spPr>
+        <p:txBody>
+          <a:bodyPr wrap="square" lIns="0" tIns="0" rIns="0" bIns="0" rtlCol="0" anchor="ctr"/>
+          <a:lstStyle/>
+          <a:p>
+            <a:pPr indent="0" marL="0">
+              <a:buNone/>
+            </a:pPr>
+            <a:r>
+              <a:rPr lang="en-US" sz="900" b="1" spc="200" kern="0" dirty="0">
+                <a:solidFill>
+                  <a:srgbClr val="56696A"/>
+                </a:solidFill>
+                <a:latin typeface="Arial" pitchFamily="34" charset="0"/>
+                <a:ea typeface="Arial" pitchFamily="34" charset="-122"/>
+                <a:cs typeface="Arial" pitchFamily="34" charset="-120"/>
+              </a:rPr>
+              <a:t>TODAY</a:t>
+            </a:r>
+            <a:endParaRPr lang="en-US" sz="900" dirty="0"/>
+          </a:p>
+        </p:txBody>
+      </p:sp>
+      <p:sp>
+        <p:nvSpPr>
+          <p:cNvPr id="5" name="Text 3"/>
+          <p:cNvSpPr/>
+          <p:nvPr/>
+        </p:nvSpPr>
+        <p:spPr>
+          <a:xfrm>
+            <a:off x="4160520" y="1188720"/>
+            <a:ext cx="4526280" cy="219456"/>
+          </a:xfrm>
+          <a:prstGeom prst="rect">
+            <a:avLst/>
+          </a:prstGeom>
+          <a:noFill/>
+          <a:ln/>
+        </p:spPr>
+        <p:txBody>
+          <a:bodyPr wrap="square" lIns="0" tIns="0" rIns="0" bIns="0" rtlCol="0" anchor="ctr"/>
+          <a:lstStyle/>
+          <a:p>
+            <a:pPr indent="0" marL="0">
+              <a:buNone/>
+            </a:pPr>
+            <a:r>
+              <a:rPr lang="en-US" sz="900" b="1" spc="200" kern="0" dirty="0">
+                <a:solidFill>
+                  <a:srgbClr val="0F766E"/>
+                </a:solidFill>
+                <a:latin typeface="Arial" pitchFamily="34" charset="0"/>
+                <a:ea typeface="Arial" pitchFamily="34" charset="-122"/>
+                <a:cs typeface="Arial" pitchFamily="34" charset="-120"/>
+              </a:rPr>
+              <a:t>WITH PMS</a:t>
+            </a:r>
+            <a:endParaRPr lang="en-US" sz="900" dirty="0"/>
+          </a:p>
+        </p:txBody>
+      </p:sp>
+      <p:sp>
+        <p:nvSpPr>
+          <p:cNvPr id="6" name="Shape 4"/>
+          <p:cNvSpPr/>
+          <p:nvPr/>
+        </p:nvSpPr>
+        <p:spPr>
+          <a:xfrm>
+            <a:off x="457200" y="1444752"/>
+            <a:ext cx="3383280" cy="429768"/>
+          </a:xfrm>
+          <a:prstGeom prst="rect">
+            <a:avLst/>
+          </a:prstGeom>
+          <a:solidFill>
+            <a:srgbClr val="F1F6F5"/>
+          </a:solidFill>
+          <a:ln w="12700">
+            <a:solidFill>
+              <a:srgbClr val="F1F6F5"/>
+            </a:solidFill>
+            <a:prstDash val="solid"/>
+          </a:ln>
+        </p:spPr>
+      </p:sp>
+      <p:sp>
+        <p:nvSpPr>
+          <p:cNvPr id="7" name="Text 5"/>
+          <p:cNvSpPr/>
+          <p:nvPr/>
+        </p:nvSpPr>
+        <p:spPr>
+          <a:xfrm>
+            <a:off x="594360" y="1444752"/>
+            <a:ext cx="3108960" cy="429768"/>
+          </a:xfrm>
+          <a:prstGeom prst="rect">
+            <a:avLst/>
+          </a:prstGeom>
+          <a:noFill/>
+          <a:ln/>
+        </p:spPr>
+        <p:txBody>
+          <a:bodyPr wrap="square" lIns="0" tIns="0" rIns="0" bIns="0" rtlCol="0" anchor="ctr"/>
+          <a:lstStyle/>
+          <a:p>
+            <a:pPr indent="0" marL="0">
+              <a:buNone/>
+            </a:pPr>
+            <a:r>
+              <a:rPr lang="en-US" sz="1100" dirty="0">
+                <a:solidFill>
+                  <a:srgbClr val="56696A"/>
+                </a:solidFill>
+                <a:latin typeface="Arial" pitchFamily="34" charset="0"/>
+                <a:ea typeface="Arial" pitchFamily="34" charset="-122"/>
+                <a:cs typeface="Arial" pitchFamily="34" charset="-120"/>
+              </a:rPr>
+              <a:t>Rent tracked in notebooks, Excel or WhatsApp</a:t>
+            </a:r>
+            <a:endParaRPr lang="en-US" sz="1100" dirty="0"/>
+          </a:p>
+        </p:txBody>
+      </p:sp>
+      <p:sp>
+        <p:nvSpPr>
+          <p:cNvPr id="8" name="Text 6"/>
+          <p:cNvSpPr/>
+          <p:nvPr/>
+        </p:nvSpPr>
+        <p:spPr>
+          <a:xfrm>
+            <a:off x="3840480" y="1444752"/>
+            <a:ext cx="320040" cy="429768"/>
+          </a:xfrm>
+          <a:prstGeom prst="rect">
+            <a:avLst/>
+          </a:prstGeom>
+          <a:noFill/>
+          <a:ln/>
+        </p:spPr>
+        <p:txBody>
+          <a:bodyPr wrap="square" lIns="0" tIns="0" rIns="0" bIns="0" rtlCol="0" anchor="ctr"/>
+          <a:lstStyle/>
+          <a:p>
+            <a:pPr algn="ctr" indent="0" marL="0">
+              <a:buNone/>
+            </a:pPr>
+            <a:r>
+              <a:rPr lang="en-US" sz="1400" b="1" dirty="0">
+                <a:solidFill>
+                  <a:srgbClr val="0F766E"/>
+                </a:solidFill>
+                <a:latin typeface="Arial" pitchFamily="34" charset="0"/>
+                <a:ea typeface="Arial" pitchFamily="34" charset="-122"/>
+                <a:cs typeface="Arial" pitchFamily="34" charset="-120"/>
+              </a:rPr>
+              <a:t>→</a:t>
+            </a:r>
+            <a:endParaRPr lang="en-US" sz="1400" dirty="0"/>
+          </a:p>
+        </p:txBody>
+      </p:sp>
+      <p:sp>
+        <p:nvSpPr>
+          <p:cNvPr id="9" name="Shape 7"/>
+          <p:cNvSpPr/>
+          <p:nvPr/>
+        </p:nvSpPr>
+        <p:spPr>
+          <a:xfrm>
+            <a:off x="4160520" y="1444752"/>
+            <a:ext cx="4526280" cy="429768"/>
+          </a:xfrm>
+          <a:prstGeom prst="rect">
+            <a:avLst/>
+          </a:prstGeom>
+          <a:solidFill>
+            <a:srgbClr val="DCF1ED"/>
+          </a:solidFill>
+          <a:ln w="12700">
+            <a:solidFill>
+              <a:srgbClr val="DCF1ED"/>
+            </a:solidFill>
+            <a:prstDash val="solid"/>
+          </a:ln>
+        </p:spPr>
+      </p:sp>
+      <p:sp>
+        <p:nvSpPr>
+          <p:cNvPr id="10" name="Shape 8"/>
+          <p:cNvSpPr/>
+          <p:nvPr/>
+        </p:nvSpPr>
+        <p:spPr>
+          <a:xfrm>
+            <a:off x="4160520" y="1444752"/>
+            <a:ext cx="54864" cy="429768"/>
+          </a:xfrm>
+          <a:prstGeom prst="rect">
+            <a:avLst/>
+          </a:prstGeom>
+          <a:solidFill>
+            <a:srgbClr val="0F766E"/>
+          </a:solidFill>
+          <a:ln w="12700">
+            <a:solidFill>
+              <a:srgbClr val="0F766E"/>
+            </a:solidFill>
+            <a:prstDash val="solid"/>
+          </a:ln>
+        </p:spPr>
+      </p:sp>
+      <p:sp>
+        <p:nvSpPr>
+          <p:cNvPr id="11" name="Text 9"/>
+          <p:cNvSpPr/>
+          <p:nvPr/>
+        </p:nvSpPr>
+        <p:spPr>
+          <a:xfrm>
+            <a:off x="4343400" y="1444752"/>
+            <a:ext cx="4206240" cy="429768"/>
+          </a:xfrm>
+          <a:prstGeom prst="rect">
+            <a:avLst/>
+          </a:prstGeom>
+          <a:noFill/>
+          <a:ln/>
+        </p:spPr>
+        <p:txBody>
+          <a:bodyPr wrap="square" lIns="0" tIns="0" rIns="0" bIns="0" rtlCol="0" anchor="ctr"/>
+          <a:lstStyle/>
+          <a:p>
+            <a:pPr indent="0" marL="0">
+              <a:buNone/>
+            </a:pPr>
+            <a:r>
+              <a:rPr lang="en-US" sz="1150" b="1" dirty="0">
+                <a:solidFill>
+                  <a:srgbClr val="0B4F4A"/>
+                </a:solidFill>
+                <a:latin typeface="Arial" pitchFamily="34" charset="0"/>
+                <a:ea typeface="Arial" pitchFamily="34" charset="-122"/>
+                <a:cs typeface="Arial" pitchFamily="34" charset="-120"/>
+              </a:rPr>
+              <a:t>One place for every property, unit, renter and payment</a:t>
+            </a:r>
+            <a:endParaRPr lang="en-US" sz="1150" dirty="0"/>
+          </a:p>
+        </p:txBody>
+      </p:sp>
+      <p:sp>
+        <p:nvSpPr>
+          <p:cNvPr id="12" name="Shape 10"/>
+          <p:cNvSpPr/>
+          <p:nvPr/>
+        </p:nvSpPr>
+        <p:spPr>
+          <a:xfrm>
+            <a:off x="457200" y="1938528"/>
+            <a:ext cx="3383280" cy="429768"/>
+          </a:xfrm>
+          <a:prstGeom prst="rect">
+            <a:avLst/>
+          </a:prstGeom>
+          <a:solidFill>
+            <a:srgbClr val="F1F6F5"/>
+          </a:solidFill>
+          <a:ln w="12700">
+            <a:solidFill>
+              <a:srgbClr val="F1F6F5"/>
+            </a:solidFill>
+            <a:prstDash val="solid"/>
+          </a:ln>
+        </p:spPr>
+      </p:sp>
+      <p:sp>
+        <p:nvSpPr>
+          <p:cNvPr id="13" name="Text 11"/>
+          <p:cNvSpPr/>
+          <p:nvPr/>
+        </p:nvSpPr>
+        <p:spPr>
+          <a:xfrm>
+            <a:off x="594360" y="1938528"/>
+            <a:ext cx="3108960" cy="429768"/>
+          </a:xfrm>
+          <a:prstGeom prst="rect">
+            <a:avLst/>
+          </a:prstGeom>
+          <a:noFill/>
+          <a:ln/>
+        </p:spPr>
+        <p:txBody>
+          <a:bodyPr wrap="square" lIns="0" tIns="0" rIns="0" bIns="0" rtlCol="0" anchor="ctr"/>
+          <a:lstStyle/>
+          <a:p>
+            <a:pPr indent="0" marL="0">
+              <a:buNone/>
+            </a:pPr>
+            <a:r>
+              <a:rPr lang="en-US" sz="1100" dirty="0">
+                <a:solidFill>
+                  <a:srgbClr val="56696A"/>
+                </a:solidFill>
+                <a:latin typeface="Arial" pitchFamily="34" charset="0"/>
+                <a:ea typeface="Arial" pitchFamily="34" charset="-122"/>
+                <a:cs typeface="Arial" pitchFamily="34" charset="-120"/>
+              </a:rPr>
+              <a:t>Chasing late rent by phone</a:t>
+            </a:r>
+            <a:endParaRPr lang="en-US" sz="1100" dirty="0"/>
+          </a:p>
+        </p:txBody>
+      </p:sp>
+      <p:sp>
+        <p:nvSpPr>
+          <p:cNvPr id="14" name="Text 12"/>
+          <p:cNvSpPr/>
+          <p:nvPr/>
+        </p:nvSpPr>
+        <p:spPr>
+          <a:xfrm>
+            <a:off x="3840480" y="1938528"/>
+            <a:ext cx="320040" cy="429768"/>
+          </a:xfrm>
+          <a:prstGeom prst="rect">
+            <a:avLst/>
+          </a:prstGeom>
+          <a:noFill/>
+          <a:ln/>
+        </p:spPr>
+        <p:txBody>
+          <a:bodyPr wrap="square" lIns="0" tIns="0" rIns="0" bIns="0" rtlCol="0" anchor="ctr"/>
+          <a:lstStyle/>
+          <a:p>
+            <a:pPr algn="ctr" indent="0" marL="0">
+              <a:buNone/>
+            </a:pPr>
+            <a:r>
+              <a:rPr lang="en-US" sz="1400" b="1" dirty="0">
+                <a:solidFill>
+                  <a:srgbClr val="0F766E"/>
+                </a:solidFill>
+                <a:latin typeface="Arial" pitchFamily="34" charset="0"/>
+                <a:ea typeface="Arial" pitchFamily="34" charset="-122"/>
+                <a:cs typeface="Arial" pitchFamily="34" charset="-120"/>
+              </a:rPr>
+              <a:t>→</a:t>
+            </a:r>
+            <a:endParaRPr lang="en-US" sz="1400" dirty="0"/>
+          </a:p>
+        </p:txBody>
+      </p:sp>
+      <p:sp>
+        <p:nvSpPr>
+          <p:cNvPr id="15" name="Shape 13"/>
+          <p:cNvSpPr/>
+          <p:nvPr/>
+        </p:nvSpPr>
+        <p:spPr>
+          <a:xfrm>
+            <a:off x="4160520" y="1938528"/>
+            <a:ext cx="4526280" cy="429768"/>
+          </a:xfrm>
+          <a:prstGeom prst="rect">
+            <a:avLst/>
+          </a:prstGeom>
+          <a:solidFill>
+            <a:srgbClr val="DCF1ED"/>
+          </a:solidFill>
+          <a:ln w="12700">
+            <a:solidFill>
+              <a:srgbClr val="DCF1ED"/>
+            </a:solidFill>
+            <a:prstDash val="solid"/>
+          </a:ln>
+        </p:spPr>
+      </p:sp>
+      <p:sp>
+        <p:nvSpPr>
+          <p:cNvPr id="16" name="Shape 14"/>
+          <p:cNvSpPr/>
+          <p:nvPr/>
+        </p:nvSpPr>
+        <p:spPr>
+          <a:xfrm>
+            <a:off x="4160520" y="1938528"/>
+            <a:ext cx="54864" cy="429768"/>
+          </a:xfrm>
+          <a:prstGeom prst="rect">
+            <a:avLst/>
+          </a:prstGeom>
+          <a:solidFill>
+            <a:srgbClr val="0F766E"/>
+          </a:solidFill>
+          <a:ln w="12700">
+            <a:solidFill>
+              <a:srgbClr val="0F766E"/>
+            </a:solidFill>
+            <a:prstDash val="solid"/>
+          </a:ln>
+        </p:spPr>
+      </p:sp>
+      <p:sp>
+        <p:nvSpPr>
+          <p:cNvPr id="17" name="Text 15"/>
+          <p:cNvSpPr/>
+          <p:nvPr/>
+        </p:nvSpPr>
+        <p:spPr>
+          <a:xfrm>
+            <a:off x="4343400" y="1938528"/>
+            <a:ext cx="4206240" cy="429768"/>
+          </a:xfrm>
+          <a:prstGeom prst="rect">
+            <a:avLst/>
+          </a:prstGeom>
+          <a:noFill/>
+          <a:ln/>
+        </p:spPr>
+        <p:txBody>
+          <a:bodyPr wrap="square" lIns="0" tIns="0" rIns="0" bIns="0" rtlCol="0" anchor="ctr"/>
+          <a:lstStyle/>
+          <a:p>
+            <a:pPr indent="0" marL="0">
+              <a:buNone/>
+            </a:pPr>
+            <a:r>
+              <a:rPr lang="en-US" sz="1150" b="1" dirty="0">
+                <a:solidFill>
+                  <a:srgbClr val="0B4F4A"/>
+                </a:solidFill>
+                <a:latin typeface="Arial" pitchFamily="34" charset="0"/>
+                <a:ea typeface="Arial" pitchFamily="34" charset="-122"/>
+                <a:cs typeface="Arial" pitchFamily="34" charset="-120"/>
+              </a:rPr>
+              <a:t>Overdue invoices flagged every morning, and the renter emailed automatically</a:t>
+            </a:r>
+            <a:endParaRPr lang="en-US" sz="1150" dirty="0"/>
+          </a:p>
+        </p:txBody>
+      </p:sp>
+      <p:sp>
+        <p:nvSpPr>
+          <p:cNvPr id="18" name="Shape 16"/>
+          <p:cNvSpPr/>
+          <p:nvPr/>
+        </p:nvSpPr>
+        <p:spPr>
+          <a:xfrm>
+            <a:off x="457200" y="2432304"/>
+            <a:ext cx="3383280" cy="429768"/>
+          </a:xfrm>
+          <a:prstGeom prst="rect">
+            <a:avLst/>
+          </a:prstGeom>
+          <a:solidFill>
+            <a:srgbClr val="F1F6F5"/>
+          </a:solidFill>
+          <a:ln w="12700">
+            <a:solidFill>
+              <a:srgbClr val="F1F6F5"/>
+            </a:solidFill>
+            <a:prstDash val="solid"/>
+          </a:ln>
+        </p:spPr>
+      </p:sp>
+      <p:sp>
+        <p:nvSpPr>
+          <p:cNvPr id="19" name="Text 17"/>
+          <p:cNvSpPr/>
+          <p:nvPr/>
+        </p:nvSpPr>
+        <p:spPr>
+          <a:xfrm>
+            <a:off x="594360" y="2432304"/>
+            <a:ext cx="3108960" cy="429768"/>
+          </a:xfrm>
+          <a:prstGeom prst="rect">
+            <a:avLst/>
+          </a:prstGeom>
+          <a:noFill/>
+          <a:ln/>
+        </p:spPr>
+        <p:txBody>
+          <a:bodyPr wrap="square" lIns="0" tIns="0" rIns="0" bIns="0" rtlCol="0" anchor="ctr"/>
+          <a:lstStyle/>
+          <a:p>
+            <a:pPr indent="0" marL="0">
+              <a:buNone/>
+            </a:pPr>
+            <a:r>
+              <a:rPr lang="en-US" sz="1100" dirty="0">
+                <a:solidFill>
+                  <a:srgbClr val="56696A"/>
+                </a:solidFill>
+                <a:latin typeface="Arial" pitchFamily="34" charset="0"/>
+                <a:ea typeface="Arial" pitchFamily="34" charset="-122"/>
+                <a:cs typeface="Arial" pitchFamily="34" charset="-120"/>
+              </a:rPr>
+              <a:t>“I already paid” disputes with no proof</a:t>
+            </a:r>
+            <a:endParaRPr lang="en-US" sz="1100" dirty="0"/>
+          </a:p>
+        </p:txBody>
+      </p:sp>
+      <p:sp>
+        <p:nvSpPr>
+          <p:cNvPr id="20" name="Text 18"/>
+          <p:cNvSpPr/>
+          <p:nvPr/>
+        </p:nvSpPr>
+        <p:spPr>
+          <a:xfrm>
+            <a:off x="3840480" y="2432304"/>
+            <a:ext cx="320040" cy="429768"/>
+          </a:xfrm>
+          <a:prstGeom prst="rect">
+            <a:avLst/>
+          </a:prstGeom>
+          <a:noFill/>
+          <a:ln/>
+        </p:spPr>
+        <p:txBody>
+          <a:bodyPr wrap="square" lIns="0" tIns="0" rIns="0" bIns="0" rtlCol="0" anchor="ctr"/>
+          <a:lstStyle/>
+          <a:p>
+            <a:pPr algn="ctr" indent="0" marL="0">
+              <a:buNone/>
+            </a:pPr>
+            <a:r>
+              <a:rPr lang="en-US" sz="1400" b="1" dirty="0">
+                <a:solidFill>
+                  <a:srgbClr val="0F766E"/>
+                </a:solidFill>
+                <a:latin typeface="Arial" pitchFamily="34" charset="0"/>
+                <a:ea typeface="Arial" pitchFamily="34" charset="-122"/>
+                <a:cs typeface="Arial" pitchFamily="34" charset="-120"/>
+              </a:rPr>
+              <a:t>→</a:t>
+            </a:r>
+            <a:endParaRPr lang="en-US" sz="1400" dirty="0"/>
+          </a:p>
+        </p:txBody>
+      </p:sp>
+      <p:sp>
+        <p:nvSpPr>
+          <p:cNvPr id="21" name="Shape 19"/>
+          <p:cNvSpPr/>
+          <p:nvPr/>
+        </p:nvSpPr>
+        <p:spPr>
+          <a:xfrm>
+            <a:off x="4160520" y="2432304"/>
+            <a:ext cx="4526280" cy="429768"/>
+          </a:xfrm>
+          <a:prstGeom prst="rect">
+            <a:avLst/>
+          </a:prstGeom>
+          <a:solidFill>
+            <a:srgbClr val="DCF1ED"/>
+          </a:solidFill>
+          <a:ln w="12700">
+            <a:solidFill>
+              <a:srgbClr val="DCF1ED"/>
+            </a:solidFill>
+            <a:prstDash val="solid"/>
+          </a:ln>
+        </p:spPr>
+      </p:sp>
+      <p:sp>
+        <p:nvSpPr>
+          <p:cNvPr id="22" name="Shape 20"/>
+          <p:cNvSpPr/>
+          <p:nvPr/>
+        </p:nvSpPr>
+        <p:spPr>
+          <a:xfrm>
+            <a:off x="4160520" y="2432304"/>
+            <a:ext cx="54864" cy="429768"/>
+          </a:xfrm>
+          <a:prstGeom prst="rect">
+            <a:avLst/>
+          </a:prstGeom>
+          <a:solidFill>
+            <a:srgbClr val="0F766E"/>
+          </a:solidFill>
+          <a:ln w="12700">
+            <a:solidFill>
+              <a:srgbClr val="0F766E"/>
+            </a:solidFill>
+            <a:prstDash val="solid"/>
+          </a:ln>
+        </p:spPr>
+      </p:sp>
+      <p:sp>
+        <p:nvSpPr>
+          <p:cNvPr id="23" name="Text 21"/>
+          <p:cNvSpPr/>
+          <p:nvPr/>
+        </p:nvSpPr>
+        <p:spPr>
+          <a:xfrm>
+            <a:off x="4343400" y="2432304"/>
+            <a:ext cx="4206240" cy="429768"/>
+          </a:xfrm>
+          <a:prstGeom prst="rect">
+            <a:avLst/>
+          </a:prstGeom>
+          <a:noFill/>
+          <a:ln/>
+        </p:spPr>
+        <p:txBody>
+          <a:bodyPr wrap="square" lIns="0" tIns="0" rIns="0" bIns="0" rtlCol="0" anchor="ctr"/>
+          <a:lstStyle/>
+          <a:p>
+            <a:pPr indent="0" marL="0">
+              <a:buNone/>
+            </a:pPr>
+            <a:r>
+              <a:rPr lang="en-US" sz="1150" b="1" dirty="0">
+                <a:solidFill>
+                  <a:srgbClr val="0B4F4A"/>
+                </a:solidFill>
+                <a:latin typeface="Arial" pitchFamily="34" charset="0"/>
+                <a:ea typeface="Arial" pitchFamily="34" charset="-122"/>
+                <a:cs typeface="Arial" pitchFamily="34" charset="-120"/>
+              </a:rPr>
+              <a:t>A numbered PDF receipt for every payment</a:t>
+            </a:r>
+            <a:endParaRPr lang="en-US" sz="1150" dirty="0"/>
+          </a:p>
+        </p:txBody>
+      </p:sp>
+      <p:sp>
+        <p:nvSpPr>
+          <p:cNvPr id="24" name="Shape 22"/>
+          <p:cNvSpPr/>
+          <p:nvPr/>
+        </p:nvSpPr>
+        <p:spPr>
+          <a:xfrm>
+            <a:off x="457200" y="2926080"/>
+            <a:ext cx="3383280" cy="429768"/>
+          </a:xfrm>
+          <a:prstGeom prst="rect">
+            <a:avLst/>
+          </a:prstGeom>
+          <a:solidFill>
+            <a:srgbClr val="F1F6F5"/>
+          </a:solidFill>
+          <a:ln w="12700">
+            <a:solidFill>
+              <a:srgbClr val="F1F6F5"/>
+            </a:solidFill>
+            <a:prstDash val="solid"/>
+          </a:ln>
+        </p:spPr>
+      </p:sp>
+      <p:sp>
+        <p:nvSpPr>
+          <p:cNvPr id="25" name="Text 23"/>
+          <p:cNvSpPr/>
+          <p:nvPr/>
+        </p:nvSpPr>
+        <p:spPr>
+          <a:xfrm>
+            <a:off x="594360" y="2926080"/>
+            <a:ext cx="3108960" cy="429768"/>
+          </a:xfrm>
+          <a:prstGeom prst="rect">
+            <a:avLst/>
+          </a:prstGeom>
+          <a:noFill/>
+          <a:ln/>
+        </p:spPr>
+        <p:txBody>
+          <a:bodyPr wrap="square" lIns="0" tIns="0" rIns="0" bIns="0" rtlCol="0" anchor="ctr"/>
+          <a:lstStyle/>
+          <a:p>
+            <a:pPr indent="0" marL="0">
+              <a:buNone/>
+            </a:pPr>
+            <a:r>
+              <a:rPr lang="en-US" sz="1100" dirty="0">
+                <a:solidFill>
+                  <a:srgbClr val="56696A"/>
+                </a:solidFill>
+                <a:latin typeface="Arial" pitchFamily="34" charset="0"/>
+                <a:ea typeface="Arial" pitchFamily="34" charset="-122"/>
+                <a:cs typeface="Arial" pitchFamily="34" charset="-120"/>
+              </a:rPr>
+              <a:t>Repairs forgotten or lost in messages</a:t>
+            </a:r>
+            <a:endParaRPr lang="en-US" sz="1100" dirty="0"/>
+          </a:p>
+        </p:txBody>
+      </p:sp>
+      <p:sp>
+        <p:nvSpPr>
+          <p:cNvPr id="26" name="Text 24"/>
+          <p:cNvSpPr/>
+          <p:nvPr/>
+        </p:nvSpPr>
+        <p:spPr>
+          <a:xfrm>
+            <a:off x="3840480" y="2926080"/>
+            <a:ext cx="320040" cy="429768"/>
+          </a:xfrm>
+          <a:prstGeom prst="rect">
+            <a:avLst/>
+          </a:prstGeom>
+          <a:noFill/>
+          <a:ln/>
+        </p:spPr>
+        <p:txBody>
+          <a:bodyPr wrap="square" lIns="0" tIns="0" rIns="0" bIns="0" rtlCol="0" anchor="ctr"/>
+          <a:lstStyle/>
+          <a:p>
+            <a:pPr algn="ctr" indent="0" marL="0">
+              <a:buNone/>
+            </a:pPr>
+            <a:r>
+              <a:rPr lang="en-US" sz="1400" b="1" dirty="0">
+                <a:solidFill>
+                  <a:srgbClr val="0F766E"/>
+                </a:solidFill>
+                <a:latin typeface="Arial" pitchFamily="34" charset="0"/>
+                <a:ea typeface="Arial" pitchFamily="34" charset="-122"/>
+                <a:cs typeface="Arial" pitchFamily="34" charset="-120"/>
+              </a:rPr>
+              <a:t>→</a:t>
+            </a:r>
+            <a:endParaRPr lang="en-US" sz="1400" dirty="0"/>
+          </a:p>
+        </p:txBody>
+      </p:sp>
+      <p:sp>
+        <p:nvSpPr>
+          <p:cNvPr id="27" name="Shape 25"/>
+          <p:cNvSpPr/>
+          <p:nvPr/>
+        </p:nvSpPr>
+        <p:spPr>
+          <a:xfrm>
+            <a:off x="4160520" y="2926080"/>
+            <a:ext cx="4526280" cy="429768"/>
+          </a:xfrm>
+          <a:prstGeom prst="rect">
+            <a:avLst/>
+          </a:prstGeom>
+          <a:solidFill>
+            <a:srgbClr val="DCF1ED"/>
+          </a:solidFill>
+          <a:ln w="12700">
+            <a:solidFill>
+              <a:srgbClr val="DCF1ED"/>
+            </a:solidFill>
+            <a:prstDash val="solid"/>
+          </a:ln>
+        </p:spPr>
+      </p:sp>
+      <p:sp>
+        <p:nvSpPr>
+          <p:cNvPr id="28" name="Shape 26"/>
+          <p:cNvSpPr/>
+          <p:nvPr/>
+        </p:nvSpPr>
+        <p:spPr>
+          <a:xfrm>
+            <a:off x="4160520" y="2926080"/>
+            <a:ext cx="54864" cy="429768"/>
+          </a:xfrm>
+          <a:prstGeom prst="rect">
+            <a:avLst/>
+          </a:prstGeom>
+          <a:solidFill>
+            <a:srgbClr val="0F766E"/>
+          </a:solidFill>
+          <a:ln w="12700">
+            <a:solidFill>
+              <a:srgbClr val="0F766E"/>
+            </a:solidFill>
+            <a:prstDash val="solid"/>
+          </a:ln>
+        </p:spPr>
+      </p:sp>
+      <p:sp>
+        <p:nvSpPr>
+          <p:cNvPr id="29" name="Text 27"/>
+          <p:cNvSpPr/>
+          <p:nvPr/>
+        </p:nvSpPr>
+        <p:spPr>
+          <a:xfrm>
+            <a:off x="4343400" y="2926080"/>
+            <a:ext cx="4206240" cy="429768"/>
+          </a:xfrm>
+          <a:prstGeom prst="rect">
+            <a:avLst/>
+          </a:prstGeom>
+          <a:noFill/>
+          <a:ln/>
+        </p:spPr>
+        <p:txBody>
+          <a:bodyPr wrap="square" lIns="0" tIns="0" rIns="0" bIns="0" rtlCol="0" anchor="ctr"/>
+          <a:lstStyle/>
+          <a:p>
+            <a:pPr indent="0" marL="0">
+              <a:buNone/>
+            </a:pPr>
+            <a:r>
+              <a:rPr lang="en-US" sz="1150" b="1" dirty="0">
+                <a:solidFill>
+                  <a:srgbClr val="0B4F4A"/>
+                </a:solidFill>
+                <a:latin typeface="Arial" pitchFamily="34" charset="0"/>
+                <a:ea typeface="Arial" pitchFamily="34" charset="-122"/>
+                <a:cs typeface="Arial" pitchFamily="34" charset="-120"/>
+              </a:rPr>
+              <a:t>Every request tracked from report to done</a:t>
+            </a:r>
+            <a:endParaRPr lang="en-US" sz="1150" dirty="0"/>
+          </a:p>
+        </p:txBody>
+      </p:sp>
+      <p:sp>
+        <p:nvSpPr>
+          <p:cNvPr id="30" name="Shape 28"/>
+          <p:cNvSpPr/>
+          <p:nvPr/>
+        </p:nvSpPr>
+        <p:spPr>
+          <a:xfrm>
+            <a:off x="457200" y="3419856"/>
+            <a:ext cx="3383280" cy="429768"/>
+          </a:xfrm>
+          <a:prstGeom prst="rect">
+            <a:avLst/>
+          </a:prstGeom>
+          <a:solidFill>
+            <a:srgbClr val="F1F6F5"/>
+          </a:solidFill>
+          <a:ln w="12700">
+            <a:solidFill>
+              <a:srgbClr val="F1F6F5"/>
+            </a:solidFill>
+            <a:prstDash val="solid"/>
+          </a:ln>
+        </p:spPr>
+      </p:sp>
+      <p:sp>
+        <p:nvSpPr>
+          <p:cNvPr id="31" name="Text 29"/>
+          <p:cNvSpPr/>
+          <p:nvPr/>
+        </p:nvSpPr>
+        <p:spPr>
+          <a:xfrm>
+            <a:off x="594360" y="3419856"/>
+            <a:ext cx="3108960" cy="429768"/>
+          </a:xfrm>
+          <a:prstGeom prst="rect">
+            <a:avLst/>
+          </a:prstGeom>
+          <a:noFill/>
+          <a:ln/>
+        </p:spPr>
+        <p:txBody>
+          <a:bodyPr wrap="square" lIns="0" tIns="0" rIns="0" bIns="0" rtlCol="0" anchor="ctr"/>
+          <a:lstStyle/>
+          <a:p>
+            <a:pPr indent="0" marL="0">
+              <a:buNone/>
+            </a:pPr>
+            <a:r>
+              <a:rPr lang="en-US" sz="1100" dirty="0">
+                <a:solidFill>
+                  <a:srgbClr val="56696A"/>
+                </a:solidFill>
+                <a:latin typeface="Arial" pitchFamily="34" charset="0"/>
+                <a:ea typeface="Arial" pitchFamily="34" charset="-122"/>
+                <a:cs typeface="Arial" pitchFamily="34" charset="-120"/>
+              </a:rPr>
+              <a:t>Not knowing what each building really earns</a:t>
+            </a:r>
+            <a:endParaRPr lang="en-US" sz="1100" dirty="0"/>
+          </a:p>
+        </p:txBody>
+      </p:sp>
+      <p:sp>
+        <p:nvSpPr>
+          <p:cNvPr id="32" name="Text 30"/>
+          <p:cNvSpPr/>
+          <p:nvPr/>
+        </p:nvSpPr>
+        <p:spPr>
+          <a:xfrm>
+            <a:off x="3840480" y="3419856"/>
+            <a:ext cx="320040" cy="429768"/>
+          </a:xfrm>
+          <a:prstGeom prst="rect">
+            <a:avLst/>
+          </a:prstGeom>
+          <a:noFill/>
+          <a:ln/>
+        </p:spPr>
+        <p:txBody>
+          <a:bodyPr wrap="square" lIns="0" tIns="0" rIns="0" bIns="0" rtlCol="0" anchor="ctr"/>
+          <a:lstStyle/>
+          <a:p>
+            <a:pPr algn="ctr" indent="0" marL="0">
+              <a:buNone/>
+            </a:pPr>
+            <a:r>
+              <a:rPr lang="en-US" sz="1400" b="1" dirty="0">
+                <a:solidFill>
+                  <a:srgbClr val="0F766E"/>
+                </a:solidFill>
+                <a:latin typeface="Arial" pitchFamily="34" charset="0"/>
+                <a:ea typeface="Arial" pitchFamily="34" charset="-122"/>
+                <a:cs typeface="Arial" pitchFamily="34" charset="-120"/>
+              </a:rPr>
+              <a:t>→</a:t>
+            </a:r>
+            <a:endParaRPr lang="en-US" sz="1400" dirty="0"/>
+          </a:p>
+        </p:txBody>
+      </p:sp>
+      <p:sp>
+        <p:nvSpPr>
+          <p:cNvPr id="33" name="Shape 31"/>
+          <p:cNvSpPr/>
+          <p:nvPr/>
+        </p:nvSpPr>
+        <p:spPr>
+          <a:xfrm>
+            <a:off x="4160520" y="3419856"/>
+            <a:ext cx="4526280" cy="429768"/>
+          </a:xfrm>
+          <a:prstGeom prst="rect">
+            <a:avLst/>
+          </a:prstGeom>
+          <a:solidFill>
+            <a:srgbClr val="DCF1ED"/>
+          </a:solidFill>
+          <a:ln w="12700">
+            <a:solidFill>
+              <a:srgbClr val="DCF1ED"/>
+            </a:solidFill>
+            <a:prstDash val="solid"/>
+          </a:ln>
+        </p:spPr>
+      </p:sp>
+      <p:sp>
+        <p:nvSpPr>
+          <p:cNvPr id="34" name="Shape 32"/>
+          <p:cNvSpPr/>
+          <p:nvPr/>
+        </p:nvSpPr>
+        <p:spPr>
+          <a:xfrm>
+            <a:off x="4160520" y="3419856"/>
+            <a:ext cx="54864" cy="429768"/>
+          </a:xfrm>
+          <a:prstGeom prst="rect">
+            <a:avLst/>
+          </a:prstGeom>
+          <a:solidFill>
+            <a:srgbClr val="0F766E"/>
+          </a:solidFill>
+          <a:ln w="12700">
+            <a:solidFill>
+              <a:srgbClr val="0F766E"/>
+            </a:solidFill>
+            <a:prstDash val="solid"/>
+          </a:ln>
+        </p:spPr>
+      </p:sp>
+      <p:sp>
+        <p:nvSpPr>
+          <p:cNvPr id="35" name="Text 33"/>
+          <p:cNvSpPr/>
+          <p:nvPr/>
+        </p:nvSpPr>
+        <p:spPr>
+          <a:xfrm>
+            <a:off x="4343400" y="3419856"/>
+            <a:ext cx="4206240" cy="429768"/>
+          </a:xfrm>
+          <a:prstGeom prst="rect">
+            <a:avLst/>
+          </a:prstGeom>
+          <a:noFill/>
+          <a:ln/>
+        </p:spPr>
+        <p:txBody>
+          <a:bodyPr wrap="square" lIns="0" tIns="0" rIns="0" bIns="0" rtlCol="0" anchor="ctr"/>
+          <a:lstStyle/>
+          <a:p>
+            <a:pPr indent="0" marL="0">
+              <a:buNone/>
+            </a:pPr>
+            <a:r>
+              <a:rPr lang="en-US" sz="1150" b="1" dirty="0">
+                <a:solidFill>
+                  <a:srgbClr val="0B4F4A"/>
+                </a:solidFill>
+                <a:latin typeface="Arial" pitchFamily="34" charset="0"/>
+                <a:ea typeface="Arial" pitchFamily="34" charset="-122"/>
+                <a:cs typeface="Arial" pitchFamily="34" charset="-120"/>
+              </a:rPr>
+              <a:t>Income, expenses and profit reports in one click</a:t>
+            </a:r>
+            <a:endParaRPr lang="en-US" sz="1150" dirty="0"/>
+          </a:p>
+        </p:txBody>
+      </p:sp>
+      <p:sp>
+        <p:nvSpPr>
+          <p:cNvPr id="36" name="Shape 34"/>
+          <p:cNvSpPr/>
+          <p:nvPr/>
+        </p:nvSpPr>
+        <p:spPr>
+          <a:xfrm>
+            <a:off x="457200" y="3913632"/>
+            <a:ext cx="3383280" cy="429768"/>
+          </a:xfrm>
+          <a:prstGeom prst="rect">
+            <a:avLst/>
+          </a:prstGeom>
+          <a:solidFill>
+            <a:srgbClr val="F1F6F5"/>
+          </a:solidFill>
+          <a:ln w="12700">
+            <a:solidFill>
+              <a:srgbClr val="F1F6F5"/>
+            </a:solidFill>
+            <a:prstDash val="solid"/>
+          </a:ln>
+        </p:spPr>
+      </p:sp>
+      <p:sp>
+        <p:nvSpPr>
+          <p:cNvPr id="37" name="Text 35"/>
+          <p:cNvSpPr/>
+          <p:nvPr/>
+        </p:nvSpPr>
+        <p:spPr>
+          <a:xfrm>
+            <a:off x="594360" y="3913632"/>
+            <a:ext cx="3108960" cy="429768"/>
+          </a:xfrm>
+          <a:prstGeom prst="rect">
+            <a:avLst/>
+          </a:prstGeom>
+          <a:noFill/>
+          <a:ln/>
+        </p:spPr>
+        <p:txBody>
+          <a:bodyPr wrap="square" lIns="0" tIns="0" rIns="0" bIns="0" rtlCol="0" anchor="ctr"/>
+          <a:lstStyle/>
+          <a:p>
+            <a:pPr indent="0" marL="0">
+              <a:buNone/>
+            </a:pPr>
+            <a:r>
+              <a:rPr lang="en-US" sz="1100" dirty="0">
+                <a:solidFill>
+                  <a:srgbClr val="56696A"/>
+                </a:solidFill>
+                <a:latin typeface="Arial" pitchFamily="34" charset="0"/>
+                <a:ea typeface="Arial" pitchFamily="34" charset="-122"/>
+                <a:cs typeface="Arial" pitchFamily="34" charset="-120"/>
+              </a:rPr>
+              <a:t>Empty units waiting for a dalali</a:t>
+            </a:r>
+            <a:endParaRPr lang="en-US" sz="1100" dirty="0"/>
+          </a:p>
+        </p:txBody>
+      </p:sp>
+      <p:sp>
+        <p:nvSpPr>
+          <p:cNvPr id="38" name="Text 36"/>
+          <p:cNvSpPr/>
+          <p:nvPr/>
+        </p:nvSpPr>
+        <p:spPr>
+          <a:xfrm>
+            <a:off x="3840480" y="3913632"/>
+            <a:ext cx="320040" cy="429768"/>
+          </a:xfrm>
+          <a:prstGeom prst="rect">
+            <a:avLst/>
+          </a:prstGeom>
+          <a:noFill/>
+          <a:ln/>
+        </p:spPr>
+        <p:txBody>
+          <a:bodyPr wrap="square" lIns="0" tIns="0" rIns="0" bIns="0" rtlCol="0" anchor="ctr"/>
+          <a:lstStyle/>
+          <a:p>
+            <a:pPr algn="ctr" indent="0" marL="0">
+              <a:buNone/>
+            </a:pPr>
+            <a:r>
+              <a:rPr lang="en-US" sz="1400" b="1" dirty="0">
+                <a:solidFill>
+                  <a:srgbClr val="0F766E"/>
+                </a:solidFill>
+                <a:latin typeface="Arial" pitchFamily="34" charset="0"/>
+                <a:ea typeface="Arial" pitchFamily="34" charset="-122"/>
+                <a:cs typeface="Arial" pitchFamily="34" charset="-120"/>
+              </a:rPr>
+              <a:t>→</a:t>
+            </a:r>
+            <a:endParaRPr lang="en-US" sz="1400" dirty="0"/>
+          </a:p>
+        </p:txBody>
+      </p:sp>
+      <p:sp>
+        <p:nvSpPr>
+          <p:cNvPr id="39" name="Shape 37"/>
+          <p:cNvSpPr/>
+          <p:nvPr/>
+        </p:nvSpPr>
+        <p:spPr>
+          <a:xfrm>
+            <a:off x="4160520" y="3913632"/>
+            <a:ext cx="4526280" cy="429768"/>
+          </a:xfrm>
+          <a:prstGeom prst="rect">
+            <a:avLst/>
+          </a:prstGeom>
+          <a:solidFill>
+            <a:srgbClr val="DCF1ED"/>
+          </a:solidFill>
+          <a:ln w="12700">
+            <a:solidFill>
+              <a:srgbClr val="DCF1ED"/>
+            </a:solidFill>
+            <a:prstDash val="solid"/>
+          </a:ln>
+        </p:spPr>
+      </p:sp>
+      <p:sp>
+        <p:nvSpPr>
+          <p:cNvPr id="40" name="Shape 38"/>
+          <p:cNvSpPr/>
+          <p:nvPr/>
+        </p:nvSpPr>
+        <p:spPr>
+          <a:xfrm>
+            <a:off x="4160520" y="3913632"/>
+            <a:ext cx="54864" cy="429768"/>
+          </a:xfrm>
+          <a:prstGeom prst="rect">
+            <a:avLst/>
+          </a:prstGeom>
+          <a:solidFill>
+            <a:srgbClr val="0F766E"/>
+          </a:solidFill>
+          <a:ln w="12700">
+            <a:solidFill>
+              <a:srgbClr val="0F766E"/>
+            </a:solidFill>
+            <a:prstDash val="solid"/>
+          </a:ln>
+        </p:spPr>
+      </p:sp>
+      <p:sp>
+        <p:nvSpPr>
+          <p:cNvPr id="41" name="Text 39"/>
+          <p:cNvSpPr/>
+          <p:nvPr/>
+        </p:nvSpPr>
+        <p:spPr>
+          <a:xfrm>
+            <a:off x="4343400" y="3913632"/>
+            <a:ext cx="4206240" cy="429768"/>
+          </a:xfrm>
+          <a:prstGeom prst="rect">
+            <a:avLst/>
+          </a:prstGeom>
+          <a:noFill/>
+          <a:ln/>
+        </p:spPr>
+        <p:txBody>
+          <a:bodyPr wrap="square" lIns="0" tIns="0" rIns="0" bIns="0" rtlCol="0" anchor="ctr"/>
+          <a:lstStyle/>
+          <a:p>
+            <a:pPr indent="0" marL="0">
+              <a:buNone/>
+            </a:pPr>
+            <a:r>
+              <a:rPr lang="en-US" sz="1150" b="1" dirty="0">
+                <a:solidFill>
+                  <a:srgbClr val="0B4F4A"/>
+                </a:solidFill>
+                <a:latin typeface="Arial" pitchFamily="34" charset="0"/>
+                <a:ea typeface="Arial" pitchFamily="34" charset="-122"/>
+                <a:cs typeface="Arial" pitchFamily="34" charset="-120"/>
+              </a:rPr>
+              <a:t>Vacant units listed on your own website automatically</a:t>
+            </a:r>
+            <a:endParaRPr lang="en-US" sz="1150" dirty="0"/>
+          </a:p>
+        </p:txBody>
+      </p:sp>
+      <p:sp>
+        <p:nvSpPr>
+          <p:cNvPr id="42" name="Text 40"/>
+          <p:cNvSpPr/>
+          <p:nvPr/>
+        </p:nvSpPr>
+        <p:spPr>
+          <a:xfrm>
+            <a:off x="457200" y="4686300"/>
+            <a:ext cx="3657600" cy="201168"/>
+          </a:xfrm>
+          <a:prstGeom prst="rect">
+            <a:avLst/>
+          </a:prstGeom>
+          <a:noFill/>
+          <a:ln/>
+        </p:spPr>
+        <p:txBody>
+          <a:bodyPr wrap="square" lIns="0" tIns="0" rIns="0" bIns="0" rtlCol="0" anchor="ctr"/>
+          <a:lstStyle/>
+          <a:p>
+            <a:pPr indent="0" marL="0">
+              <a:buNone/>
+            </a:pPr>
+            <a:r>
+              <a:rPr lang="en-US" sz="800" dirty="0">
+                <a:solidFill>
+                  <a:srgbClr val="56696A"/>
+                </a:solidFill>
+                <a:latin typeface="Arial" pitchFamily="34" charset="0"/>
+                <a:ea typeface="Arial" pitchFamily="34" charset="-122"/>
+                <a:cs typeface="Arial" pitchFamily="34" charset="-120"/>
+              </a:rPr>
+              <a:t>PMS · BJP Technologies</a:t>
+            </a:r>
+            <a:endParaRPr lang="en-US" sz="800" dirty="0"/>
+          </a:p>
+        </p:txBody>
+      </p:sp>
+      <p:sp>
+        <p:nvSpPr>
+          <p:cNvPr id="43" name="Text 41"/>
+          <p:cNvSpPr/>
+          <p:nvPr/>
+        </p:nvSpPr>
+        <p:spPr>
+          <a:xfrm>
+            <a:off x="8229600" y="4686300"/>
+            <a:ext cx="457200" cy="201168"/>
+          </a:xfrm>
+          <a:prstGeom prst="rect">
+            <a:avLst/>
+          </a:prstGeom>
+          <a:noFill/>
+          <a:ln/>
+        </p:spPr>
+        <p:txBody>
+          <a:bodyPr wrap="square" lIns="0" tIns="0" rIns="0" bIns="0" rtlCol="0" anchor="ctr"/>
+          <a:lstStyle/>
+          <a:p>
+            <a:pPr algn="r" indent="0" marL="0">
+              <a:buNone/>
+            </a:pPr>
+            <a:r>
+              <a:rPr lang="en-US" sz="800" dirty="0">
+                <a:solidFill>
+                  <a:srgbClr val="56696A"/>
+                </a:solidFill>
+                <a:latin typeface="Arial" pitchFamily="34" charset="0"/>
+                <a:ea typeface="Arial" pitchFamily="34" charset="-122"/>
+                <a:cs typeface="Arial" pitchFamily="34" charset="-120"/>
+              </a:rPr>
+              <a:t>2</a:t>
+            </a:r>
+            <a:endParaRPr lang="en-US" sz="800" dirty="0"/>
+          </a:p>
+        </p:txBody>
+      </p:sp>
+    </p:spTree>
+  </p:cSld>
+  <p:clrMapOvr>
+    <a:masterClrMapping/>
+  </p:clrMapOvr>
+</p:sld>
+</file>
+
+<file path=ppt/slides/slide3.xml><?xml version="1.0" encoding="utf-8"?>
+<p:sld xmlns:a="http://schemas.openxmlformats.org/drawingml/2006/main" xmlns:r="http://schemas.openxmlformats.org/officeDocument/2006/relationships" xmlns:p="http://schemas.openxmlformats.org/presentationml/2006/main">
+  <p:cSld name="Slide 3">
     <p:bg>
       <p:bgPr>
         <a:solidFill>
@@ -6246,567 +8089,6 @@
       <p:sp>
         <p:nvSpPr>
           <p:cNvPr id="26" name="Text 24"/>
-          <p:cNvSpPr/>
-          <p:nvPr/>
-        </p:nvSpPr>
-        <p:spPr>
-          <a:xfrm>
-            <a:off x="8229600" y="4686300"/>
-            <a:ext cx="457200" cy="201168"/>
-          </a:xfrm>
-          <a:prstGeom prst="rect">
-            <a:avLst/>
-          </a:prstGeom>
-          <a:noFill/>
-          <a:ln/>
-        </p:spPr>
-        <p:txBody>
-          <a:bodyPr wrap="square" lIns="0" tIns="0" rIns="0" bIns="0" rtlCol="0" anchor="ctr"/>
-          <a:lstStyle/>
-          <a:p>
-            <a:pPr algn="r" indent="0" marL="0">
-              <a:buNone/>
-            </a:pPr>
-            <a:r>
-              <a:rPr lang="en-US" sz="800" dirty="0">
-                <a:solidFill>
-                  <a:srgbClr val="56696A"/>
-                </a:solidFill>
-                <a:latin typeface="Arial" pitchFamily="34" charset="0"/>
-                <a:ea typeface="Arial" pitchFamily="34" charset="-122"/>
-                <a:cs typeface="Arial" pitchFamily="34" charset="-120"/>
-              </a:rPr>
-              <a:t>2</a:t>
-            </a:r>
-            <a:endParaRPr lang="en-US" sz="800" dirty="0"/>
-          </a:p>
-        </p:txBody>
-      </p:sp>
-    </p:spTree>
-  </p:cSld>
-  <p:clrMapOvr>
-    <a:masterClrMapping/>
-  </p:clrMapOvr>
-</p:sld>
-</file>
-
-<file path=ppt/slides/slide3.xml><?xml version="1.0" encoding="utf-8"?>
-<p:sld xmlns:a="http://schemas.openxmlformats.org/drawingml/2006/main" xmlns:r="http://schemas.openxmlformats.org/officeDocument/2006/relationships" xmlns:p="http://schemas.openxmlformats.org/presentationml/2006/main">
-  <p:cSld name="Slide 3">
-    <p:spTree>
-      <p:nvGrpSpPr>
-        <p:cNvPr id="1" name=""/>
-        <p:cNvGrpSpPr/>
-        <p:nvPr/>
-      </p:nvGrpSpPr>
-      <p:grpSpPr>
-        <a:xfrm>
-          <a:off x="0" y="0"/>
-          <a:ext cx="0" cy="0"/>
-          <a:chOff x="0" y="0"/>
-          <a:chExt cx="0" cy="0"/>
-        </a:xfrm>
-      </p:grpSpPr>
-      <p:sp>
-        <p:nvSpPr>
-          <p:cNvPr id="2" name="Text 0"/>
-          <p:cNvSpPr/>
-          <p:nvPr/>
-        </p:nvSpPr>
-        <p:spPr>
-          <a:xfrm>
-            <a:off x="457200" y="329184"/>
-            <a:ext cx="4572000" cy="219456"/>
-          </a:xfrm>
-          <a:prstGeom prst="rect">
-            <a:avLst/>
-          </a:prstGeom>
-          <a:noFill/>
-          <a:ln/>
-        </p:spPr>
-        <p:txBody>
-          <a:bodyPr wrap="square" lIns="0" tIns="0" rIns="0" bIns="0" rtlCol="0" anchor="ctr"/>
-          <a:lstStyle/>
-          <a:p>
-            <a:pPr indent="0" marL="0">
-              <a:buNone/>
-            </a:pPr>
-            <a:r>
-              <a:rPr lang="en-US" sz="900" b="1" spc="200" kern="0" dirty="0">
-                <a:solidFill>
-                  <a:srgbClr val="0F766E"/>
-                </a:solidFill>
-                <a:latin typeface="Arial" pitchFamily="34" charset="0"/>
-                <a:ea typeface="Arial" pitchFamily="34" charset="-122"/>
-                <a:cs typeface="Arial" pitchFamily="34" charset="-120"/>
-              </a:rPr>
-              <a:t>EVERY DAY</a:t>
-            </a:r>
-            <a:endParaRPr lang="en-US" sz="900" dirty="0"/>
-          </a:p>
-        </p:txBody>
-      </p:sp>
-      <p:sp>
-        <p:nvSpPr>
-          <p:cNvPr id="3" name="Text 1"/>
-          <p:cNvSpPr/>
-          <p:nvPr/>
-        </p:nvSpPr>
-        <p:spPr>
-          <a:xfrm>
-            <a:off x="457200" y="548640"/>
-            <a:ext cx="8229600" cy="502920"/>
-          </a:xfrm>
-          <a:prstGeom prst="rect">
-            <a:avLst/>
-          </a:prstGeom>
-          <a:noFill/>
-          <a:ln/>
-        </p:spPr>
-        <p:txBody>
-          <a:bodyPr wrap="square" lIns="0" tIns="0" rIns="0" bIns="0" rtlCol="0" anchor="ctr"/>
-          <a:lstStyle/>
-          <a:p>
-            <a:pPr indent="0" marL="0">
-              <a:buNone/>
-            </a:pPr>
-            <a:r>
-              <a:rPr lang="en-US" sz="2600" b="1" dirty="0">
-                <a:solidFill>
-                  <a:srgbClr val="0F1F1E"/>
-                </a:solidFill>
-                <a:latin typeface="Arial" pitchFamily="34" charset="0"/>
-                <a:ea typeface="Arial" pitchFamily="34" charset="-122"/>
-                <a:cs typeface="Arial" pitchFamily="34" charset="-120"/>
-              </a:rPr>
-              <a:t>Your dashboard at a glance</a:t>
-            </a:r>
-            <a:endParaRPr lang="en-US" sz="2600" dirty="0"/>
-          </a:p>
-        </p:txBody>
-      </p:sp>
-      <p:sp>
-        <p:nvSpPr>
-          <p:cNvPr id="4" name="Shape 2"/>
-          <p:cNvSpPr/>
-          <p:nvPr/>
-        </p:nvSpPr>
-        <p:spPr>
-          <a:xfrm>
-            <a:off x="457200" y="1188720"/>
-            <a:ext cx="54864" cy="566928"/>
-          </a:xfrm>
-          <a:prstGeom prst="rect">
-            <a:avLst/>
-          </a:prstGeom>
-          <a:solidFill>
-            <a:srgbClr val="0F766E"/>
-          </a:solidFill>
-          <a:ln w="12700">
-            <a:solidFill>
-              <a:srgbClr val="0F766E"/>
-            </a:solidFill>
-            <a:prstDash val="solid"/>
-          </a:ln>
-        </p:spPr>
-      </p:sp>
-      <p:sp>
-        <p:nvSpPr>
-          <p:cNvPr id="5" name="Text 3"/>
-          <p:cNvSpPr/>
-          <p:nvPr/>
-        </p:nvSpPr>
-        <p:spPr>
-          <a:xfrm>
-            <a:off x="640080" y="1188720"/>
-            <a:ext cx="3108960" cy="566928"/>
-          </a:xfrm>
-          <a:prstGeom prst="rect">
-            <a:avLst/>
-          </a:prstGeom>
-          <a:noFill/>
-          <a:ln/>
-        </p:spPr>
-        <p:txBody>
-          <a:bodyPr wrap="square" lIns="0" tIns="0" rIns="0" bIns="0" rtlCol="0" anchor="ctr"/>
-          <a:lstStyle/>
-          <a:p>
-            <a:pPr indent="0" marL="0">
-              <a:buNone/>
-            </a:pPr>
-            <a:r>
-              <a:rPr lang="en-US" sz="1250" b="1" dirty="0">
-                <a:solidFill>
-                  <a:srgbClr val="0F1F1E"/>
-                </a:solidFill>
-                <a:latin typeface="Arial" pitchFamily="34" charset="0"/>
-                <a:ea typeface="Arial" pitchFamily="34" charset="-122"/>
-                <a:cs typeface="Arial" pitchFamily="34" charset="-120"/>
-              </a:rPr>
-              <a:t>Occupancy</a:t>
-            </a:r>
-            <a:endParaRPr lang="en-US" sz="1250" dirty="0"/>
-          </a:p>
-          <a:p>
-            <a:pPr indent="0" marL="0">
-              <a:buNone/>
-            </a:pPr>
-            <a:r>
-              <a:rPr lang="en-US" sz="1050" dirty="0">
-                <a:solidFill>
-                  <a:srgbClr val="56696A"/>
-                </a:solidFill>
-                <a:latin typeface="Arial" pitchFamily="34" charset="0"/>
-                <a:ea typeface="Arial" pitchFamily="34" charset="-122"/>
-                <a:cs typeface="Arial" pitchFamily="34" charset="-120"/>
-              </a:rPr>
-              <a:t>How many of your units are rented.</a:t>
-            </a:r>
-            <a:endParaRPr lang="en-US" sz="1250" dirty="0"/>
-          </a:p>
-        </p:txBody>
-      </p:sp>
-      <p:sp>
-        <p:nvSpPr>
-          <p:cNvPr id="6" name="Shape 4"/>
-          <p:cNvSpPr/>
-          <p:nvPr/>
-        </p:nvSpPr>
-        <p:spPr>
-          <a:xfrm>
-            <a:off x="457200" y="2048256"/>
-            <a:ext cx="54864" cy="566928"/>
-          </a:xfrm>
-          <a:prstGeom prst="rect">
-            <a:avLst/>
-          </a:prstGeom>
-          <a:solidFill>
-            <a:srgbClr val="0F766E"/>
-          </a:solidFill>
-          <a:ln w="12700">
-            <a:solidFill>
-              <a:srgbClr val="0F766E"/>
-            </a:solidFill>
-            <a:prstDash val="solid"/>
-          </a:ln>
-        </p:spPr>
-      </p:sp>
-      <p:sp>
-        <p:nvSpPr>
-          <p:cNvPr id="7" name="Text 5"/>
-          <p:cNvSpPr/>
-          <p:nvPr/>
-        </p:nvSpPr>
-        <p:spPr>
-          <a:xfrm>
-            <a:off x="640080" y="2048256"/>
-            <a:ext cx="3108960" cy="566928"/>
-          </a:xfrm>
-          <a:prstGeom prst="rect">
-            <a:avLst/>
-          </a:prstGeom>
-          <a:noFill/>
-          <a:ln/>
-        </p:spPr>
-        <p:txBody>
-          <a:bodyPr wrap="square" lIns="0" tIns="0" rIns="0" bIns="0" rtlCol="0" anchor="ctr"/>
-          <a:lstStyle/>
-          <a:p>
-            <a:pPr indent="0" marL="0">
-              <a:buNone/>
-            </a:pPr>
-            <a:r>
-              <a:rPr lang="en-US" sz="1250" b="1" dirty="0">
-                <a:solidFill>
-                  <a:srgbClr val="0F1F1E"/>
-                </a:solidFill>
-                <a:latin typeface="Arial" pitchFamily="34" charset="0"/>
-                <a:ea typeface="Arial" pitchFamily="34" charset="-122"/>
-                <a:cs typeface="Arial" pitchFamily="34" charset="-120"/>
-              </a:rPr>
-              <a:t>Collected this month</a:t>
-            </a:r>
-            <a:endParaRPr lang="en-US" sz="1250" dirty="0"/>
-          </a:p>
-          <a:p>
-            <a:pPr indent="0" marL="0">
-              <a:buNone/>
-            </a:pPr>
-            <a:r>
-              <a:rPr lang="en-US" sz="1050" dirty="0">
-                <a:solidFill>
-                  <a:srgbClr val="56696A"/>
-                </a:solidFill>
-                <a:latin typeface="Arial" pitchFamily="34" charset="0"/>
-                <a:ea typeface="Arial" pitchFamily="34" charset="-122"/>
-                <a:cs typeface="Arial" pitchFamily="34" charset="-120"/>
-              </a:rPr>
-              <a:t>Payments recorded against what was billed.</a:t>
-            </a:r>
-            <a:endParaRPr lang="en-US" sz="1250" dirty="0"/>
-          </a:p>
-        </p:txBody>
-      </p:sp>
-      <p:sp>
-        <p:nvSpPr>
-          <p:cNvPr id="8" name="Shape 6"/>
-          <p:cNvSpPr/>
-          <p:nvPr/>
-        </p:nvSpPr>
-        <p:spPr>
-          <a:xfrm>
-            <a:off x="457200" y="2907792"/>
-            <a:ext cx="54864" cy="566928"/>
-          </a:xfrm>
-          <a:prstGeom prst="rect">
-            <a:avLst/>
-          </a:prstGeom>
-          <a:solidFill>
-            <a:srgbClr val="0F766E"/>
-          </a:solidFill>
-          <a:ln w="12700">
-            <a:solidFill>
-              <a:srgbClr val="0F766E"/>
-            </a:solidFill>
-            <a:prstDash val="solid"/>
-          </a:ln>
-        </p:spPr>
-      </p:sp>
-      <p:sp>
-        <p:nvSpPr>
-          <p:cNvPr id="9" name="Text 7"/>
-          <p:cNvSpPr/>
-          <p:nvPr/>
-        </p:nvSpPr>
-        <p:spPr>
-          <a:xfrm>
-            <a:off x="640080" y="2907792"/>
-            <a:ext cx="3108960" cy="566928"/>
-          </a:xfrm>
-          <a:prstGeom prst="rect">
-            <a:avLst/>
-          </a:prstGeom>
-          <a:noFill/>
-          <a:ln/>
-        </p:spPr>
-        <p:txBody>
-          <a:bodyPr wrap="square" lIns="0" tIns="0" rIns="0" bIns="0" rtlCol="0" anchor="ctr"/>
-          <a:lstStyle/>
-          <a:p>
-            <a:pPr indent="0" marL="0">
-              <a:buNone/>
-            </a:pPr>
-            <a:r>
-              <a:rPr lang="en-US" sz="1250" b="1" dirty="0">
-                <a:solidFill>
-                  <a:srgbClr val="0F1F1E"/>
-                </a:solidFill>
-                <a:latin typeface="Arial" pitchFamily="34" charset="0"/>
-                <a:ea typeface="Arial" pitchFamily="34" charset="-122"/>
-                <a:cs typeface="Arial" pitchFamily="34" charset="-120"/>
-              </a:rPr>
-              <a:t>Outstanding</a:t>
-            </a:r>
-            <a:endParaRPr lang="en-US" sz="1250" dirty="0"/>
-          </a:p>
-          <a:p>
-            <a:pPr indent="0" marL="0">
-              <a:buNone/>
-            </a:pPr>
-            <a:r>
-              <a:rPr lang="en-US" sz="1050" dirty="0">
-                <a:solidFill>
-                  <a:srgbClr val="56696A"/>
-                </a:solidFill>
-                <a:latin typeface="Arial" pitchFamily="34" charset="0"/>
-                <a:ea typeface="Arial" pitchFamily="34" charset="-122"/>
-                <a:cs typeface="Arial" pitchFamily="34" charset="-120"/>
-              </a:rPr>
-              <a:t>Everything still owed on open invoices.</a:t>
-            </a:r>
-            <a:endParaRPr lang="en-US" sz="1250" dirty="0"/>
-          </a:p>
-        </p:txBody>
-      </p:sp>
-      <p:sp>
-        <p:nvSpPr>
-          <p:cNvPr id="10" name="Shape 8"/>
-          <p:cNvSpPr/>
-          <p:nvPr/>
-        </p:nvSpPr>
-        <p:spPr>
-          <a:xfrm>
-            <a:off x="457200" y="3767328"/>
-            <a:ext cx="54864" cy="566928"/>
-          </a:xfrm>
-          <a:prstGeom prst="rect">
-            <a:avLst/>
-          </a:prstGeom>
-          <a:solidFill>
-            <a:srgbClr val="0F766E"/>
-          </a:solidFill>
-          <a:ln w="12700">
-            <a:solidFill>
-              <a:srgbClr val="0F766E"/>
-            </a:solidFill>
-            <a:prstDash val="solid"/>
-          </a:ln>
-        </p:spPr>
-      </p:sp>
-      <p:sp>
-        <p:nvSpPr>
-          <p:cNvPr id="11" name="Text 9"/>
-          <p:cNvSpPr/>
-          <p:nvPr/>
-        </p:nvSpPr>
-        <p:spPr>
-          <a:xfrm>
-            <a:off x="640080" y="3767328"/>
-            <a:ext cx="3108960" cy="566928"/>
-          </a:xfrm>
-          <a:prstGeom prst="rect">
-            <a:avLst/>
-          </a:prstGeom>
-          <a:noFill/>
-          <a:ln/>
-        </p:spPr>
-        <p:txBody>
-          <a:bodyPr wrap="square" lIns="0" tIns="0" rIns="0" bIns="0" rtlCol="0" anchor="ctr"/>
-          <a:lstStyle/>
-          <a:p>
-            <a:pPr indent="0" marL="0">
-              <a:buNone/>
-            </a:pPr>
-            <a:r>
-              <a:rPr lang="en-US" sz="1250" b="1" dirty="0">
-                <a:solidFill>
-                  <a:srgbClr val="0F1F1E"/>
-                </a:solidFill>
-                <a:latin typeface="Arial" pitchFamily="34" charset="0"/>
-                <a:ea typeface="Arial" pitchFamily="34" charset="-122"/>
-                <a:cs typeface="Arial" pitchFamily="34" charset="-120"/>
-              </a:rPr>
-              <a:t>Overdue</a:t>
-            </a:r>
-            <a:endParaRPr lang="en-US" sz="1250" dirty="0"/>
-          </a:p>
-          <a:p>
-            <a:pPr indent="0" marL="0">
-              <a:buNone/>
-            </a:pPr>
-            <a:r>
-              <a:rPr lang="en-US" sz="1050" dirty="0">
-                <a:solidFill>
-                  <a:srgbClr val="56696A"/>
-                </a:solidFill>
-                <a:latin typeface="Arial" pitchFamily="34" charset="0"/>
-                <a:ea typeface="Arial" pitchFamily="34" charset="-122"/>
-                <a:cs typeface="Arial" pitchFamily="34" charset="-120"/>
-              </a:rPr>
-              <a:t>The part that is past its due date.</a:t>
-            </a:r>
-            <a:endParaRPr lang="en-US" sz="1250" dirty="0"/>
-          </a:p>
-        </p:txBody>
-      </p:sp>
-      <p:sp>
-        <p:nvSpPr>
-          <p:cNvPr id="12" name="Shape 10"/>
-          <p:cNvSpPr/>
-          <p:nvPr/>
-        </p:nvSpPr>
-        <p:spPr>
-          <a:xfrm>
-            <a:off x="4169664" y="1152144"/>
-            <a:ext cx="4553712" cy="3226316"/>
-          </a:xfrm>
-          <a:prstGeom prst="rect">
-            <a:avLst/>
-          </a:prstGeom>
-          <a:solidFill>
-            <a:srgbClr val="FFFFFF"/>
-          </a:solidFill>
-          <a:ln w="9525">
-            <a:solidFill>
-              <a:srgbClr val="D5E0DE"/>
-            </a:solidFill>
-            <a:prstDash val="solid"/>
-          </a:ln>
-          <a:effectLst>
-            <a:outerShdw sx="100000" sy="100000" kx="0" ky="0" algn="bl" rotWithShape="0" blurRad="101600" dist="25400" dir="5400000">
-              <a:srgbClr val="000000">
-                <a:alpha val="12000"/>
-              </a:srgbClr>
-            </a:outerShdw>
-          </a:effectLst>
-        </p:spPr>
-      </p:sp>
-      <p:pic>
-        <p:nvPicPr>
-          <p:cNvPr id="13" name="Image 0" descr="PMS dashboard">    </p:cNvPr>
-          <p:cNvPicPr>
-            <a:picLocks noChangeAspect="1"/>
-          </p:cNvPicPr>
-          <p:nvPr/>
-        </p:nvPicPr>
-        <p:blipFill>
-          <a:blip r:embed="rId1"/>
-          <a:stretch>
-            <a:fillRect/>
-          </a:stretch>
-        </p:blipFill>
-        <p:spPr>
-          <a:xfrm>
-            <a:off x="4206240" y="1188720"/>
-            <a:ext cx="4480560" cy="3153164"/>
-          </a:xfrm>
-          <a:prstGeom prst="rect">
-            <a:avLst/>
-          </a:prstGeom>
-        </p:spPr>
-      </p:pic>
-      <p:sp>
-        <p:nvSpPr>
-          <p:cNvPr id="14" name="Text 11"/>
-          <p:cNvSpPr/>
-          <p:nvPr/>
-        </p:nvSpPr>
-        <p:spPr>
-          <a:xfrm>
-            <a:off x="457200" y="4686300"/>
-            <a:ext cx="3657600" cy="201168"/>
-          </a:xfrm>
-          <a:prstGeom prst="rect">
-            <a:avLst/>
-          </a:prstGeom>
-          <a:noFill/>
-          <a:ln/>
-        </p:spPr>
-        <p:txBody>
-          <a:bodyPr wrap="square" lIns="0" tIns="0" rIns="0" bIns="0" rtlCol="0" anchor="ctr"/>
-          <a:lstStyle/>
-          <a:p>
-            <a:pPr indent="0" marL="0">
-              <a:buNone/>
-            </a:pPr>
-            <a:r>
-              <a:rPr lang="en-US" sz="800" dirty="0">
-                <a:solidFill>
-                  <a:srgbClr val="56696A"/>
-                </a:solidFill>
-                <a:latin typeface="Arial" pitchFamily="34" charset="0"/>
-                <a:ea typeface="Arial" pitchFamily="34" charset="-122"/>
-                <a:cs typeface="Arial" pitchFamily="34" charset="-120"/>
-              </a:rPr>
-              <a:t>PMS · BJP Technologies</a:t>
-            </a:r>
-            <a:endParaRPr lang="en-US" sz="800" dirty="0"/>
-          </a:p>
-        </p:txBody>
-      </p:sp>
-      <p:sp>
-        <p:nvSpPr>
-          <p:cNvPr id="15" name="Text 12"/>
           <p:cNvSpPr/>
           <p:nvPr/>
         </p:nvSpPr>
@@ -6901,7 +8183,7 @@
                 <a:ea typeface="Arial" pitchFamily="34" charset="-122"/>
                 <a:cs typeface="Arial" pitchFamily="34" charset="-120"/>
               </a:rPr>
-              <a:t>SET UP ONCE</a:t>
+              <a:t>EVERY DAY</a:t>
             </a:r>
             <a:endParaRPr lang="en-US" sz="900" dirty="0"/>
           </a:p>
@@ -6940,7 +8222,7 @@
                 <a:ea typeface="Arial" pitchFamily="34" charset="-122"/>
                 <a:cs typeface="Arial" pitchFamily="34" charset="-120"/>
               </a:rPr>
-              <a:t>Your buildings and units</a:t>
+              <a:t>Your dashboard at a glance</a:t>
             </a:r>
             <a:endParaRPr lang="en-US" sz="2600" dirty="0"/>
           </a:p>
@@ -6955,17 +8237,17 @@
         <p:spPr>
           <a:xfrm>
             <a:off x="457200" y="1188720"/>
-            <a:ext cx="310896" cy="310896"/>
-          </a:xfrm>
-          <a:prstGeom prst="ellipse">
+            <a:ext cx="54864" cy="566928"/>
+          </a:xfrm>
+          <a:prstGeom prst="rect">
             <a:avLst/>
           </a:prstGeom>
           <a:solidFill>
-            <a:srgbClr val="DCF1ED"/>
+            <a:srgbClr val="0F766E"/>
           </a:solidFill>
           <a:ln w="12700">
             <a:solidFill>
-              <a:srgbClr val="DCF1ED"/>
+              <a:srgbClr val="0F766E"/>
             </a:solidFill>
             <a:prstDash val="solid"/>
           </a:ln>
@@ -6979,63 +8261,24 @@
         </p:nvSpPr>
         <p:spPr>
           <a:xfrm>
-            <a:off x="457200" y="1188720"/>
-            <a:ext cx="310896" cy="310896"/>
-          </a:xfrm>
-          <a:prstGeom prst="rect">
-            <a:avLst/>
-          </a:prstGeom>
-          <a:noFill/>
-          <a:ln/>
-        </p:spPr>
-        <p:txBody>
-          <a:bodyPr wrap="square" lIns="0" tIns="0" rIns="0" bIns="0" rtlCol="0" anchor="ctr"/>
-          <a:lstStyle/>
-          <a:p>
-            <a:pPr algn="ctr" indent="0" marL="0">
-              <a:buNone/>
-            </a:pPr>
-            <a:r>
-              <a:rPr lang="en-US" sz="1100" b="1" dirty="0">
-                <a:solidFill>
-                  <a:srgbClr val="0B4F4A"/>
-                </a:solidFill>
-                <a:latin typeface="Arial" pitchFamily="34" charset="0"/>
-                <a:ea typeface="Arial" pitchFamily="34" charset="-122"/>
-                <a:cs typeface="Arial" pitchFamily="34" charset="-120"/>
-              </a:rPr>
-              <a:t>1</a:t>
-            </a:r>
-            <a:endParaRPr lang="en-US" sz="1100" dirty="0"/>
-          </a:p>
-        </p:txBody>
-      </p:sp>
-      <p:sp>
-        <p:nvSpPr>
-          <p:cNvPr id="6" name="Text 4"/>
-          <p:cNvSpPr/>
-          <p:nvPr/>
-        </p:nvSpPr>
-        <p:spPr>
-          <a:xfrm>
-            <a:off x="896112" y="1152144"/>
-            <a:ext cx="2926080" cy="749808"/>
-          </a:xfrm>
-          <a:prstGeom prst="rect">
-            <a:avLst/>
-          </a:prstGeom>
-          <a:noFill/>
-          <a:ln/>
-        </p:spPr>
-        <p:txBody>
-          <a:bodyPr wrap="square" lIns="0" tIns="0" rIns="0" bIns="0" rtlCol="0" anchor="t"/>
-          <a:lstStyle/>
-          <a:p>
-            <a:pPr indent="0" marL="0">
-              <a:buNone/>
-            </a:pPr>
-            <a:r>
-              <a:rPr lang="en-US" sz="1200" b="1" dirty="0">
+            <a:off x="640080" y="1188720"/>
+            <a:ext cx="3108960" cy="566928"/>
+          </a:xfrm>
+          <a:prstGeom prst="rect">
+            <a:avLst/>
+          </a:prstGeom>
+          <a:noFill/>
+          <a:ln/>
+        </p:spPr>
+        <p:txBody>
+          <a:bodyPr wrap="square" lIns="0" tIns="0" rIns="0" bIns="0" rtlCol="0" anchor="ctr"/>
+          <a:lstStyle/>
+          <a:p>
+            <a:pPr indent="0" marL="0">
+              <a:buNone/>
+            </a:pPr>
+            <a:r>
+              <a:rPr lang="en-US" sz="1250" b="1" dirty="0">
                 <a:solidFill>
                   <a:srgbClr val="0F1F1E"/>
                 </a:solidFill>
@@ -7043,9 +8286,9 @@
                 <a:ea typeface="Arial" pitchFamily="34" charset="-122"/>
                 <a:cs typeface="Arial" pitchFamily="34" charset="-120"/>
               </a:rPr>
-              <a:t>Locations</a:t>
-            </a:r>
-            <a:endParaRPr lang="en-US" sz="1200" dirty="0"/>
+              <a:t>Occupancy</a:t>
+            </a:r>
+            <a:endParaRPr lang="en-US" sz="1250" dirty="0"/>
           </a:p>
           <a:p>
             <a:pPr indent="0" marL="0">
@@ -7060,32 +8303,32 @@
                 <a:ea typeface="Arial" pitchFamily="34" charset="-122"/>
                 <a:cs typeface="Arial" pitchFamily="34" charset="-120"/>
               </a:rPr>
-              <a:t>Region, district and ward.</a:t>
-            </a:r>
-            <a:endParaRPr lang="en-US" sz="1200" dirty="0"/>
-          </a:p>
-        </p:txBody>
-      </p:sp>
-      <p:sp>
-        <p:nvSpPr>
-          <p:cNvPr id="7" name="Shape 5"/>
-          <p:cNvSpPr/>
-          <p:nvPr/>
-        </p:nvSpPr>
-        <p:spPr>
-          <a:xfrm>
-            <a:off x="457200" y="2011680"/>
-            <a:ext cx="310896" cy="310896"/>
-          </a:xfrm>
-          <a:prstGeom prst="ellipse">
+              <a:t>How many of your units are rented.</a:t>
+            </a:r>
+            <a:endParaRPr lang="en-US" sz="1250" dirty="0"/>
+          </a:p>
+        </p:txBody>
+      </p:sp>
+      <p:sp>
+        <p:nvSpPr>
+          <p:cNvPr id="6" name="Shape 4"/>
+          <p:cNvSpPr/>
+          <p:nvPr/>
+        </p:nvSpPr>
+        <p:spPr>
+          <a:xfrm>
+            <a:off x="457200" y="2048256"/>
+            <a:ext cx="54864" cy="566928"/>
+          </a:xfrm>
+          <a:prstGeom prst="rect">
             <a:avLst/>
           </a:prstGeom>
           <a:solidFill>
-            <a:srgbClr val="DCF1ED"/>
+            <a:srgbClr val="0F766E"/>
           </a:solidFill>
           <a:ln w="12700">
             <a:solidFill>
-              <a:srgbClr val="DCF1ED"/>
+              <a:srgbClr val="0F766E"/>
             </a:solidFill>
             <a:prstDash val="solid"/>
           </a:ln>
@@ -7093,69 +8336,30 @@
       </p:sp>
       <p:sp>
         <p:nvSpPr>
-          <p:cNvPr id="8" name="Text 6"/>
-          <p:cNvSpPr/>
-          <p:nvPr/>
-        </p:nvSpPr>
-        <p:spPr>
-          <a:xfrm>
-            <a:off x="457200" y="2011680"/>
-            <a:ext cx="310896" cy="310896"/>
-          </a:xfrm>
-          <a:prstGeom prst="rect">
-            <a:avLst/>
-          </a:prstGeom>
-          <a:noFill/>
-          <a:ln/>
-        </p:spPr>
-        <p:txBody>
-          <a:bodyPr wrap="square" lIns="0" tIns="0" rIns="0" bIns="0" rtlCol="0" anchor="ctr"/>
-          <a:lstStyle/>
-          <a:p>
-            <a:pPr algn="ctr" indent="0" marL="0">
-              <a:buNone/>
-            </a:pPr>
-            <a:r>
-              <a:rPr lang="en-US" sz="1100" b="1" dirty="0">
-                <a:solidFill>
-                  <a:srgbClr val="0B4F4A"/>
-                </a:solidFill>
-                <a:latin typeface="Arial" pitchFamily="34" charset="0"/>
-                <a:ea typeface="Arial" pitchFamily="34" charset="-122"/>
-                <a:cs typeface="Arial" pitchFamily="34" charset="-120"/>
-              </a:rPr>
-              <a:t>2</a:t>
-            </a:r>
-            <a:endParaRPr lang="en-US" sz="1100" dirty="0"/>
-          </a:p>
-        </p:txBody>
-      </p:sp>
-      <p:sp>
-        <p:nvSpPr>
-          <p:cNvPr id="9" name="Text 7"/>
-          <p:cNvSpPr/>
-          <p:nvPr/>
-        </p:nvSpPr>
-        <p:spPr>
-          <a:xfrm>
-            <a:off x="896112" y="1975104"/>
-            <a:ext cx="2926080" cy="749808"/>
-          </a:xfrm>
-          <a:prstGeom prst="rect">
-            <a:avLst/>
-          </a:prstGeom>
-          <a:noFill/>
-          <a:ln/>
-        </p:spPr>
-        <p:txBody>
-          <a:bodyPr wrap="square" lIns="0" tIns="0" rIns="0" bIns="0" rtlCol="0" anchor="t"/>
-          <a:lstStyle/>
-          <a:p>
-            <a:pPr indent="0" marL="0">
-              <a:buNone/>
-            </a:pPr>
-            <a:r>
-              <a:rPr lang="en-US" sz="1200" b="1" dirty="0">
+          <p:cNvPr id="7" name="Text 5"/>
+          <p:cNvSpPr/>
+          <p:nvPr/>
+        </p:nvSpPr>
+        <p:spPr>
+          <a:xfrm>
+            <a:off x="640080" y="2048256"/>
+            <a:ext cx="3108960" cy="566928"/>
+          </a:xfrm>
+          <a:prstGeom prst="rect">
+            <a:avLst/>
+          </a:prstGeom>
+          <a:noFill/>
+          <a:ln/>
+        </p:spPr>
+        <p:txBody>
+          <a:bodyPr wrap="square" lIns="0" tIns="0" rIns="0" bIns="0" rtlCol="0" anchor="ctr"/>
+          <a:lstStyle/>
+          <a:p>
+            <a:pPr indent="0" marL="0">
+              <a:buNone/>
+            </a:pPr>
+            <a:r>
+              <a:rPr lang="en-US" sz="1250" b="1" dirty="0">
                 <a:solidFill>
                   <a:srgbClr val="0F1F1E"/>
                 </a:solidFill>
@@ -7163,9 +8367,9 @@
                 <a:ea typeface="Arial" pitchFamily="34" charset="-122"/>
                 <a:cs typeface="Arial" pitchFamily="34" charset="-120"/>
               </a:rPr>
-              <a:t>Properties</a:t>
-            </a:r>
-            <a:endParaRPr lang="en-US" sz="1200" dirty="0"/>
+              <a:t>Collected this month</a:t>
+            </a:r>
+            <a:endParaRPr lang="en-US" sz="1250" dirty="0"/>
           </a:p>
           <a:p>
             <a:pPr indent="0" marL="0">
@@ -7180,32 +8384,32 @@
                 <a:ea typeface="Arial" pitchFamily="34" charset="-122"/>
                 <a:cs typeface="Arial" pitchFamily="34" charset="-120"/>
               </a:rPr>
-              <a:t>A building or compound, with photos.</a:t>
-            </a:r>
-            <a:endParaRPr lang="en-US" sz="1200" dirty="0"/>
-          </a:p>
-        </p:txBody>
-      </p:sp>
-      <p:sp>
-        <p:nvSpPr>
-          <p:cNvPr id="10" name="Shape 8"/>
-          <p:cNvSpPr/>
-          <p:nvPr/>
-        </p:nvSpPr>
-        <p:spPr>
-          <a:xfrm>
-            <a:off x="457200" y="2834640"/>
-            <a:ext cx="310896" cy="310896"/>
-          </a:xfrm>
-          <a:prstGeom prst="ellipse">
+              <a:t>Payments recorded against what was billed.</a:t>
+            </a:r>
+            <a:endParaRPr lang="en-US" sz="1250" dirty="0"/>
+          </a:p>
+        </p:txBody>
+      </p:sp>
+      <p:sp>
+        <p:nvSpPr>
+          <p:cNvPr id="8" name="Shape 6"/>
+          <p:cNvSpPr/>
+          <p:nvPr/>
+        </p:nvSpPr>
+        <p:spPr>
+          <a:xfrm>
+            <a:off x="457200" y="2907792"/>
+            <a:ext cx="54864" cy="566928"/>
+          </a:xfrm>
+          <a:prstGeom prst="rect">
             <a:avLst/>
           </a:prstGeom>
           <a:solidFill>
-            <a:srgbClr val="DCF1ED"/>
+            <a:srgbClr val="0F766E"/>
           </a:solidFill>
           <a:ln w="12700">
             <a:solidFill>
-              <a:srgbClr val="DCF1ED"/>
+              <a:srgbClr val="0F766E"/>
             </a:solidFill>
             <a:prstDash val="solid"/>
           </a:ln>
@@ -7213,69 +8417,30 @@
       </p:sp>
       <p:sp>
         <p:nvSpPr>
-          <p:cNvPr id="11" name="Text 9"/>
-          <p:cNvSpPr/>
-          <p:nvPr/>
-        </p:nvSpPr>
-        <p:spPr>
-          <a:xfrm>
-            <a:off x="457200" y="2834640"/>
-            <a:ext cx="310896" cy="310896"/>
-          </a:xfrm>
-          <a:prstGeom prst="rect">
-            <a:avLst/>
-          </a:prstGeom>
-          <a:noFill/>
-          <a:ln/>
-        </p:spPr>
-        <p:txBody>
-          <a:bodyPr wrap="square" lIns="0" tIns="0" rIns="0" bIns="0" rtlCol="0" anchor="ctr"/>
-          <a:lstStyle/>
-          <a:p>
-            <a:pPr algn="ctr" indent="0" marL="0">
-              <a:buNone/>
-            </a:pPr>
-            <a:r>
-              <a:rPr lang="en-US" sz="1100" b="1" dirty="0">
-                <a:solidFill>
-                  <a:srgbClr val="0B4F4A"/>
-                </a:solidFill>
-                <a:latin typeface="Arial" pitchFamily="34" charset="0"/>
-                <a:ea typeface="Arial" pitchFamily="34" charset="-122"/>
-                <a:cs typeface="Arial" pitchFamily="34" charset="-120"/>
-              </a:rPr>
-              <a:t>3</a:t>
-            </a:r>
-            <a:endParaRPr lang="en-US" sz="1100" dirty="0"/>
-          </a:p>
-        </p:txBody>
-      </p:sp>
-      <p:sp>
-        <p:nvSpPr>
-          <p:cNvPr id="12" name="Text 10"/>
-          <p:cNvSpPr/>
-          <p:nvPr/>
-        </p:nvSpPr>
-        <p:spPr>
-          <a:xfrm>
-            <a:off x="896112" y="2798064"/>
-            <a:ext cx="2926080" cy="749808"/>
-          </a:xfrm>
-          <a:prstGeom prst="rect">
-            <a:avLst/>
-          </a:prstGeom>
-          <a:noFill/>
-          <a:ln/>
-        </p:spPr>
-        <p:txBody>
-          <a:bodyPr wrap="square" lIns="0" tIns="0" rIns="0" bIns="0" rtlCol="0" anchor="t"/>
-          <a:lstStyle/>
-          <a:p>
-            <a:pPr indent="0" marL="0">
-              <a:buNone/>
-            </a:pPr>
-            <a:r>
-              <a:rPr lang="en-US" sz="1200" b="1" dirty="0">
+          <p:cNvPr id="9" name="Text 7"/>
+          <p:cNvSpPr/>
+          <p:nvPr/>
+        </p:nvSpPr>
+        <p:spPr>
+          <a:xfrm>
+            <a:off x="640080" y="2907792"/>
+            <a:ext cx="3108960" cy="566928"/>
+          </a:xfrm>
+          <a:prstGeom prst="rect">
+            <a:avLst/>
+          </a:prstGeom>
+          <a:noFill/>
+          <a:ln/>
+        </p:spPr>
+        <p:txBody>
+          <a:bodyPr wrap="square" lIns="0" tIns="0" rIns="0" bIns="0" rtlCol="0" anchor="ctr"/>
+          <a:lstStyle/>
+          <a:p>
+            <a:pPr indent="0" marL="0">
+              <a:buNone/>
+            </a:pPr>
+            <a:r>
+              <a:rPr lang="en-US" sz="1250" b="1" dirty="0">
                 <a:solidFill>
                   <a:srgbClr val="0F1F1E"/>
                 </a:solidFill>
@@ -7283,9 +8448,9 @@
                 <a:ea typeface="Arial" pitchFamily="34" charset="-122"/>
                 <a:cs typeface="Arial" pitchFamily="34" charset="-120"/>
               </a:rPr>
-              <a:t>Units</a:t>
-            </a:r>
-            <a:endParaRPr lang="en-US" sz="1200" dirty="0"/>
+              <a:t>Outstanding</a:t>
+            </a:r>
+            <a:endParaRPr lang="en-US" sz="1250" dirty="0"/>
           </a:p>
           <a:p>
             <a:pPr indent="0" marL="0">
@@ -7300,34 +8465,32 @@
                 <a:ea typeface="Arial" pitchFamily="34" charset="-122"/>
                 <a:cs typeface="Arial" pitchFamily="34" charset="-120"/>
               </a:rPr>
-              <a:t>Room, apartment, business frame, office, shop or warehouse, each with its rent and billing cycle.</a:t>
-            </a:r>
-            <a:endParaRPr lang="en-US" sz="1200" dirty="0"/>
-          </a:p>
-        </p:txBody>
-      </p:sp>
-      <p:sp>
-        <p:nvSpPr>
-          <p:cNvPr id="13" name="Shape 11"/>
-          <p:cNvSpPr/>
-          <p:nvPr/>
-        </p:nvSpPr>
-        <p:spPr>
-          <a:xfrm>
-            <a:off x="457200" y="3703320"/>
-            <a:ext cx="3337560" cy="640080"/>
-          </a:xfrm>
-          <a:prstGeom prst="roundRect">
-            <a:avLst>
-              <a:gd name="adj" fmla="val 8571"/>
-            </a:avLst>
+              <a:t>Everything still owed on open invoices.</a:t>
+            </a:r>
+            <a:endParaRPr lang="en-US" sz="1250" dirty="0"/>
+          </a:p>
+        </p:txBody>
+      </p:sp>
+      <p:sp>
+        <p:nvSpPr>
+          <p:cNvPr id="10" name="Shape 8"/>
+          <p:cNvSpPr/>
+          <p:nvPr/>
+        </p:nvSpPr>
+        <p:spPr>
+          <a:xfrm>
+            <a:off x="457200" y="3767328"/>
+            <a:ext cx="54864" cy="566928"/>
+          </a:xfrm>
+          <a:prstGeom prst="rect">
+            <a:avLst/>
           </a:prstGeom>
           <a:solidFill>
-            <a:srgbClr val="F1F6F5"/>
+            <a:srgbClr val="0F766E"/>
           </a:solidFill>
           <a:ln w="12700">
             <a:solidFill>
-              <a:srgbClr val="F1F6F5"/>
+              <a:srgbClr val="0F766E"/>
             </a:solidFill>
             <a:prstDash val="solid"/>
           </a:ln>
@@ -7335,30 +8498,30 @@
       </p:sp>
       <p:sp>
         <p:nvSpPr>
-          <p:cNvPr id="14" name="Text 12"/>
-          <p:cNvSpPr/>
-          <p:nvPr/>
-        </p:nvSpPr>
-        <p:spPr>
-          <a:xfrm>
-            <a:off x="594360" y="3703320"/>
-            <a:ext cx="3063240" cy="640080"/>
-          </a:xfrm>
-          <a:prstGeom prst="rect">
-            <a:avLst/>
-          </a:prstGeom>
-          <a:noFill/>
-          <a:ln/>
-        </p:spPr>
-        <p:txBody>
-          <a:bodyPr wrap="square" lIns="0" tIns="0" rIns="0" bIns="0" rtlCol="0" anchor="ctr"/>
-          <a:lstStyle/>
-          <a:p>
-            <a:pPr indent="0" marL="0">
-              <a:buNone/>
-            </a:pPr>
-            <a:r>
-              <a:rPr lang="en-US" sz="1000" dirty="0">
+          <p:cNvPr id="11" name="Text 9"/>
+          <p:cNvSpPr/>
+          <p:nvPr/>
+        </p:nvSpPr>
+        <p:spPr>
+          <a:xfrm>
+            <a:off x="640080" y="3767328"/>
+            <a:ext cx="3108960" cy="566928"/>
+          </a:xfrm>
+          <a:prstGeom prst="rect">
+            <a:avLst/>
+          </a:prstGeom>
+          <a:noFill/>
+          <a:ln/>
+        </p:spPr>
+        <p:txBody>
+          <a:bodyPr wrap="square" lIns="0" tIns="0" rIns="0" bIns="0" rtlCol="0" anchor="ctr"/>
+          <a:lstStyle/>
+          <a:p>
+            <a:pPr indent="0" marL="0">
+              <a:buNone/>
+            </a:pPr>
+            <a:r>
+              <a:rPr lang="en-US" sz="1250" b="1" dirty="0">
                 <a:solidFill>
                   <a:srgbClr val="0F1F1E"/>
                 </a:solidFill>
@@ -7366,22 +8529,39 @@
                 <a:ea typeface="Arial" pitchFamily="34" charset="-122"/>
                 <a:cs typeface="Arial" pitchFamily="34" charset="-120"/>
               </a:rPr>
-              <a:t>Vacant units appear on your website automatically, with photos, rent and amenities.</a:t>
-            </a:r>
-            <a:endParaRPr lang="en-US" sz="1000" dirty="0"/>
-          </a:p>
-        </p:txBody>
-      </p:sp>
-      <p:sp>
-        <p:nvSpPr>
-          <p:cNvPr id="15" name="Shape 13"/>
+              <a:t>Overdue</a:t>
+            </a:r>
+            <a:endParaRPr lang="en-US" sz="1250" dirty="0"/>
+          </a:p>
+          <a:p>
+            <a:pPr indent="0" marL="0">
+              <a:buNone/>
+            </a:pPr>
+            <a:r>
+              <a:rPr lang="en-US" sz="1050" dirty="0">
+                <a:solidFill>
+                  <a:srgbClr val="56696A"/>
+                </a:solidFill>
+                <a:latin typeface="Arial" pitchFamily="34" charset="0"/>
+                <a:ea typeface="Arial" pitchFamily="34" charset="-122"/>
+                <a:cs typeface="Arial" pitchFamily="34" charset="-120"/>
+              </a:rPr>
+              <a:t>The part that is past its due date.</a:t>
+            </a:r>
+            <a:endParaRPr lang="en-US" sz="1250" dirty="0"/>
+          </a:p>
+        </p:txBody>
+      </p:sp>
+      <p:sp>
+        <p:nvSpPr>
+          <p:cNvPr id="12" name="Shape 10"/>
           <p:cNvSpPr/>
           <p:nvPr/>
         </p:nvSpPr>
         <p:spPr>
           <a:xfrm>
             <a:off x="4169664" y="1152144"/>
-            <a:ext cx="4553712" cy="3226139"/>
+            <a:ext cx="4553712" cy="3226316"/>
           </a:xfrm>
           <a:prstGeom prst="rect">
             <a:avLst/>
@@ -7406,7 +8586,7 @@
       </p:sp>
       <p:pic>
         <p:nvPicPr>
-          <p:cNvPr id="16" name="Image 0" descr="Adding a unit">    </p:cNvPr>
+          <p:cNvPr id="13" name="Image 0" descr="PMS dashboard">    </p:cNvPr>
           <p:cNvPicPr>
             <a:picLocks noChangeAspect="1"/>
           </p:cNvPicPr>
@@ -7421,7 +8601,7 @@
         <p:spPr>
           <a:xfrm>
             <a:off x="4206240" y="1188720"/>
-            <a:ext cx="4480560" cy="3152987"/>
+            <a:ext cx="4480560" cy="3153164"/>
           </a:xfrm>
           <a:prstGeom prst="rect">
             <a:avLst/>
@@ -7430,7 +8610,7 @@
       </p:pic>
       <p:sp>
         <p:nvSpPr>
-          <p:cNvPr id="17" name="Text 14"/>
+          <p:cNvPr id="14" name="Text 11"/>
           <p:cNvSpPr/>
           <p:nvPr/>
         </p:nvSpPr>
@@ -7469,7 +8649,7 @@
       </p:sp>
       <p:sp>
         <p:nvSpPr>
-          <p:cNvPr id="18" name="Text 15"/>
+          <p:cNvPr id="15" name="Text 12"/>
           <p:cNvSpPr/>
           <p:nvPr/>
         </p:nvSpPr>
@@ -7564,7 +8744,7 @@
                 <a:ea typeface="Arial" pitchFamily="34" charset="-122"/>
                 <a:cs typeface="Arial" pitchFamily="34" charset="-120"/>
               </a:rPr>
-              <a:t>LEASING</a:t>
+              <a:t>SET UP ONCE</a:t>
             </a:r>
             <a:endParaRPr lang="en-US" sz="900" dirty="0"/>
           </a:p>
@@ -7603,7 +8783,7 @@
                 <a:ea typeface="Arial" pitchFamily="34" charset="-122"/>
                 <a:cs typeface="Arial" pitchFamily="34" charset="-120"/>
               </a:rPr>
-              <a:t>Renters and leases</a:t>
+              <a:t>Your buildings and units</a:t>
             </a:r>
             <a:endParaRPr lang="en-US" sz="2600" dirty="0"/>
           </a:p>
@@ -7682,7 +8862,7 @@
         <p:spPr>
           <a:xfrm>
             <a:off x="896112" y="1152144"/>
-            <a:ext cx="2926080" cy="713232"/>
+            <a:ext cx="2926080" cy="749808"/>
           </a:xfrm>
           <a:prstGeom prst="rect">
             <a:avLst/>
@@ -7706,7 +8886,7 @@
                 <a:ea typeface="Arial" pitchFamily="34" charset="-122"/>
                 <a:cs typeface="Arial" pitchFamily="34" charset="-120"/>
               </a:rPr>
-              <a:t>Add the renter</a:t>
+              <a:t>Locations</a:t>
             </a:r>
             <a:endParaRPr lang="en-US" sz="1200" dirty="0"/>
           </a:p>
@@ -7723,7 +8903,7 @@
                 <a:ea typeface="Arial" pitchFamily="34" charset="-122"/>
                 <a:cs typeface="Arial" pitchFamily="34" charset="-120"/>
               </a:rPr>
-              <a:t>Name, phone and email. The phone is their portal sign-in.</a:t>
+              <a:t>Region, district and ward.</a:t>
             </a:r>
             <a:endParaRPr lang="en-US" sz="1200" dirty="0"/>
           </a:p>
@@ -7737,7 +8917,7 @@
         </p:nvSpPr>
         <p:spPr>
           <a:xfrm>
-            <a:off x="457200" y="1975104"/>
+            <a:off x="457200" y="2011680"/>
             <a:ext cx="310896" cy="310896"/>
           </a:xfrm>
           <a:prstGeom prst="ellipse">
@@ -7762,7 +8942,7 @@
         </p:nvSpPr>
         <p:spPr>
           <a:xfrm>
-            <a:off x="457200" y="1975104"/>
+            <a:off x="457200" y="2011680"/>
             <a:ext cx="310896" cy="310896"/>
           </a:xfrm>
           <a:prstGeom prst="rect">
@@ -7801,8 +8981,8 @@
         </p:nvSpPr>
         <p:spPr>
           <a:xfrm>
-            <a:off x="896112" y="1938528"/>
-            <a:ext cx="2926080" cy="713232"/>
+            <a:off x="896112" y="1975104"/>
+            <a:ext cx="2926080" cy="749808"/>
           </a:xfrm>
           <a:prstGeom prst="rect">
             <a:avLst/>
@@ -7826,7 +9006,7 @@
                 <a:ea typeface="Arial" pitchFamily="34" charset="-122"/>
                 <a:cs typeface="Arial" pitchFamily="34" charset="-120"/>
               </a:rPr>
-              <a:t>Create the lease</a:t>
+              <a:t>Properties</a:t>
             </a:r>
             <a:endParaRPr lang="en-US" sz="1200" dirty="0"/>
           </a:p>
@@ -7843,7 +9023,7 @@
                 <a:ea typeface="Arial" pitchFamily="34" charset="-122"/>
                 <a:cs typeface="Arial" pitchFamily="34" charset="-120"/>
               </a:rPr>
-              <a:t>Four steps: renter, unit, terms, confirm.</a:t>
+              <a:t>A building or compound, with photos.</a:t>
             </a:r>
             <a:endParaRPr lang="en-US" sz="1200" dirty="0"/>
           </a:p>
@@ -7857,7 +9037,7 @@
         </p:nvSpPr>
         <p:spPr>
           <a:xfrm>
-            <a:off x="457200" y="2761488"/>
+            <a:off x="457200" y="2834640"/>
             <a:ext cx="310896" cy="310896"/>
           </a:xfrm>
           <a:prstGeom prst="ellipse">
@@ -7882,7 +9062,7 @@
         </p:nvSpPr>
         <p:spPr>
           <a:xfrm>
-            <a:off x="457200" y="2761488"/>
+            <a:off x="457200" y="2834640"/>
             <a:ext cx="310896" cy="310896"/>
           </a:xfrm>
           <a:prstGeom prst="rect">
@@ -7921,8 +9101,8 @@
         </p:nvSpPr>
         <p:spPr>
           <a:xfrm>
-            <a:off x="896112" y="2724912"/>
-            <a:ext cx="2926080" cy="713232"/>
+            <a:off x="896112" y="2798064"/>
+            <a:ext cx="2926080" cy="749808"/>
           </a:xfrm>
           <a:prstGeom prst="rect">
             <a:avLst/>
@@ -7946,7 +9126,7 @@
                 <a:ea typeface="Arial" pitchFamily="34" charset="-122"/>
                 <a:cs typeface="Arial" pitchFamily="34" charset="-120"/>
               </a:rPr>
-              <a:t>Activate it</a:t>
+              <a:t>Units</a:t>
             </a:r>
             <a:endParaRPr lang="en-US" sz="1200" dirty="0"/>
           </a:p>
@@ -7963,7 +9143,7 @@
                 <a:ea typeface="Arial" pitchFamily="34" charset="-122"/>
                 <a:cs typeface="Arial" pitchFamily="34" charset="-120"/>
               </a:rPr>
-              <a:t>The unit is marked occupied and the renter is invited to the portal.</a:t>
+              <a:t>Room, apartment, business frame, office, shop or warehouse, each with its rent and billing cycle.</a:t>
             </a:r>
             <a:endParaRPr lang="en-US" sz="1200" dirty="0"/>
           </a:p>
@@ -7977,18 +9157,20 @@
         </p:nvSpPr>
         <p:spPr>
           <a:xfrm>
-            <a:off x="457200" y="3547872"/>
-            <a:ext cx="310896" cy="310896"/>
-          </a:xfrm>
-          <a:prstGeom prst="ellipse">
-            <a:avLst/>
+            <a:off x="457200" y="3703320"/>
+            <a:ext cx="3337560" cy="640080"/>
+          </a:xfrm>
+          <a:prstGeom prst="roundRect">
+            <a:avLst>
+              <a:gd name="adj" fmla="val 8571"/>
+            </a:avLst>
           </a:prstGeom>
           <a:solidFill>
-            <a:srgbClr val="DCF1ED"/>
+            <a:srgbClr val="F1F6F5"/>
           </a:solidFill>
           <a:ln w="12700">
             <a:solidFill>
-              <a:srgbClr val="DCF1ED"/>
+              <a:srgbClr val="F1F6F5"/>
             </a:solidFill>
             <a:prstDash val="solid"/>
           </a:ln>
@@ -8002,63 +9184,24 @@
         </p:nvSpPr>
         <p:spPr>
           <a:xfrm>
-            <a:off x="457200" y="3547872"/>
-            <a:ext cx="310896" cy="310896"/>
-          </a:xfrm>
-          <a:prstGeom prst="rect">
-            <a:avLst/>
-          </a:prstGeom>
-          <a:noFill/>
-          <a:ln/>
-        </p:spPr>
-        <p:txBody>
-          <a:bodyPr wrap="square" lIns="0" tIns="0" rIns="0" bIns="0" rtlCol="0" anchor="ctr"/>
-          <a:lstStyle/>
-          <a:p>
-            <a:pPr algn="ctr" indent="0" marL="0">
-              <a:buNone/>
-            </a:pPr>
-            <a:r>
-              <a:rPr lang="en-US" sz="1100" b="1" dirty="0">
-                <a:solidFill>
-                  <a:srgbClr val="0B4F4A"/>
-                </a:solidFill>
-                <a:latin typeface="Arial" pitchFamily="34" charset="0"/>
-                <a:ea typeface="Arial" pitchFamily="34" charset="-122"/>
-                <a:cs typeface="Arial" pitchFamily="34" charset="-120"/>
-              </a:rPr>
-              <a:t>4</a:t>
-            </a:r>
-            <a:endParaRPr lang="en-US" sz="1100" dirty="0"/>
-          </a:p>
-        </p:txBody>
-      </p:sp>
-      <p:sp>
-        <p:nvSpPr>
-          <p:cNvPr id="15" name="Text 13"/>
-          <p:cNvSpPr/>
-          <p:nvPr/>
-        </p:nvSpPr>
-        <p:spPr>
-          <a:xfrm>
-            <a:off x="896112" y="3511296"/>
-            <a:ext cx="2926080" cy="713232"/>
-          </a:xfrm>
-          <a:prstGeom prst="rect">
-            <a:avLst/>
-          </a:prstGeom>
-          <a:noFill/>
-          <a:ln/>
-        </p:spPr>
-        <p:txBody>
-          <a:bodyPr wrap="square" lIns="0" tIns="0" rIns="0" bIns="0" rtlCol="0" anchor="t"/>
-          <a:lstStyle/>
-          <a:p>
-            <a:pPr indent="0" marL="0">
-              <a:buNone/>
-            </a:pPr>
-            <a:r>
-              <a:rPr lang="en-US" sz="1200" b="1" dirty="0">
+            <a:off x="594360" y="3703320"/>
+            <a:ext cx="3063240" cy="640080"/>
+          </a:xfrm>
+          <a:prstGeom prst="rect">
+            <a:avLst/>
+          </a:prstGeom>
+          <a:noFill/>
+          <a:ln/>
+        </p:spPr>
+        <p:txBody>
+          <a:bodyPr wrap="square" lIns="0" tIns="0" rIns="0" bIns="0" rtlCol="0" anchor="ctr"/>
+          <a:lstStyle/>
+          <a:p>
+            <a:pPr indent="0" marL="0">
+              <a:buNone/>
+            </a:pPr>
+            <a:r>
+              <a:rPr lang="en-US" sz="1000" dirty="0">
                 <a:solidFill>
                   <a:srgbClr val="0F1F1E"/>
                 </a:solidFill>
@@ -8066,32 +9209,15 @@
                 <a:ea typeface="Arial" pitchFamily="34" charset="-122"/>
                 <a:cs typeface="Arial" pitchFamily="34" charset="-120"/>
               </a:rPr>
-              <a:t>Print the contract</a:t>
-            </a:r>
-            <a:endParaRPr lang="en-US" sz="1200" dirty="0"/>
-          </a:p>
-          <a:p>
-            <a:pPr indent="0" marL="0">
-              <a:buNone/>
-            </a:pPr>
-            <a:r>
-              <a:rPr lang="en-US" sz="1050" dirty="0">
-                <a:solidFill>
-                  <a:srgbClr val="56696A"/>
-                </a:solidFill>
-                <a:latin typeface="Arial" pitchFamily="34" charset="0"/>
-                <a:ea typeface="Arial" pitchFamily="34" charset="-122"/>
-                <a:cs typeface="Arial" pitchFamily="34" charset="-120"/>
-              </a:rPr>
-              <a:t>Download the lease as a PDF to sign.</a:t>
-            </a:r>
-            <a:endParaRPr lang="en-US" sz="1200" dirty="0"/>
-          </a:p>
-        </p:txBody>
-      </p:sp>
-      <p:sp>
-        <p:nvSpPr>
-          <p:cNvPr id="16" name="Shape 14"/>
+              <a:t>Vacant units appear on your website automatically, with photos, rent and amenities.</a:t>
+            </a:r>
+            <a:endParaRPr lang="en-US" sz="1000" dirty="0"/>
+          </a:p>
+        </p:txBody>
+      </p:sp>
+      <p:sp>
+        <p:nvSpPr>
+          <p:cNvPr id="15" name="Shape 13"/>
           <p:cNvSpPr/>
           <p:nvPr/>
         </p:nvSpPr>
@@ -8123,7 +9249,7 @@
       </p:sp>
       <p:pic>
         <p:nvPicPr>
-          <p:cNvPr id="17" name="Image 0" descr="The leases list">    </p:cNvPr>
+          <p:cNvPr id="16" name="Image 0" descr="Adding a unit">    </p:cNvPr>
           <p:cNvPicPr>
             <a:picLocks noChangeAspect="1"/>
           </p:cNvPicPr>
@@ -8147,7 +9273,7 @@
       </p:pic>
       <p:sp>
         <p:nvSpPr>
-          <p:cNvPr id="18" name="Text 15"/>
+          <p:cNvPr id="17" name="Text 14"/>
           <p:cNvSpPr/>
           <p:nvPr/>
         </p:nvSpPr>
@@ -8186,7 +9312,7 @@
       </p:sp>
       <p:sp>
         <p:nvSpPr>
-          <p:cNvPr id="19" name="Text 16"/>
+          <p:cNvPr id="18" name="Text 15"/>
           <p:cNvSpPr/>
           <p:nvPr/>
         </p:nvSpPr>
@@ -8281,7 +9407,7 @@
                 <a:ea typeface="Arial" pitchFamily="34" charset="-122"/>
                 <a:cs typeface="Arial" pitchFamily="34" charset="-120"/>
               </a:rPr>
-              <a:t>BILLING</a:t>
+              <a:t>LEASING</a:t>
             </a:r>
             <a:endParaRPr lang="en-US" sz="900" dirty="0"/>
           </a:p>
@@ -8320,7 +9446,7 @@
                 <a:ea typeface="Arial" pitchFamily="34" charset="-122"/>
                 <a:cs typeface="Arial" pitchFamily="34" charset="-120"/>
               </a:rPr>
-              <a:t>Invoices</a:t>
+              <a:t>Renters and leases</a:t>
             </a:r>
             <a:endParaRPr lang="en-US" sz="2600" dirty="0"/>
           </a:p>
@@ -8423,7 +9549,7 @@
                 <a:ea typeface="Arial" pitchFamily="34" charset="-122"/>
                 <a:cs typeface="Arial" pitchFamily="34" charset="-120"/>
               </a:rPr>
-              <a:t>Create</a:t>
+              <a:t>Add the renter</a:t>
             </a:r>
             <a:endParaRPr lang="en-US" sz="1200" dirty="0"/>
           </a:p>
@@ -8440,7 +9566,7 @@
                 <a:ea typeface="Arial" pitchFamily="34" charset="-122"/>
                 <a:cs typeface="Arial" pitchFamily="34" charset="-120"/>
               </a:rPr>
-              <a:t>Pick the lease and period, add rent and any other charges.</a:t>
+              <a:t>Name, phone and email. The phone is their portal sign-in.</a:t>
             </a:r>
             <a:endParaRPr lang="en-US" sz="1200" dirty="0"/>
           </a:p>
@@ -8543,7 +9669,7 @@
                 <a:ea typeface="Arial" pitchFamily="34" charset="-122"/>
                 <a:cs typeface="Arial" pitchFamily="34" charset="-120"/>
               </a:rPr>
-              <a:t>Check the draft</a:t>
+              <a:t>Create the lease</a:t>
             </a:r>
             <a:endParaRPr lang="en-US" sz="1200" dirty="0"/>
           </a:p>
@@ -8560,7 +9686,7 @@
                 <a:ea typeface="Arial" pitchFamily="34" charset="-122"/>
                 <a:cs typeface="Arial" pitchFamily="34" charset="-120"/>
               </a:rPr>
-              <a:t>Only you can see it until it's issued.</a:t>
+              <a:t>Four steps: renter, unit, terms, confirm.</a:t>
             </a:r>
             <a:endParaRPr lang="en-US" sz="1200" dirty="0"/>
           </a:p>
@@ -8663,7 +9789,7 @@
                 <a:ea typeface="Arial" pitchFamily="34" charset="-122"/>
                 <a:cs typeface="Arial" pitchFamily="34" charset="-120"/>
               </a:rPr>
-              <a:t>Issue</a:t>
+              <a:t>Activate it</a:t>
             </a:r>
             <a:endParaRPr lang="en-US" sz="1200" dirty="0"/>
           </a:p>
@@ -8680,7 +9806,7 @@
                 <a:ea typeface="Arial" pitchFamily="34" charset="-122"/>
                 <a:cs typeface="Arial" pitchFamily="34" charset="-120"/>
               </a:rPr>
-              <a:t>It gets its number and the renter is emailed and sees it in the portal.</a:t>
+              <a:t>The unit is marked occupied and the renter is invited to the portal.</a:t>
             </a:r>
             <a:endParaRPr lang="en-US" sz="1200" dirty="0"/>
           </a:p>
@@ -8694,20 +9820,18 @@
         </p:nvSpPr>
         <p:spPr>
           <a:xfrm>
-            <a:off x="457200" y="3703320"/>
-            <a:ext cx="3337560" cy="640080"/>
-          </a:xfrm>
-          <a:prstGeom prst="roundRect">
-            <a:avLst>
-              <a:gd name="adj" fmla="val 8571"/>
-            </a:avLst>
+            <a:off x="457200" y="3547872"/>
+            <a:ext cx="310896" cy="310896"/>
+          </a:xfrm>
+          <a:prstGeom prst="ellipse">
+            <a:avLst/>
           </a:prstGeom>
           <a:solidFill>
-            <a:srgbClr val="F1F6F5"/>
+            <a:srgbClr val="DCF1ED"/>
           </a:solidFill>
           <a:ln w="12700">
             <a:solidFill>
-              <a:srgbClr val="F1F6F5"/>
+              <a:srgbClr val="DCF1ED"/>
             </a:solidFill>
             <a:prstDash val="solid"/>
           </a:ln>
@@ -8721,24 +9845,63 @@
         </p:nvSpPr>
         <p:spPr>
           <a:xfrm>
-            <a:off x="594360" y="3703320"/>
-            <a:ext cx="3063240" cy="640080"/>
-          </a:xfrm>
-          <a:prstGeom prst="rect">
-            <a:avLst/>
-          </a:prstGeom>
-          <a:noFill/>
-          <a:ln/>
-        </p:spPr>
-        <p:txBody>
-          <a:bodyPr wrap="square" lIns="0" tIns="0" rIns="0" bIns="0" rtlCol="0" anchor="ctr"/>
-          <a:lstStyle/>
-          <a:p>
-            <a:pPr indent="0" marL="0">
-              <a:buNone/>
-            </a:pPr>
-            <a:r>
-              <a:rPr lang="en-US" sz="1000" dirty="0">
+            <a:off x="457200" y="3547872"/>
+            <a:ext cx="310896" cy="310896"/>
+          </a:xfrm>
+          <a:prstGeom prst="rect">
+            <a:avLst/>
+          </a:prstGeom>
+          <a:noFill/>
+          <a:ln/>
+        </p:spPr>
+        <p:txBody>
+          <a:bodyPr wrap="square" lIns="0" tIns="0" rIns="0" bIns="0" rtlCol="0" anchor="ctr"/>
+          <a:lstStyle/>
+          <a:p>
+            <a:pPr algn="ctr" indent="0" marL="0">
+              <a:buNone/>
+            </a:pPr>
+            <a:r>
+              <a:rPr lang="en-US" sz="1100" b="1" dirty="0">
+                <a:solidFill>
+                  <a:srgbClr val="0B4F4A"/>
+                </a:solidFill>
+                <a:latin typeface="Arial" pitchFamily="34" charset="0"/>
+                <a:ea typeface="Arial" pitchFamily="34" charset="-122"/>
+                <a:cs typeface="Arial" pitchFamily="34" charset="-120"/>
+              </a:rPr>
+              <a:t>4</a:t>
+            </a:r>
+            <a:endParaRPr lang="en-US" sz="1100" dirty="0"/>
+          </a:p>
+        </p:txBody>
+      </p:sp>
+      <p:sp>
+        <p:nvSpPr>
+          <p:cNvPr id="15" name="Text 13"/>
+          <p:cNvSpPr/>
+          <p:nvPr/>
+        </p:nvSpPr>
+        <p:spPr>
+          <a:xfrm>
+            <a:off x="896112" y="3511296"/>
+            <a:ext cx="2926080" cy="713232"/>
+          </a:xfrm>
+          <a:prstGeom prst="rect">
+            <a:avLst/>
+          </a:prstGeom>
+          <a:noFill/>
+          <a:ln/>
+        </p:spPr>
+        <p:txBody>
+          <a:bodyPr wrap="square" lIns="0" tIns="0" rIns="0" bIns="0" rtlCol="0" anchor="t"/>
+          <a:lstStyle/>
+          <a:p>
+            <a:pPr indent="0" marL="0">
+              <a:buNone/>
+            </a:pPr>
+            <a:r>
+              <a:rPr lang="en-US" sz="1200" b="1" dirty="0">
                 <a:solidFill>
                   <a:srgbClr val="0F1F1E"/>
                 </a:solidFill>
@@ -8746,15 +9909,32 @@
                 <a:ea typeface="Arial" pitchFamily="34" charset="-122"/>
                 <a:cs typeface="Arial" pitchFamily="34" charset="-120"/>
               </a:rPr>
-              <a:t>Every morning at 06:00 PMS marks late invoices as overdue and emails the renter a reminder.</a:t>
-            </a:r>
-            <a:endParaRPr lang="en-US" sz="1000" dirty="0"/>
-          </a:p>
-        </p:txBody>
-      </p:sp>
-      <p:sp>
-        <p:nvSpPr>
-          <p:cNvPr id="15" name="Shape 13"/>
+              <a:t>Print the contract</a:t>
+            </a:r>
+            <a:endParaRPr lang="en-US" sz="1200" dirty="0"/>
+          </a:p>
+          <a:p>
+            <a:pPr indent="0" marL="0">
+              <a:buNone/>
+            </a:pPr>
+            <a:r>
+              <a:rPr lang="en-US" sz="1050" dirty="0">
+                <a:solidFill>
+                  <a:srgbClr val="56696A"/>
+                </a:solidFill>
+                <a:latin typeface="Arial" pitchFamily="34" charset="0"/>
+                <a:ea typeface="Arial" pitchFamily="34" charset="-122"/>
+                <a:cs typeface="Arial" pitchFamily="34" charset="-120"/>
+              </a:rPr>
+              <a:t>Download the lease as a PDF to sign.</a:t>
+            </a:r>
+            <a:endParaRPr lang="en-US" sz="1200" dirty="0"/>
+          </a:p>
+        </p:txBody>
+      </p:sp>
+      <p:sp>
+        <p:nvSpPr>
+          <p:cNvPr id="16" name="Shape 14"/>
           <p:cNvSpPr/>
           <p:nvPr/>
         </p:nvSpPr>
@@ -8786,7 +9966,7 @@
       </p:sp>
       <p:pic>
         <p:nvPicPr>
-          <p:cNvPr id="16" name="Image 0" descr="The invoices list">    </p:cNvPr>
+          <p:cNvPr id="17" name="Image 0" descr="The leases list">    </p:cNvPr>
           <p:cNvPicPr>
             <a:picLocks noChangeAspect="1"/>
           </p:cNvPicPr>
@@ -8810,7 +9990,7 @@
       </p:pic>
       <p:sp>
         <p:nvSpPr>
-          <p:cNvPr id="17" name="Text 14"/>
+          <p:cNvPr id="18" name="Text 15"/>
           <p:cNvSpPr/>
           <p:nvPr/>
         </p:nvSpPr>
@@ -8849,7 +10029,7 @@
       </p:sp>
       <p:sp>
         <p:nvSpPr>
-          <p:cNvPr id="18" name="Text 15"/>
+          <p:cNvPr id="19" name="Text 16"/>
           <p:cNvSpPr/>
           <p:nvPr/>
         </p:nvSpPr>
@@ -8983,7 +10163,7 @@
                 <a:ea typeface="Arial" pitchFamily="34" charset="-122"/>
                 <a:cs typeface="Arial" pitchFamily="34" charset="-120"/>
               </a:rPr>
-              <a:t>Payments and receipts</a:t>
+              <a:t>Invoices</a:t>
             </a:r>
             <a:endParaRPr lang="en-US" sz="2600" dirty="0"/>
           </a:p>
@@ -9062,7 +10242,7 @@
         <p:spPr>
           <a:xfrm>
             <a:off x="896112" y="1152144"/>
-            <a:ext cx="2926080" cy="795528"/>
+            <a:ext cx="2926080" cy="713232"/>
           </a:xfrm>
           <a:prstGeom prst="rect">
             <a:avLst/>
@@ -9086,7 +10266,7 @@
                 <a:ea typeface="Arial" pitchFamily="34" charset="-122"/>
                 <a:cs typeface="Arial" pitchFamily="34" charset="-120"/>
               </a:rPr>
-              <a:t>Record the payment</a:t>
+              <a:t>Create</a:t>
             </a:r>
             <a:endParaRPr lang="en-US" sz="1200" dirty="0"/>
           </a:p>
@@ -9103,7 +10283,7 @@
                 <a:ea typeface="Arial" pitchFamily="34" charset="-122"/>
                 <a:cs typeface="Arial" pitchFamily="34" charset="-120"/>
               </a:rPr>
-              <a:t>Cash, bank transfer, mobile money, cheque or card. Part payments are fine.</a:t>
+              <a:t>Pick the lease and period, add rent and any other charges.</a:t>
             </a:r>
             <a:endParaRPr lang="en-US" sz="1200" dirty="0"/>
           </a:p>
@@ -9117,7 +10297,7 @@
         </p:nvSpPr>
         <p:spPr>
           <a:xfrm>
-            <a:off x="457200" y="2057400"/>
+            <a:off x="457200" y="1975104"/>
             <a:ext cx="310896" cy="310896"/>
           </a:xfrm>
           <a:prstGeom prst="ellipse">
@@ -9142,7 +10322,7 @@
         </p:nvSpPr>
         <p:spPr>
           <a:xfrm>
-            <a:off x="457200" y="2057400"/>
+            <a:off x="457200" y="1975104"/>
             <a:ext cx="310896" cy="310896"/>
           </a:xfrm>
           <a:prstGeom prst="rect">
@@ -9181,8 +10361,8 @@
         </p:nvSpPr>
         <p:spPr>
           <a:xfrm>
-            <a:off x="896112" y="2020824"/>
-            <a:ext cx="2926080" cy="795528"/>
+            <a:off x="896112" y="1938528"/>
+            <a:ext cx="2926080" cy="713232"/>
           </a:xfrm>
           <a:prstGeom prst="rect">
             <a:avLst/>
@@ -9206,7 +10386,7 @@
                 <a:ea typeface="Arial" pitchFamily="34" charset="-122"/>
                 <a:cs typeface="Arial" pitchFamily="34" charset="-120"/>
               </a:rPr>
-              <a:t>Balance updates</a:t>
+              <a:t>Check the draft</a:t>
             </a:r>
             <a:endParaRPr lang="en-US" sz="1200" dirty="0"/>
           </a:p>
@@ -9223,7 +10403,7 @@
                 <a:ea typeface="Arial" pitchFamily="34" charset="-122"/>
                 <a:cs typeface="Arial" pitchFamily="34" charset="-120"/>
               </a:rPr>
-              <a:t>The invoice becomes partial or paid.</a:t>
+              <a:t>Only you can see it until it's issued.</a:t>
             </a:r>
             <a:endParaRPr lang="en-US" sz="1200" dirty="0"/>
           </a:p>
@@ -9237,7 +10417,7 @@
         </p:nvSpPr>
         <p:spPr>
           <a:xfrm>
-            <a:off x="457200" y="2926080"/>
+            <a:off x="457200" y="2761488"/>
             <a:ext cx="310896" cy="310896"/>
           </a:xfrm>
           <a:prstGeom prst="ellipse">
@@ -9262,7 +10442,7 @@
         </p:nvSpPr>
         <p:spPr>
           <a:xfrm>
-            <a:off x="457200" y="2926080"/>
+            <a:off x="457200" y="2761488"/>
             <a:ext cx="310896" cy="310896"/>
           </a:xfrm>
           <a:prstGeom prst="rect">
@@ -9301,8 +10481,8 @@
         </p:nvSpPr>
         <p:spPr>
           <a:xfrm>
-            <a:off x="896112" y="2889504"/>
-            <a:ext cx="2926080" cy="795528"/>
+            <a:off x="896112" y="2724912"/>
+            <a:ext cx="2926080" cy="713232"/>
           </a:xfrm>
           <a:prstGeom prst="rect">
             <a:avLst/>
@@ -9326,7 +10506,7 @@
                 <a:ea typeface="Arial" pitchFamily="34" charset="-122"/>
                 <a:cs typeface="Arial" pitchFamily="34" charset="-120"/>
               </a:rPr>
-              <a:t>Receipt goes out</a:t>
+              <a:t>Issue</a:t>
             </a:r>
             <a:endParaRPr lang="en-US" sz="1200" dirty="0"/>
           </a:p>
@@ -9343,7 +10523,7 @@
                 <a:ea typeface="Arial" pitchFamily="34" charset="-122"/>
                 <a:cs typeface="Arial" pitchFamily="34" charset="-120"/>
               </a:rPr>
-              <a:t>A numbered PDF receipt is emailed to the renter automatically.</a:t>
+              <a:t>It gets its number and the renter is emailed and sees it in the portal.</a:t>
             </a:r>
             <a:endParaRPr lang="en-US" sz="1200" dirty="0"/>
           </a:p>
@@ -9357,8 +10537,74 @@
         </p:nvSpPr>
         <p:spPr>
           <a:xfrm>
+            <a:off x="457200" y="3703320"/>
+            <a:ext cx="3337560" cy="640080"/>
+          </a:xfrm>
+          <a:prstGeom prst="roundRect">
+            <a:avLst>
+              <a:gd name="adj" fmla="val 8571"/>
+            </a:avLst>
+          </a:prstGeom>
+          <a:solidFill>
+            <a:srgbClr val="F1F6F5"/>
+          </a:solidFill>
+          <a:ln w="12700">
+            <a:solidFill>
+              <a:srgbClr val="F1F6F5"/>
+            </a:solidFill>
+            <a:prstDash val="solid"/>
+          </a:ln>
+        </p:spPr>
+      </p:sp>
+      <p:sp>
+        <p:nvSpPr>
+          <p:cNvPr id="14" name="Text 12"/>
+          <p:cNvSpPr/>
+          <p:nvPr/>
+        </p:nvSpPr>
+        <p:spPr>
+          <a:xfrm>
+            <a:off x="594360" y="3703320"/>
+            <a:ext cx="3063240" cy="640080"/>
+          </a:xfrm>
+          <a:prstGeom prst="rect">
+            <a:avLst/>
+          </a:prstGeom>
+          <a:noFill/>
+          <a:ln/>
+        </p:spPr>
+        <p:txBody>
+          <a:bodyPr wrap="square" lIns="0" tIns="0" rIns="0" bIns="0" rtlCol="0" anchor="ctr"/>
+          <a:lstStyle/>
+          <a:p>
+            <a:pPr indent="0" marL="0">
+              <a:buNone/>
+            </a:pPr>
+            <a:r>
+              <a:rPr lang="en-US" sz="1000" dirty="0">
+                <a:solidFill>
+                  <a:srgbClr val="0F1F1E"/>
+                </a:solidFill>
+                <a:latin typeface="Arial" pitchFamily="34" charset="0"/>
+                <a:ea typeface="Arial" pitchFamily="34" charset="-122"/>
+                <a:cs typeface="Arial" pitchFamily="34" charset="-120"/>
+              </a:rPr>
+              <a:t>Every morning at 06:00 PMS marks late invoices as overdue and emails the renter a reminder.</a:t>
+            </a:r>
+            <a:endParaRPr lang="en-US" sz="1000" dirty="0"/>
+          </a:p>
+        </p:txBody>
+      </p:sp>
+      <p:sp>
+        <p:nvSpPr>
+          <p:cNvPr id="15" name="Shape 13"/>
+          <p:cNvSpPr/>
+          <p:nvPr/>
+        </p:nvSpPr>
+        <p:spPr>
+          <a:xfrm>
             <a:off x="4169664" y="1152144"/>
-            <a:ext cx="4553712" cy="3227230"/>
+            <a:ext cx="4553712" cy="3226139"/>
           </a:xfrm>
           <a:prstGeom prst="rect">
             <a:avLst/>
@@ -9383,7 +10629,7 @@
       </p:sp>
       <p:pic>
         <p:nvPicPr>
-          <p:cNvPr id="14" name="Image 0" descr="Recording a payment">    </p:cNvPr>
+          <p:cNvPr id="16" name="Image 0" descr="The invoices list">    </p:cNvPr>
           <p:cNvPicPr>
             <a:picLocks noChangeAspect="1"/>
           </p:cNvPicPr>
@@ -9398,7 +10644,7 @@
         <p:spPr>
           <a:xfrm>
             <a:off x="4206240" y="1188720"/>
-            <a:ext cx="4480560" cy="3154078"/>
+            <a:ext cx="4480560" cy="3152987"/>
           </a:xfrm>
           <a:prstGeom prst="rect">
             <a:avLst/>
@@ -9407,7 +10653,7 @@
       </p:pic>
       <p:sp>
         <p:nvSpPr>
-          <p:cNvPr id="15" name="Text 12"/>
+          <p:cNvPr id="17" name="Text 14"/>
           <p:cNvSpPr/>
           <p:nvPr/>
         </p:nvSpPr>
@@ -9446,7 +10692,7 @@
       </p:sp>
       <p:sp>
         <p:nvSpPr>
-          <p:cNvPr id="16" name="Text 13"/>
+          <p:cNvPr id="18" name="Text 15"/>
           <p:cNvSpPr/>
           <p:nvPr/>
         </p:nvSpPr>
@@ -9541,7 +10787,7 @@
                 <a:ea typeface="Arial" pitchFamily="34" charset="-122"/>
                 <a:cs typeface="Arial" pitchFamily="34" charset="-120"/>
               </a:rPr>
-              <a:t>OPERATIONS</a:t>
+              <a:t>BILLING</a:t>
             </a:r>
             <a:endParaRPr lang="en-US" sz="900" dirty="0"/>
           </a:p>
@@ -9580,7 +10826,7 @@
                 <a:ea typeface="Arial" pitchFamily="34" charset="-122"/>
                 <a:cs typeface="Arial" pitchFamily="34" charset="-120"/>
               </a:rPr>
-              <a:t>Maintenance requests</a:t>
+              <a:t>Payments and receipts</a:t>
             </a:r>
             <a:endParaRPr lang="en-US" sz="2600" dirty="0"/>
           </a:p>
@@ -9588,14 +10834,78 @@
       </p:sp>
       <p:sp>
         <p:nvSpPr>
-          <p:cNvPr id="4" name="Text 2"/>
+          <p:cNvPr id="4" name="Shape 2"/>
           <p:cNvSpPr/>
           <p:nvPr/>
         </p:nvSpPr>
         <p:spPr>
           <a:xfrm>
             <a:off x="457200" y="1188720"/>
-            <a:ext cx="3337560" cy="3291840"/>
+            <a:ext cx="310896" cy="310896"/>
+          </a:xfrm>
+          <a:prstGeom prst="ellipse">
+            <a:avLst/>
+          </a:prstGeom>
+          <a:solidFill>
+            <a:srgbClr val="DCF1ED"/>
+          </a:solidFill>
+          <a:ln w="12700">
+            <a:solidFill>
+              <a:srgbClr val="DCF1ED"/>
+            </a:solidFill>
+            <a:prstDash val="solid"/>
+          </a:ln>
+        </p:spPr>
+      </p:sp>
+      <p:sp>
+        <p:nvSpPr>
+          <p:cNvPr id="5" name="Text 3"/>
+          <p:cNvSpPr/>
+          <p:nvPr/>
+        </p:nvSpPr>
+        <p:spPr>
+          <a:xfrm>
+            <a:off x="457200" y="1188720"/>
+            <a:ext cx="310896" cy="310896"/>
+          </a:xfrm>
+          <a:prstGeom prst="rect">
+            <a:avLst/>
+          </a:prstGeom>
+          <a:noFill/>
+          <a:ln/>
+        </p:spPr>
+        <p:txBody>
+          <a:bodyPr wrap="square" lIns="0" tIns="0" rIns="0" bIns="0" rtlCol="0" anchor="ctr"/>
+          <a:lstStyle/>
+          <a:p>
+            <a:pPr algn="ctr" indent="0" marL="0">
+              <a:buNone/>
+            </a:pPr>
+            <a:r>
+              <a:rPr lang="en-US" sz="1100" b="1" dirty="0">
+                <a:solidFill>
+                  <a:srgbClr val="0B4F4A"/>
+                </a:solidFill>
+                <a:latin typeface="Arial" pitchFamily="34" charset="0"/>
+                <a:ea typeface="Arial" pitchFamily="34" charset="-122"/>
+                <a:cs typeface="Arial" pitchFamily="34" charset="-120"/>
+              </a:rPr>
+              <a:t>1</a:t>
+            </a:r>
+            <a:endParaRPr lang="en-US" sz="1100" dirty="0"/>
+          </a:p>
+        </p:txBody>
+      </p:sp>
+      <p:sp>
+        <p:nvSpPr>
+          <p:cNvPr id="6" name="Text 4"/>
+          <p:cNvSpPr/>
+          <p:nvPr/>
+        </p:nvSpPr>
+        <p:spPr>
+          <a:xfrm>
+            <a:off x="896112" y="1152144"/>
+            <a:ext cx="2926080" cy="795528"/>
           </a:xfrm>
           <a:prstGeom prst="rect">
             <a:avLst/>
@@ -9607,15 +10917,11 @@
           <a:bodyPr wrap="square" lIns="0" tIns="0" rIns="0" bIns="0" rtlCol="0" anchor="t"/>
           <a:lstStyle/>
           <a:p>
-            <a:pPr marL="177800" indent="-177800">
-              <a:spcAft>
-                <a:spcPts val="700"/>
-              </a:spcAft>
-              <a:buSzPct val="100000"/>
-              <a:buChar char="•"/>
-            </a:pPr>
-            <a:r>
-              <a:rPr lang="en-US" sz="1250" dirty="0">
+            <a:pPr indent="0" marL="0">
+              <a:buNone/>
+            </a:pPr>
+            <a:r>
+              <a:rPr lang="en-US" sz="1200" b="1" dirty="0">
                 <a:solidFill>
                   <a:srgbClr val="0F1F1E"/>
                 </a:solidFill>
@@ -9623,20 +10929,119 @@
                 <a:ea typeface="Arial" pitchFamily="34" charset="-122"/>
                 <a:cs typeface="Arial" pitchFamily="34" charset="-120"/>
               </a:rPr>
-              <a:t>Renters report problems from their phone, with photos.</a:t>
-            </a:r>
-            <a:endParaRPr lang="en-US" sz="1250" dirty="0"/>
-          </a:p>
-          <a:p>
-            <a:pPr marL="177800" indent="-177800">
-              <a:spcAft>
-                <a:spcPts val="700"/>
-              </a:spcAft>
-              <a:buSzPct val="100000"/>
-              <a:buChar char="•"/>
-            </a:pPr>
-            <a:r>
-              <a:rPr lang="en-US" sz="1250" dirty="0">
+              <a:t>Record the payment</a:t>
+            </a:r>
+            <a:endParaRPr lang="en-US" sz="1200" dirty="0"/>
+          </a:p>
+          <a:p>
+            <a:pPr indent="0" marL="0">
+              <a:buNone/>
+            </a:pPr>
+            <a:r>
+              <a:rPr lang="en-US" sz="1050" dirty="0">
+                <a:solidFill>
+                  <a:srgbClr val="56696A"/>
+                </a:solidFill>
+                <a:latin typeface="Arial" pitchFamily="34" charset="0"/>
+                <a:ea typeface="Arial" pitchFamily="34" charset="-122"/>
+                <a:cs typeface="Arial" pitchFamily="34" charset="-120"/>
+              </a:rPr>
+              <a:t>Cash, bank transfer, mobile money, cheque or card. Part payments are fine.</a:t>
+            </a:r>
+            <a:endParaRPr lang="en-US" sz="1200" dirty="0"/>
+          </a:p>
+        </p:txBody>
+      </p:sp>
+      <p:sp>
+        <p:nvSpPr>
+          <p:cNvPr id="7" name="Shape 5"/>
+          <p:cNvSpPr/>
+          <p:nvPr/>
+        </p:nvSpPr>
+        <p:spPr>
+          <a:xfrm>
+            <a:off x="457200" y="2057400"/>
+            <a:ext cx="310896" cy="310896"/>
+          </a:xfrm>
+          <a:prstGeom prst="ellipse">
+            <a:avLst/>
+          </a:prstGeom>
+          <a:solidFill>
+            <a:srgbClr val="DCF1ED"/>
+          </a:solidFill>
+          <a:ln w="12700">
+            <a:solidFill>
+              <a:srgbClr val="DCF1ED"/>
+            </a:solidFill>
+            <a:prstDash val="solid"/>
+          </a:ln>
+        </p:spPr>
+      </p:sp>
+      <p:sp>
+        <p:nvSpPr>
+          <p:cNvPr id="8" name="Text 6"/>
+          <p:cNvSpPr/>
+          <p:nvPr/>
+        </p:nvSpPr>
+        <p:spPr>
+          <a:xfrm>
+            <a:off x="457200" y="2057400"/>
+            <a:ext cx="310896" cy="310896"/>
+          </a:xfrm>
+          <a:prstGeom prst="rect">
+            <a:avLst/>
+          </a:prstGeom>
+          <a:noFill/>
+          <a:ln/>
+        </p:spPr>
+        <p:txBody>
+          <a:bodyPr wrap="square" lIns="0" tIns="0" rIns="0" bIns="0" rtlCol="0" anchor="ctr"/>
+          <a:lstStyle/>
+          <a:p>
+            <a:pPr algn="ctr" indent="0" marL="0">
+              <a:buNone/>
+            </a:pPr>
+            <a:r>
+              <a:rPr lang="en-US" sz="1100" b="1" dirty="0">
+                <a:solidFill>
+                  <a:srgbClr val="0B4F4A"/>
+                </a:solidFill>
+                <a:latin typeface="Arial" pitchFamily="34" charset="0"/>
+                <a:ea typeface="Arial" pitchFamily="34" charset="-122"/>
+                <a:cs typeface="Arial" pitchFamily="34" charset="-120"/>
+              </a:rPr>
+              <a:t>2</a:t>
+            </a:r>
+            <a:endParaRPr lang="en-US" sz="1100" dirty="0"/>
+          </a:p>
+        </p:txBody>
+      </p:sp>
+      <p:sp>
+        <p:nvSpPr>
+          <p:cNvPr id="9" name="Text 7"/>
+          <p:cNvSpPr/>
+          <p:nvPr/>
+        </p:nvSpPr>
+        <p:spPr>
+          <a:xfrm>
+            <a:off x="896112" y="2020824"/>
+            <a:ext cx="2926080" cy="795528"/>
+          </a:xfrm>
+          <a:prstGeom prst="rect">
+            <a:avLst/>
+          </a:prstGeom>
+          <a:noFill/>
+          <a:ln/>
+        </p:spPr>
+        <p:txBody>
+          <a:bodyPr wrap="square" lIns="0" tIns="0" rIns="0" bIns="0" rtlCol="0" anchor="t"/>
+          <a:lstStyle/>
+          <a:p>
+            <a:pPr indent="0" marL="0">
+              <a:buNone/>
+            </a:pPr>
+            <a:r>
+              <a:rPr lang="en-US" sz="1200" b="1" dirty="0">
                 <a:solidFill>
                   <a:srgbClr val="0F1F1E"/>
                 </a:solidFill>
@@ -9644,20 +11049,119 @@
                 <a:ea typeface="Arial" pitchFamily="34" charset="-122"/>
                 <a:cs typeface="Arial" pitchFamily="34" charset="-120"/>
               </a:rPr>
-              <a:t>The owner, managers and maintenance staff are notified straight away.</a:t>
-            </a:r>
-            <a:endParaRPr lang="en-US" sz="1250" dirty="0"/>
-          </a:p>
-          <a:p>
-            <a:pPr marL="177800" indent="-177800">
-              <a:spcAft>
-                <a:spcPts val="700"/>
-              </a:spcAft>
-              <a:buSzPct val="100000"/>
-              <a:buChar char="•"/>
-            </a:pPr>
-            <a:r>
-              <a:rPr lang="en-US" sz="1250" dirty="0">
+              <a:t>Balance updates</a:t>
+            </a:r>
+            <a:endParaRPr lang="en-US" sz="1200" dirty="0"/>
+          </a:p>
+          <a:p>
+            <a:pPr indent="0" marL="0">
+              <a:buNone/>
+            </a:pPr>
+            <a:r>
+              <a:rPr lang="en-US" sz="1050" dirty="0">
+                <a:solidFill>
+                  <a:srgbClr val="56696A"/>
+                </a:solidFill>
+                <a:latin typeface="Arial" pitchFamily="34" charset="0"/>
+                <a:ea typeface="Arial" pitchFamily="34" charset="-122"/>
+                <a:cs typeface="Arial" pitchFamily="34" charset="-120"/>
+              </a:rPr>
+              <a:t>The invoice becomes partial or paid.</a:t>
+            </a:r>
+            <a:endParaRPr lang="en-US" sz="1200" dirty="0"/>
+          </a:p>
+        </p:txBody>
+      </p:sp>
+      <p:sp>
+        <p:nvSpPr>
+          <p:cNvPr id="10" name="Shape 8"/>
+          <p:cNvSpPr/>
+          <p:nvPr/>
+        </p:nvSpPr>
+        <p:spPr>
+          <a:xfrm>
+            <a:off x="457200" y="2926080"/>
+            <a:ext cx="310896" cy="310896"/>
+          </a:xfrm>
+          <a:prstGeom prst="ellipse">
+            <a:avLst/>
+          </a:prstGeom>
+          <a:solidFill>
+            <a:srgbClr val="DCF1ED"/>
+          </a:solidFill>
+          <a:ln w="12700">
+            <a:solidFill>
+              <a:srgbClr val="DCF1ED"/>
+            </a:solidFill>
+            <a:prstDash val="solid"/>
+          </a:ln>
+        </p:spPr>
+      </p:sp>
+      <p:sp>
+        <p:nvSpPr>
+          <p:cNvPr id="11" name="Text 9"/>
+          <p:cNvSpPr/>
+          <p:nvPr/>
+        </p:nvSpPr>
+        <p:spPr>
+          <a:xfrm>
+            <a:off x="457200" y="2926080"/>
+            <a:ext cx="310896" cy="310896"/>
+          </a:xfrm>
+          <a:prstGeom prst="rect">
+            <a:avLst/>
+          </a:prstGeom>
+          <a:noFill/>
+          <a:ln/>
+        </p:spPr>
+        <p:txBody>
+          <a:bodyPr wrap="square" lIns="0" tIns="0" rIns="0" bIns="0" rtlCol="0" anchor="ctr"/>
+          <a:lstStyle/>
+          <a:p>
+            <a:pPr algn="ctr" indent="0" marL="0">
+              <a:buNone/>
+            </a:pPr>
+            <a:r>
+              <a:rPr lang="en-US" sz="1100" b="1" dirty="0">
+                <a:solidFill>
+                  <a:srgbClr val="0B4F4A"/>
+                </a:solidFill>
+                <a:latin typeface="Arial" pitchFamily="34" charset="0"/>
+                <a:ea typeface="Arial" pitchFamily="34" charset="-122"/>
+                <a:cs typeface="Arial" pitchFamily="34" charset="-120"/>
+              </a:rPr>
+              <a:t>3</a:t>
+            </a:r>
+            <a:endParaRPr lang="en-US" sz="1100" dirty="0"/>
+          </a:p>
+        </p:txBody>
+      </p:sp>
+      <p:sp>
+        <p:nvSpPr>
+          <p:cNvPr id="12" name="Text 10"/>
+          <p:cNvSpPr/>
+          <p:nvPr/>
+        </p:nvSpPr>
+        <p:spPr>
+          <a:xfrm>
+            <a:off x="896112" y="2889504"/>
+            <a:ext cx="2926080" cy="795528"/>
+          </a:xfrm>
+          <a:prstGeom prst="rect">
+            <a:avLst/>
+          </a:prstGeom>
+          <a:noFill/>
+          <a:ln/>
+        </p:spPr>
+        <p:txBody>
+          <a:bodyPr wrap="square" lIns="0" tIns="0" rIns="0" bIns="0" rtlCol="0" anchor="t"/>
+          <a:lstStyle/>
+          <a:p>
+            <a:pPr indent="0" marL="0">
+              <a:buNone/>
+            </a:pPr>
+            <a:r>
+              <a:rPr lang="en-US" sz="1200" b="1" dirty="0">
                 <a:solidFill>
                   <a:srgbClr val="0F1F1E"/>
                 </a:solidFill>
@@ -9665,43 +11169,39 @@
                 <a:ea typeface="Arial" pitchFamily="34" charset="-122"/>
                 <a:cs typeface="Arial" pitchFamily="34" charset="-120"/>
               </a:rPr>
-              <a:t>Press Start when work begins and Complete when it's done; the renter sees each step.</a:t>
-            </a:r>
-            <a:endParaRPr lang="en-US" sz="1250" dirty="0"/>
-          </a:p>
-          <a:p>
-            <a:pPr marL="177800" indent="-177800">
-              <a:spcAft>
-                <a:spcPts val="700"/>
-              </a:spcAft>
-              <a:buSzPct val="100000"/>
-              <a:buChar char="•"/>
-            </a:pPr>
-            <a:r>
-              <a:rPr lang="en-US" sz="1250" dirty="0">
-                <a:solidFill>
-                  <a:srgbClr val="0F1F1E"/>
-                </a:solidFill>
-                <a:latin typeface="Arial" pitchFamily="34" charset="0"/>
-                <a:ea typeface="Arial" pitchFamily="34" charset="-122"/>
-                <a:cs typeface="Arial" pitchFamily="34" charset="-120"/>
-              </a:rPr>
-              <a:t>Notes on each request keep a record of what was done.</a:t>
-            </a:r>
-            <a:endParaRPr lang="en-US" sz="1250" dirty="0"/>
-          </a:p>
-        </p:txBody>
-      </p:sp>
-      <p:sp>
-        <p:nvSpPr>
-          <p:cNvPr id="5" name="Shape 3"/>
+              <a:t>Receipt goes out</a:t>
+            </a:r>
+            <a:endParaRPr lang="en-US" sz="1200" dirty="0"/>
+          </a:p>
+          <a:p>
+            <a:pPr indent="0" marL="0">
+              <a:buNone/>
+            </a:pPr>
+            <a:r>
+              <a:rPr lang="en-US" sz="1050" dirty="0">
+                <a:solidFill>
+                  <a:srgbClr val="56696A"/>
+                </a:solidFill>
+                <a:latin typeface="Arial" pitchFamily="34" charset="0"/>
+                <a:ea typeface="Arial" pitchFamily="34" charset="-122"/>
+                <a:cs typeface="Arial" pitchFamily="34" charset="-120"/>
+              </a:rPr>
+              <a:t>A numbered PDF receipt is emailed to the renter automatically.</a:t>
+            </a:r>
+            <a:endParaRPr lang="en-US" sz="1200" dirty="0"/>
+          </a:p>
+        </p:txBody>
+      </p:sp>
+      <p:sp>
+        <p:nvSpPr>
+          <p:cNvPr id="13" name="Shape 11"/>
           <p:cNvSpPr/>
           <p:nvPr/>
         </p:nvSpPr>
         <p:spPr>
           <a:xfrm>
             <a:off x="4169664" y="1152144"/>
-            <a:ext cx="4553712" cy="3226139"/>
+            <a:ext cx="4553712" cy="3227230"/>
           </a:xfrm>
           <a:prstGeom prst="rect">
             <a:avLst/>
@@ -9726,7 +11226,7 @@
       </p:sp>
       <p:pic>
         <p:nvPicPr>
-          <p:cNvPr id="6" name="Image 0" descr="Maintenance requests">    </p:cNvPr>
+          <p:cNvPr id="14" name="Image 0" descr="Recording a payment">    </p:cNvPr>
           <p:cNvPicPr>
             <a:picLocks noChangeAspect="1"/>
           </p:cNvPicPr>
@@ -9741,7 +11241,7 @@
         <p:spPr>
           <a:xfrm>
             <a:off x="4206240" y="1188720"/>
-            <a:ext cx="4480560" cy="3152987"/>
+            <a:ext cx="4480560" cy="3154078"/>
           </a:xfrm>
           <a:prstGeom prst="rect">
             <a:avLst/>
@@ -9750,7 +11250,7 @@
       </p:pic>
       <p:sp>
         <p:nvSpPr>
-          <p:cNvPr id="7" name="Text 4"/>
+          <p:cNvPr id="15" name="Text 12"/>
           <p:cNvSpPr/>
           <p:nvPr/>
         </p:nvSpPr>
@@ -9789,7 +11289,7 @@
       </p:sp>
       <p:sp>
         <p:nvSpPr>
-          <p:cNvPr id="8" name="Text 5"/>
+          <p:cNvPr id="16" name="Text 13"/>
           <p:cNvSpPr/>
           <p:nvPr/>
         </p:nvSpPr>
@@ -9884,7 +11384,7 @@
                 <a:ea typeface="Arial" pitchFamily="34" charset="-122"/>
                 <a:cs typeface="Arial" pitchFamily="34" charset="-120"/>
               </a:rPr>
-              <a:t>MARKETING</a:t>
+              <a:t>OPERATIONS</a:t>
             </a:r>
             <a:endParaRPr lang="en-US" sz="900" dirty="0"/>
           </a:p>
@@ -9923,7 +11423,7 @@
                 <a:ea typeface="Arial" pitchFamily="34" charset="-122"/>
                 <a:cs typeface="Arial" pitchFamily="34" charset="-120"/>
               </a:rPr>
-              <a:t>Your own website</a:t>
+              <a:t>Maintenance requests</a:t>
             </a:r>
             <a:endParaRPr lang="en-US" sz="2600" dirty="0"/>
           </a:p>
@@ -9966,7 +11466,7 @@
                 <a:ea typeface="Arial" pitchFamily="34" charset="-122"/>
                 <a:cs typeface="Arial" pitchFamily="34" charset="-120"/>
               </a:rPr>
-              <a:t>Home, About, Units, News and Contact pages under your name.</a:t>
+              <a:t>Renters report problems from their phone, with photos.</a:t>
             </a:r>
             <a:endParaRPr lang="en-US" sz="1250" dirty="0"/>
           </a:p>
@@ -9987,7 +11487,7 @@
                 <a:ea typeface="Arial" pitchFamily="34" charset="-122"/>
                 <a:cs typeface="Arial" pitchFamily="34" charset="-120"/>
               </a:rPr>
-              <a:t>Vacant units are listed automatically, with search and filters.</a:t>
+              <a:t>The owner, managers and maintenance staff are notified straight away.</a:t>
             </a:r>
             <a:endParaRPr lang="en-US" sz="1250" dirty="0"/>
           </a:p>
@@ -10008,7 +11508,7 @@
                 <a:ea typeface="Arial" pitchFamily="34" charset="-122"/>
                 <a:cs typeface="Arial" pitchFamily="34" charset="-120"/>
               </a:rPr>
-              <a:t>Messages from the contact form land in your inbox.</a:t>
+              <a:t>Press Start when work begins and Complete when it's done; the renter sees each step.</a:t>
             </a:r>
             <a:endParaRPr lang="en-US" sz="1250" dirty="0"/>
           </a:p>
@@ -10029,7 +11529,7 @@
                 <a:ea typeface="Arial" pitchFamily="34" charset="-122"/>
                 <a:cs typeface="Arial" pitchFamily="34" charset="-120"/>
               </a:rPr>
-              <a:t>Post announcements, such as new units or a water cut.</a:t>
+              <a:t>Notes on each request keep a record of what was done.</a:t>
             </a:r>
             <a:endParaRPr lang="en-US" sz="1250" dirty="0"/>
           </a:p>
@@ -10044,7 +11544,7 @@
         <p:spPr>
           <a:xfrm>
             <a:off x="4169664" y="1152144"/>
-            <a:ext cx="4553712" cy="3225546"/>
+            <a:ext cx="4553712" cy="3226139"/>
           </a:xfrm>
           <a:prstGeom prst="rect">
             <a:avLst/>
@@ -10069,7 +11569,7 @@
       </p:sp>
       <p:pic>
         <p:nvPicPr>
-          <p:cNvPr id="6" name="Image 0" descr="A client website listing vacant units">    </p:cNvPr>
+          <p:cNvPr id="6" name="Image 0" descr="Maintenance requests">    </p:cNvPr>
           <p:cNvPicPr>
             <a:picLocks noChangeAspect="1"/>
           </p:cNvPicPr>
@@ -10084,7 +11584,7 @@
         <p:spPr>
           <a:xfrm>
             <a:off x="4206240" y="1188720"/>
-            <a:ext cx="4480560" cy="3152394"/>
+            <a:ext cx="4480560" cy="3152987"/>
           </a:xfrm>
           <a:prstGeom prst="rect">
             <a:avLst/>
